--- a/site-assets/sources/day6/fig-ja-en.pptx
+++ b/site-assets/sources/day6/fig-ja-en.pptx
@@ -2630,6 +2630,1868 @@
           <a:chExt cx="0" cy="0"/>
         </a:xfrm>
       </p:grpSpPr>
+      <p:grpSp>
+        <p:nvGrpSpPr>
+          <p:cNvPr id="7" name="グループ化 6"/>
+          <p:cNvGrpSpPr/>
+          <p:nvPr/>
+        </p:nvGrpSpPr>
+        <p:grpSpPr>
+          <a:xfrm>
+            <a:off x="2792760" y="2708920"/>
+            <a:ext cx="1437775" cy="1444550"/>
+            <a:chOff x="2075065" y="548680"/>
+            <a:chExt cx="1437775" cy="1444550"/>
+          </a:xfrm>
+        </p:grpSpPr>
+        <p:sp>
+          <p:nvSpPr>
+            <p:cNvPr id="3" name="正方形/長方形 2"/>
+            <p:cNvSpPr/>
+            <p:nvPr/>
+          </p:nvSpPr>
+          <p:spPr>
+            <a:xfrm>
+              <a:off x="2075065" y="548680"/>
+              <a:ext cx="720080" cy="720080"/>
+            </a:xfrm>
+            <a:prstGeom prst="rect">
+              <a:avLst/>
+            </a:prstGeom>
+            <a:solidFill>
+              <a:srgbClr val="FF0000"/>
+            </a:solidFill>
+            <a:ln>
+              <a:solidFill>
+                <a:schemeClr val="tx1"/>
+              </a:solidFill>
+            </a:ln>
+          </p:spPr>
+          <p:style>
+            <a:lnRef idx="2">
+              <a:schemeClr val="accent1">
+                <a:shade val="50000"/>
+              </a:schemeClr>
+            </a:lnRef>
+            <a:fillRef idx="1">
+              <a:schemeClr val="accent1"/>
+            </a:fillRef>
+            <a:effectRef idx="0">
+              <a:schemeClr val="accent1"/>
+            </a:effectRef>
+            <a:fontRef idx="minor">
+              <a:schemeClr val="lt1"/>
+            </a:fontRef>
+          </p:style>
+          <p:txBody>
+            <a:bodyPr rtlCol="0" anchor="ctr"/>
+            <a:lstStyle/>
+            <a:p>
+              <a:pPr algn="ctr">
+                <a:defRPr/>
+              </a:pPr>
+              <a:r>
+                <a:rPr kumimoji="1" lang="en-US" altLang="ja-JP" dirty="0"/>
+                <a:t>CPU</a:t>
+              </a:r>
+            </a:p>
+            <a:p>
+              <a:pPr algn="ctr">
+                <a:defRPr/>
+              </a:pPr>
+              <a:r>
+                <a:rPr kumimoji="1" lang="en-US" altLang="ja-JP" dirty="0"/>
+                <a:t>CORE</a:t>
+              </a:r>
+              <a:endParaRPr kumimoji="1" lang="ja-JP" altLang="en-US" dirty="0"/>
+            </a:p>
+          </p:txBody>
+        </p:sp>
+        <p:sp>
+          <p:nvSpPr>
+            <p:cNvPr id="4" name="正方形/長方形 3"/>
+            <p:cNvSpPr/>
+            <p:nvPr/>
+          </p:nvSpPr>
+          <p:spPr>
+            <a:xfrm>
+              <a:off x="2792760" y="553070"/>
+              <a:ext cx="720080" cy="720080"/>
+            </a:xfrm>
+            <a:prstGeom prst="rect">
+              <a:avLst/>
+            </a:prstGeom>
+            <a:solidFill>
+              <a:srgbClr val="FF0000"/>
+            </a:solidFill>
+            <a:ln>
+              <a:solidFill>
+                <a:schemeClr val="tx1"/>
+              </a:solidFill>
+            </a:ln>
+          </p:spPr>
+          <p:style>
+            <a:lnRef idx="2">
+              <a:schemeClr val="accent1">
+                <a:shade val="50000"/>
+              </a:schemeClr>
+            </a:lnRef>
+            <a:fillRef idx="1">
+              <a:schemeClr val="accent1"/>
+            </a:fillRef>
+            <a:effectRef idx="0">
+              <a:schemeClr val="accent1"/>
+            </a:effectRef>
+            <a:fontRef idx="minor">
+              <a:schemeClr val="lt1"/>
+            </a:fontRef>
+          </p:style>
+          <p:txBody>
+            <a:bodyPr rtlCol="0" anchor="ctr"/>
+            <a:lstStyle/>
+            <a:p>
+              <a:pPr algn="ctr">
+                <a:defRPr/>
+              </a:pPr>
+              <a:r>
+                <a:rPr kumimoji="1" lang="en-US" altLang="ja-JP" dirty="0"/>
+                <a:t>CPU</a:t>
+              </a:r>
+            </a:p>
+            <a:p>
+              <a:pPr algn="ctr">
+                <a:defRPr/>
+              </a:pPr>
+              <a:r>
+                <a:rPr kumimoji="1" lang="en-US" altLang="ja-JP" dirty="0"/>
+                <a:t>CORE</a:t>
+              </a:r>
+              <a:endParaRPr kumimoji="1" lang="ja-JP" altLang="en-US" dirty="0"/>
+            </a:p>
+          </p:txBody>
+        </p:sp>
+        <p:sp>
+          <p:nvSpPr>
+            <p:cNvPr id="5" name="正方形/長方形 4"/>
+            <p:cNvSpPr/>
+            <p:nvPr/>
+          </p:nvSpPr>
+          <p:spPr>
+            <a:xfrm>
+              <a:off x="2075065" y="1273150"/>
+              <a:ext cx="720080" cy="720080"/>
+            </a:xfrm>
+            <a:prstGeom prst="rect">
+              <a:avLst/>
+            </a:prstGeom>
+            <a:solidFill>
+              <a:srgbClr val="FF0000"/>
+            </a:solidFill>
+            <a:ln>
+              <a:solidFill>
+                <a:schemeClr val="tx1"/>
+              </a:solidFill>
+            </a:ln>
+          </p:spPr>
+          <p:style>
+            <a:lnRef idx="2">
+              <a:schemeClr val="accent1">
+                <a:shade val="50000"/>
+              </a:schemeClr>
+            </a:lnRef>
+            <a:fillRef idx="1">
+              <a:schemeClr val="accent1"/>
+            </a:fillRef>
+            <a:effectRef idx="0">
+              <a:schemeClr val="accent1"/>
+            </a:effectRef>
+            <a:fontRef idx="minor">
+              <a:schemeClr val="lt1"/>
+            </a:fontRef>
+          </p:style>
+          <p:txBody>
+            <a:bodyPr rtlCol="0" anchor="ctr"/>
+            <a:lstStyle/>
+            <a:p>
+              <a:pPr algn="ctr">
+                <a:defRPr/>
+              </a:pPr>
+              <a:r>
+                <a:rPr lang="en-US" altLang="ja-JP" dirty="0"/>
+                <a:t>CPU</a:t>
+              </a:r>
+              <a:br>
+                <a:rPr lang="en-US" altLang="ja-JP" dirty="0"/>
+              </a:br>
+              <a:r>
+                <a:rPr lang="en-US" altLang="ja-JP" dirty="0"/>
+                <a:t>CORE</a:t>
+              </a:r>
+              <a:endParaRPr kumimoji="1" lang="ja-JP" altLang="en-US" dirty="0"/>
+            </a:p>
+          </p:txBody>
+        </p:sp>
+        <p:sp>
+          <p:nvSpPr>
+            <p:cNvPr id="6" name="正方形/長方形 5"/>
+            <p:cNvSpPr/>
+            <p:nvPr/>
+          </p:nvSpPr>
+          <p:spPr>
+            <a:xfrm>
+              <a:off x="2792760" y="1273150"/>
+              <a:ext cx="720080" cy="720080"/>
+            </a:xfrm>
+            <a:prstGeom prst="rect">
+              <a:avLst/>
+            </a:prstGeom>
+            <a:solidFill>
+              <a:srgbClr val="FF0000"/>
+            </a:solidFill>
+            <a:ln>
+              <a:solidFill>
+                <a:schemeClr val="tx1"/>
+              </a:solidFill>
+            </a:ln>
+          </p:spPr>
+          <p:style>
+            <a:lnRef idx="2">
+              <a:schemeClr val="accent1">
+                <a:shade val="50000"/>
+              </a:schemeClr>
+            </a:lnRef>
+            <a:fillRef idx="1">
+              <a:schemeClr val="accent1"/>
+            </a:fillRef>
+            <a:effectRef idx="0">
+              <a:schemeClr val="accent1"/>
+            </a:effectRef>
+            <a:fontRef idx="minor">
+              <a:schemeClr val="lt1"/>
+            </a:fontRef>
+          </p:style>
+          <p:txBody>
+            <a:bodyPr rtlCol="0" anchor="ctr"/>
+            <a:lstStyle/>
+            <a:p>
+              <a:pPr algn="ctr">
+                <a:defRPr/>
+              </a:pPr>
+              <a:r>
+                <a:rPr kumimoji="1" lang="en-US" altLang="ja-JP" dirty="0"/>
+                <a:t>CPU</a:t>
+              </a:r>
+            </a:p>
+            <a:p>
+              <a:pPr algn="ctr">
+                <a:defRPr/>
+              </a:pPr>
+              <a:r>
+                <a:rPr lang="en-US" altLang="ja-JP" dirty="0"/>
+                <a:t>CORE</a:t>
+              </a:r>
+              <a:endParaRPr kumimoji="1" lang="ja-JP" altLang="en-US" dirty="0"/>
+            </a:p>
+          </p:txBody>
+        </p:sp>
+      </p:grpSp>
+      <p:grpSp>
+        <p:nvGrpSpPr>
+          <p:cNvPr id="8" name="グループ化 7"/>
+          <p:cNvGrpSpPr/>
+          <p:nvPr/>
+        </p:nvGrpSpPr>
+        <p:grpSpPr>
+          <a:xfrm>
+            <a:off x="4953000" y="553792"/>
+            <a:ext cx="1437775" cy="1444550"/>
+            <a:chOff x="2075065" y="548680"/>
+            <a:chExt cx="1437775" cy="1444550"/>
+          </a:xfrm>
+        </p:grpSpPr>
+        <p:sp>
+          <p:nvSpPr>
+            <p:cNvPr id="9" name="正方形/長方形 8"/>
+            <p:cNvSpPr/>
+            <p:nvPr/>
+          </p:nvSpPr>
+          <p:spPr>
+            <a:xfrm>
+              <a:off x="2075065" y="548680"/>
+              <a:ext cx="720080" cy="720080"/>
+            </a:xfrm>
+            <a:prstGeom prst="rect">
+              <a:avLst/>
+            </a:prstGeom>
+            <a:solidFill>
+              <a:srgbClr val="FF0000"/>
+            </a:solidFill>
+            <a:ln>
+              <a:solidFill>
+                <a:schemeClr val="tx1"/>
+              </a:solidFill>
+            </a:ln>
+          </p:spPr>
+          <p:style>
+            <a:lnRef idx="2">
+              <a:schemeClr val="accent1">
+                <a:shade val="50000"/>
+              </a:schemeClr>
+            </a:lnRef>
+            <a:fillRef idx="1">
+              <a:schemeClr val="accent1"/>
+            </a:fillRef>
+            <a:effectRef idx="0">
+              <a:schemeClr val="accent1"/>
+            </a:effectRef>
+            <a:fontRef idx="minor">
+              <a:schemeClr val="lt1"/>
+            </a:fontRef>
+          </p:style>
+          <p:txBody>
+            <a:bodyPr rtlCol="0" anchor="ctr"/>
+            <a:lstStyle/>
+            <a:p>
+              <a:pPr algn="ctr">
+                <a:defRPr/>
+              </a:pPr>
+              <a:r>
+                <a:rPr kumimoji="1" lang="en-US" altLang="ja-JP" dirty="0"/>
+                <a:t>CPU</a:t>
+              </a:r>
+            </a:p>
+            <a:p>
+              <a:pPr algn="ctr">
+                <a:defRPr/>
+              </a:pPr>
+              <a:r>
+                <a:rPr kumimoji="1" lang="en-US" altLang="ja-JP" dirty="0"/>
+                <a:t>CORE</a:t>
+              </a:r>
+              <a:endParaRPr kumimoji="1" lang="ja-JP" altLang="en-US" dirty="0"/>
+            </a:p>
+          </p:txBody>
+        </p:sp>
+        <p:sp>
+          <p:nvSpPr>
+            <p:cNvPr id="10" name="正方形/長方形 9"/>
+            <p:cNvSpPr/>
+            <p:nvPr/>
+          </p:nvSpPr>
+          <p:spPr>
+            <a:xfrm>
+              <a:off x="2792760" y="553070"/>
+              <a:ext cx="720080" cy="720080"/>
+            </a:xfrm>
+            <a:prstGeom prst="rect">
+              <a:avLst/>
+            </a:prstGeom>
+            <a:solidFill>
+              <a:srgbClr val="FF0000"/>
+            </a:solidFill>
+            <a:ln>
+              <a:solidFill>
+                <a:schemeClr val="tx1"/>
+              </a:solidFill>
+            </a:ln>
+          </p:spPr>
+          <p:style>
+            <a:lnRef idx="2">
+              <a:schemeClr val="accent1">
+                <a:shade val="50000"/>
+              </a:schemeClr>
+            </a:lnRef>
+            <a:fillRef idx="1">
+              <a:schemeClr val="accent1"/>
+            </a:fillRef>
+            <a:effectRef idx="0">
+              <a:schemeClr val="accent1"/>
+            </a:effectRef>
+            <a:fontRef idx="minor">
+              <a:schemeClr val="lt1"/>
+            </a:fontRef>
+          </p:style>
+          <p:txBody>
+            <a:bodyPr rtlCol="0" anchor="ctr"/>
+            <a:lstStyle/>
+            <a:p>
+              <a:pPr algn="ctr">
+                <a:defRPr/>
+              </a:pPr>
+              <a:r>
+                <a:rPr kumimoji="1" lang="en-US" altLang="ja-JP" dirty="0"/>
+                <a:t>CPU</a:t>
+              </a:r>
+            </a:p>
+            <a:p>
+              <a:pPr algn="ctr">
+                <a:defRPr/>
+              </a:pPr>
+              <a:r>
+                <a:rPr kumimoji="1" lang="en-US" altLang="ja-JP" dirty="0"/>
+                <a:t>CORE</a:t>
+              </a:r>
+              <a:endParaRPr kumimoji="1" lang="ja-JP" altLang="en-US" dirty="0"/>
+            </a:p>
+          </p:txBody>
+        </p:sp>
+        <p:sp>
+          <p:nvSpPr>
+            <p:cNvPr id="11" name="正方形/長方形 10"/>
+            <p:cNvSpPr/>
+            <p:nvPr/>
+          </p:nvSpPr>
+          <p:spPr>
+            <a:xfrm>
+              <a:off x="2075065" y="1273150"/>
+              <a:ext cx="720080" cy="720080"/>
+            </a:xfrm>
+            <a:prstGeom prst="rect">
+              <a:avLst/>
+            </a:prstGeom>
+            <a:solidFill>
+              <a:srgbClr val="FF0000"/>
+            </a:solidFill>
+            <a:ln>
+              <a:solidFill>
+                <a:schemeClr val="tx1"/>
+              </a:solidFill>
+            </a:ln>
+          </p:spPr>
+          <p:style>
+            <a:lnRef idx="2">
+              <a:schemeClr val="accent1">
+                <a:shade val="50000"/>
+              </a:schemeClr>
+            </a:lnRef>
+            <a:fillRef idx="1">
+              <a:schemeClr val="accent1"/>
+            </a:fillRef>
+            <a:effectRef idx="0">
+              <a:schemeClr val="accent1"/>
+            </a:effectRef>
+            <a:fontRef idx="minor">
+              <a:schemeClr val="lt1"/>
+            </a:fontRef>
+          </p:style>
+          <p:txBody>
+            <a:bodyPr rtlCol="0" anchor="ctr"/>
+            <a:lstStyle/>
+            <a:p>
+              <a:pPr algn="ctr">
+                <a:defRPr/>
+              </a:pPr>
+              <a:r>
+                <a:rPr lang="en-US" altLang="ja-JP" dirty="0"/>
+                <a:t>CPU</a:t>
+              </a:r>
+              <a:br>
+                <a:rPr lang="en-US" altLang="ja-JP" dirty="0"/>
+              </a:br>
+              <a:r>
+                <a:rPr lang="en-US" altLang="ja-JP" dirty="0"/>
+                <a:t>CORE</a:t>
+              </a:r>
+              <a:endParaRPr kumimoji="1" lang="ja-JP" altLang="en-US" dirty="0"/>
+            </a:p>
+          </p:txBody>
+        </p:sp>
+        <p:sp>
+          <p:nvSpPr>
+            <p:cNvPr id="12" name="正方形/長方形 11"/>
+            <p:cNvSpPr/>
+            <p:nvPr/>
+          </p:nvSpPr>
+          <p:spPr>
+            <a:xfrm>
+              <a:off x="2792760" y="1273150"/>
+              <a:ext cx="720080" cy="720080"/>
+            </a:xfrm>
+            <a:prstGeom prst="rect">
+              <a:avLst/>
+            </a:prstGeom>
+            <a:solidFill>
+              <a:srgbClr val="FF0000"/>
+            </a:solidFill>
+            <a:ln>
+              <a:solidFill>
+                <a:schemeClr val="tx1"/>
+              </a:solidFill>
+            </a:ln>
+          </p:spPr>
+          <p:style>
+            <a:lnRef idx="2">
+              <a:schemeClr val="accent1">
+                <a:shade val="50000"/>
+              </a:schemeClr>
+            </a:lnRef>
+            <a:fillRef idx="1">
+              <a:schemeClr val="accent1"/>
+            </a:fillRef>
+            <a:effectRef idx="0">
+              <a:schemeClr val="accent1"/>
+            </a:effectRef>
+            <a:fontRef idx="minor">
+              <a:schemeClr val="lt1"/>
+            </a:fontRef>
+          </p:style>
+          <p:txBody>
+            <a:bodyPr rtlCol="0" anchor="ctr"/>
+            <a:lstStyle/>
+            <a:p>
+              <a:pPr algn="ctr">
+                <a:defRPr/>
+              </a:pPr>
+              <a:r>
+                <a:rPr kumimoji="1" lang="en-US" altLang="ja-JP" dirty="0"/>
+                <a:t>CPU</a:t>
+              </a:r>
+            </a:p>
+            <a:p>
+              <a:pPr algn="ctr">
+                <a:defRPr/>
+              </a:pPr>
+              <a:r>
+                <a:rPr lang="en-US" altLang="ja-JP" dirty="0"/>
+                <a:t>CORE</a:t>
+              </a:r>
+              <a:endParaRPr kumimoji="1" lang="ja-JP" altLang="en-US" dirty="0"/>
+            </a:p>
+          </p:txBody>
+        </p:sp>
+      </p:grpSp>
+      <p:grpSp>
+        <p:nvGrpSpPr>
+          <p:cNvPr id="13" name="グループ化 12"/>
+          <p:cNvGrpSpPr/>
+          <p:nvPr/>
+        </p:nvGrpSpPr>
+        <p:grpSpPr>
+          <a:xfrm>
+            <a:off x="2795145" y="548680"/>
+            <a:ext cx="1437775" cy="1444550"/>
+            <a:chOff x="2075065" y="548680"/>
+            <a:chExt cx="1437775" cy="1444550"/>
+          </a:xfrm>
+        </p:grpSpPr>
+        <p:sp>
+          <p:nvSpPr>
+            <p:cNvPr id="14" name="正方形/長方形 13"/>
+            <p:cNvSpPr/>
+            <p:nvPr/>
+          </p:nvSpPr>
+          <p:spPr>
+            <a:xfrm>
+              <a:off x="2075065" y="548680"/>
+              <a:ext cx="720080" cy="720080"/>
+            </a:xfrm>
+            <a:prstGeom prst="rect">
+              <a:avLst/>
+            </a:prstGeom>
+            <a:solidFill>
+              <a:srgbClr val="FF0000"/>
+            </a:solidFill>
+            <a:ln>
+              <a:solidFill>
+                <a:schemeClr val="tx1"/>
+              </a:solidFill>
+            </a:ln>
+          </p:spPr>
+          <p:style>
+            <a:lnRef idx="2">
+              <a:schemeClr val="accent1">
+                <a:shade val="50000"/>
+              </a:schemeClr>
+            </a:lnRef>
+            <a:fillRef idx="1">
+              <a:schemeClr val="accent1"/>
+            </a:fillRef>
+            <a:effectRef idx="0">
+              <a:schemeClr val="accent1"/>
+            </a:effectRef>
+            <a:fontRef idx="minor">
+              <a:schemeClr val="lt1"/>
+            </a:fontRef>
+          </p:style>
+          <p:txBody>
+            <a:bodyPr rtlCol="0" anchor="ctr"/>
+            <a:lstStyle/>
+            <a:p>
+              <a:pPr algn="ctr">
+                <a:defRPr/>
+              </a:pPr>
+              <a:r>
+                <a:rPr kumimoji="1" lang="en-US" altLang="ja-JP" dirty="0"/>
+                <a:t>CPU</a:t>
+              </a:r>
+            </a:p>
+            <a:p>
+              <a:pPr algn="ctr">
+                <a:defRPr/>
+              </a:pPr>
+              <a:r>
+                <a:rPr kumimoji="1" lang="en-US" altLang="ja-JP" dirty="0"/>
+                <a:t>CORE</a:t>
+              </a:r>
+              <a:endParaRPr kumimoji="1" lang="ja-JP" altLang="en-US" dirty="0"/>
+            </a:p>
+          </p:txBody>
+        </p:sp>
+        <p:sp>
+          <p:nvSpPr>
+            <p:cNvPr id="15" name="正方形/長方形 14"/>
+            <p:cNvSpPr/>
+            <p:nvPr/>
+          </p:nvSpPr>
+          <p:spPr>
+            <a:xfrm>
+              <a:off x="2792760" y="553070"/>
+              <a:ext cx="720080" cy="720080"/>
+            </a:xfrm>
+            <a:prstGeom prst="rect">
+              <a:avLst/>
+            </a:prstGeom>
+            <a:solidFill>
+              <a:srgbClr val="FF0000"/>
+            </a:solidFill>
+            <a:ln>
+              <a:solidFill>
+                <a:schemeClr val="tx1"/>
+              </a:solidFill>
+            </a:ln>
+          </p:spPr>
+          <p:style>
+            <a:lnRef idx="2">
+              <a:schemeClr val="accent1">
+                <a:shade val="50000"/>
+              </a:schemeClr>
+            </a:lnRef>
+            <a:fillRef idx="1">
+              <a:schemeClr val="accent1"/>
+            </a:fillRef>
+            <a:effectRef idx="0">
+              <a:schemeClr val="accent1"/>
+            </a:effectRef>
+            <a:fontRef idx="minor">
+              <a:schemeClr val="lt1"/>
+            </a:fontRef>
+          </p:style>
+          <p:txBody>
+            <a:bodyPr rtlCol="0" anchor="ctr"/>
+            <a:lstStyle/>
+            <a:p>
+              <a:pPr algn="ctr">
+                <a:defRPr/>
+              </a:pPr>
+              <a:r>
+                <a:rPr kumimoji="1" lang="en-US" altLang="ja-JP" dirty="0"/>
+                <a:t>CPU</a:t>
+              </a:r>
+            </a:p>
+            <a:p>
+              <a:pPr algn="ctr">
+                <a:defRPr/>
+              </a:pPr>
+              <a:r>
+                <a:rPr kumimoji="1" lang="en-US" altLang="ja-JP" dirty="0"/>
+                <a:t>CORE</a:t>
+              </a:r>
+              <a:endParaRPr kumimoji="1" lang="ja-JP" altLang="en-US" dirty="0"/>
+            </a:p>
+          </p:txBody>
+        </p:sp>
+        <p:sp>
+          <p:nvSpPr>
+            <p:cNvPr id="16" name="正方形/長方形 15"/>
+            <p:cNvSpPr/>
+            <p:nvPr/>
+          </p:nvSpPr>
+          <p:spPr>
+            <a:xfrm>
+              <a:off x="2075065" y="1273150"/>
+              <a:ext cx="720080" cy="720080"/>
+            </a:xfrm>
+            <a:prstGeom prst="rect">
+              <a:avLst/>
+            </a:prstGeom>
+            <a:solidFill>
+              <a:srgbClr val="FF0000"/>
+            </a:solidFill>
+            <a:ln>
+              <a:solidFill>
+                <a:schemeClr val="tx1"/>
+              </a:solidFill>
+            </a:ln>
+          </p:spPr>
+          <p:style>
+            <a:lnRef idx="2">
+              <a:schemeClr val="accent1">
+                <a:shade val="50000"/>
+              </a:schemeClr>
+            </a:lnRef>
+            <a:fillRef idx="1">
+              <a:schemeClr val="accent1"/>
+            </a:fillRef>
+            <a:effectRef idx="0">
+              <a:schemeClr val="accent1"/>
+            </a:effectRef>
+            <a:fontRef idx="minor">
+              <a:schemeClr val="lt1"/>
+            </a:fontRef>
+          </p:style>
+          <p:txBody>
+            <a:bodyPr rtlCol="0" anchor="ctr"/>
+            <a:lstStyle/>
+            <a:p>
+              <a:pPr algn="ctr">
+                <a:defRPr/>
+              </a:pPr>
+              <a:r>
+                <a:rPr lang="en-US" altLang="ja-JP" dirty="0"/>
+                <a:t>CPU</a:t>
+              </a:r>
+              <a:br>
+                <a:rPr lang="en-US" altLang="ja-JP" dirty="0"/>
+              </a:br>
+              <a:r>
+                <a:rPr lang="en-US" altLang="ja-JP" dirty="0"/>
+                <a:t>CORE</a:t>
+              </a:r>
+              <a:endParaRPr kumimoji="1" lang="ja-JP" altLang="en-US" dirty="0"/>
+            </a:p>
+          </p:txBody>
+        </p:sp>
+        <p:sp>
+          <p:nvSpPr>
+            <p:cNvPr id="17" name="正方形/長方形 16"/>
+            <p:cNvSpPr/>
+            <p:nvPr/>
+          </p:nvSpPr>
+          <p:spPr>
+            <a:xfrm>
+              <a:off x="2792760" y="1273150"/>
+              <a:ext cx="720080" cy="720080"/>
+            </a:xfrm>
+            <a:prstGeom prst="rect">
+              <a:avLst/>
+            </a:prstGeom>
+            <a:solidFill>
+              <a:srgbClr val="FF0000"/>
+            </a:solidFill>
+            <a:ln>
+              <a:solidFill>
+                <a:schemeClr val="tx1"/>
+              </a:solidFill>
+            </a:ln>
+          </p:spPr>
+          <p:style>
+            <a:lnRef idx="2">
+              <a:schemeClr val="accent1">
+                <a:shade val="50000"/>
+              </a:schemeClr>
+            </a:lnRef>
+            <a:fillRef idx="1">
+              <a:schemeClr val="accent1"/>
+            </a:fillRef>
+            <a:effectRef idx="0">
+              <a:schemeClr val="accent1"/>
+            </a:effectRef>
+            <a:fontRef idx="minor">
+              <a:schemeClr val="lt1"/>
+            </a:fontRef>
+          </p:style>
+          <p:txBody>
+            <a:bodyPr rtlCol="0" anchor="ctr"/>
+            <a:lstStyle/>
+            <a:p>
+              <a:pPr algn="ctr">
+                <a:defRPr/>
+              </a:pPr>
+              <a:r>
+                <a:rPr kumimoji="1" lang="en-US" altLang="ja-JP" dirty="0"/>
+                <a:t>CPU</a:t>
+              </a:r>
+            </a:p>
+            <a:p>
+              <a:pPr algn="ctr">
+                <a:defRPr/>
+              </a:pPr>
+              <a:r>
+                <a:rPr lang="en-US" altLang="ja-JP" dirty="0"/>
+                <a:t>CORE</a:t>
+              </a:r>
+              <a:endParaRPr kumimoji="1" lang="ja-JP" altLang="en-US" dirty="0"/>
+            </a:p>
+          </p:txBody>
+        </p:sp>
+      </p:grpSp>
+      <p:grpSp>
+        <p:nvGrpSpPr>
+          <p:cNvPr id="18" name="グループ化 17"/>
+          <p:cNvGrpSpPr/>
+          <p:nvPr/>
+        </p:nvGrpSpPr>
+        <p:grpSpPr>
+          <a:xfrm>
+            <a:off x="4953000" y="2708920"/>
+            <a:ext cx="1437775" cy="1444550"/>
+            <a:chOff x="2075065" y="548680"/>
+            <a:chExt cx="1437775" cy="1444550"/>
+          </a:xfrm>
+        </p:grpSpPr>
+        <p:sp>
+          <p:nvSpPr>
+            <p:cNvPr id="19" name="正方形/長方形 18"/>
+            <p:cNvSpPr/>
+            <p:nvPr/>
+          </p:nvSpPr>
+          <p:spPr>
+            <a:xfrm>
+              <a:off x="2075065" y="548680"/>
+              <a:ext cx="720080" cy="720080"/>
+            </a:xfrm>
+            <a:prstGeom prst="rect">
+              <a:avLst/>
+            </a:prstGeom>
+            <a:solidFill>
+              <a:srgbClr val="FF0000"/>
+            </a:solidFill>
+            <a:ln>
+              <a:solidFill>
+                <a:schemeClr val="tx1"/>
+              </a:solidFill>
+            </a:ln>
+          </p:spPr>
+          <p:style>
+            <a:lnRef idx="2">
+              <a:schemeClr val="accent1">
+                <a:shade val="50000"/>
+              </a:schemeClr>
+            </a:lnRef>
+            <a:fillRef idx="1">
+              <a:schemeClr val="accent1"/>
+            </a:fillRef>
+            <a:effectRef idx="0">
+              <a:schemeClr val="accent1"/>
+            </a:effectRef>
+            <a:fontRef idx="minor">
+              <a:schemeClr val="lt1"/>
+            </a:fontRef>
+          </p:style>
+          <p:txBody>
+            <a:bodyPr rtlCol="0" anchor="ctr"/>
+            <a:lstStyle/>
+            <a:p>
+              <a:pPr algn="ctr">
+                <a:defRPr/>
+              </a:pPr>
+              <a:r>
+                <a:rPr kumimoji="1" lang="en-US" altLang="ja-JP" dirty="0"/>
+                <a:t>CPU</a:t>
+              </a:r>
+            </a:p>
+            <a:p>
+              <a:pPr algn="ctr">
+                <a:defRPr/>
+              </a:pPr>
+              <a:r>
+                <a:rPr kumimoji="1" lang="en-US" altLang="ja-JP" dirty="0"/>
+                <a:t>CORE</a:t>
+              </a:r>
+              <a:endParaRPr kumimoji="1" lang="ja-JP" altLang="en-US" dirty="0"/>
+            </a:p>
+          </p:txBody>
+        </p:sp>
+        <p:sp>
+          <p:nvSpPr>
+            <p:cNvPr id="20" name="正方形/長方形 19"/>
+            <p:cNvSpPr/>
+            <p:nvPr/>
+          </p:nvSpPr>
+          <p:spPr>
+            <a:xfrm>
+              <a:off x="2792760" y="553070"/>
+              <a:ext cx="720080" cy="720080"/>
+            </a:xfrm>
+            <a:prstGeom prst="rect">
+              <a:avLst/>
+            </a:prstGeom>
+            <a:solidFill>
+              <a:srgbClr val="FF0000"/>
+            </a:solidFill>
+            <a:ln>
+              <a:solidFill>
+                <a:schemeClr val="tx1"/>
+              </a:solidFill>
+            </a:ln>
+          </p:spPr>
+          <p:style>
+            <a:lnRef idx="2">
+              <a:schemeClr val="accent1">
+                <a:shade val="50000"/>
+              </a:schemeClr>
+            </a:lnRef>
+            <a:fillRef idx="1">
+              <a:schemeClr val="accent1"/>
+            </a:fillRef>
+            <a:effectRef idx="0">
+              <a:schemeClr val="accent1"/>
+            </a:effectRef>
+            <a:fontRef idx="minor">
+              <a:schemeClr val="lt1"/>
+            </a:fontRef>
+          </p:style>
+          <p:txBody>
+            <a:bodyPr rtlCol="0" anchor="ctr"/>
+            <a:lstStyle/>
+            <a:p>
+              <a:pPr algn="ctr">
+                <a:defRPr/>
+              </a:pPr>
+              <a:r>
+                <a:rPr kumimoji="1" lang="en-US" altLang="ja-JP" dirty="0"/>
+                <a:t>CPU</a:t>
+              </a:r>
+            </a:p>
+            <a:p>
+              <a:pPr algn="ctr">
+                <a:defRPr/>
+              </a:pPr>
+              <a:r>
+                <a:rPr kumimoji="1" lang="en-US" altLang="ja-JP" dirty="0"/>
+                <a:t>CORE</a:t>
+              </a:r>
+              <a:endParaRPr kumimoji="1" lang="ja-JP" altLang="en-US" dirty="0"/>
+            </a:p>
+          </p:txBody>
+        </p:sp>
+        <p:sp>
+          <p:nvSpPr>
+            <p:cNvPr id="21" name="正方形/長方形 20"/>
+            <p:cNvSpPr/>
+            <p:nvPr/>
+          </p:nvSpPr>
+          <p:spPr>
+            <a:xfrm>
+              <a:off x="2075065" y="1273150"/>
+              <a:ext cx="720080" cy="720080"/>
+            </a:xfrm>
+            <a:prstGeom prst="rect">
+              <a:avLst/>
+            </a:prstGeom>
+            <a:solidFill>
+              <a:srgbClr val="FF0000"/>
+            </a:solidFill>
+            <a:ln>
+              <a:solidFill>
+                <a:schemeClr val="tx1"/>
+              </a:solidFill>
+            </a:ln>
+          </p:spPr>
+          <p:style>
+            <a:lnRef idx="2">
+              <a:schemeClr val="accent1">
+                <a:shade val="50000"/>
+              </a:schemeClr>
+            </a:lnRef>
+            <a:fillRef idx="1">
+              <a:schemeClr val="accent1"/>
+            </a:fillRef>
+            <a:effectRef idx="0">
+              <a:schemeClr val="accent1"/>
+            </a:effectRef>
+            <a:fontRef idx="minor">
+              <a:schemeClr val="lt1"/>
+            </a:fontRef>
+          </p:style>
+          <p:txBody>
+            <a:bodyPr rtlCol="0" anchor="ctr"/>
+            <a:lstStyle/>
+            <a:p>
+              <a:pPr algn="ctr">
+                <a:defRPr/>
+              </a:pPr>
+              <a:r>
+                <a:rPr lang="en-US" altLang="ja-JP" dirty="0"/>
+                <a:t>CPU</a:t>
+              </a:r>
+              <a:br>
+                <a:rPr lang="en-US" altLang="ja-JP" dirty="0"/>
+              </a:br>
+              <a:r>
+                <a:rPr lang="en-US" altLang="ja-JP" dirty="0"/>
+                <a:t>CORE</a:t>
+              </a:r>
+              <a:endParaRPr kumimoji="1" lang="ja-JP" altLang="en-US" dirty="0"/>
+            </a:p>
+          </p:txBody>
+        </p:sp>
+        <p:sp>
+          <p:nvSpPr>
+            <p:cNvPr id="22" name="正方形/長方形 21"/>
+            <p:cNvSpPr/>
+            <p:nvPr/>
+          </p:nvSpPr>
+          <p:spPr>
+            <a:xfrm>
+              <a:off x="2792760" y="1273150"/>
+              <a:ext cx="720080" cy="720080"/>
+            </a:xfrm>
+            <a:prstGeom prst="rect">
+              <a:avLst/>
+            </a:prstGeom>
+            <a:solidFill>
+              <a:srgbClr val="FF0000"/>
+            </a:solidFill>
+            <a:ln>
+              <a:solidFill>
+                <a:schemeClr val="tx1"/>
+              </a:solidFill>
+            </a:ln>
+          </p:spPr>
+          <p:style>
+            <a:lnRef idx="2">
+              <a:schemeClr val="accent1">
+                <a:shade val="50000"/>
+              </a:schemeClr>
+            </a:lnRef>
+            <a:fillRef idx="1">
+              <a:schemeClr val="accent1"/>
+            </a:fillRef>
+            <a:effectRef idx="0">
+              <a:schemeClr val="accent1"/>
+            </a:effectRef>
+            <a:fontRef idx="minor">
+              <a:schemeClr val="lt1"/>
+            </a:fontRef>
+          </p:style>
+          <p:txBody>
+            <a:bodyPr rtlCol="0" anchor="ctr"/>
+            <a:lstStyle/>
+            <a:p>
+              <a:pPr algn="ctr">
+                <a:defRPr/>
+              </a:pPr>
+              <a:r>
+                <a:rPr kumimoji="1" lang="en-US" altLang="ja-JP" dirty="0"/>
+                <a:t>CPU</a:t>
+              </a:r>
+            </a:p>
+            <a:p>
+              <a:pPr algn="ctr">
+                <a:defRPr/>
+              </a:pPr>
+              <a:r>
+                <a:rPr lang="en-US" altLang="ja-JP" dirty="0"/>
+                <a:t>CORE</a:t>
+              </a:r>
+              <a:endParaRPr kumimoji="1" lang="ja-JP" altLang="en-US" dirty="0"/>
+            </a:p>
+          </p:txBody>
+        </p:sp>
+      </p:grpSp>
+      <p:sp>
+        <p:nvSpPr>
+          <p:cNvPr id="23" name="正方形/長方形 22"/>
+          <p:cNvSpPr/>
+          <p:nvPr/>
+        </p:nvSpPr>
+        <p:spPr>
+          <a:xfrm>
+            <a:off x="4232920" y="1124744"/>
+            <a:ext cx="720080" cy="288032"/>
+          </a:xfrm>
+          <a:prstGeom prst="rect">
+            <a:avLst/>
+          </a:prstGeom>
+        </p:spPr>
+        <p:style>
+          <a:lnRef idx="2">
+            <a:schemeClr val="accent1">
+              <a:shade val="50000"/>
+            </a:schemeClr>
+          </a:lnRef>
+          <a:fillRef idx="1">
+            <a:schemeClr val="accent1"/>
+          </a:fillRef>
+          <a:effectRef idx="0">
+            <a:schemeClr val="accent1"/>
+          </a:effectRef>
+          <a:fontRef idx="minor">
+            <a:schemeClr val="lt1"/>
+          </a:fontRef>
+        </p:style>
+        <p:txBody>
+          <a:bodyPr rtlCol="0" anchor="ctr"/>
+          <a:lstStyle/>
+          <a:p>
+            <a:pPr algn="ctr"/>
+            <a:endParaRPr kumimoji="1" lang="ja-JP" altLang="en-US"/>
+          </a:p>
+        </p:txBody>
+      </p:sp>
+      <p:sp>
+        <p:nvSpPr>
+          <p:cNvPr id="24" name="正方形/長方形 23"/>
+          <p:cNvSpPr/>
+          <p:nvPr/>
+        </p:nvSpPr>
+        <p:spPr>
+          <a:xfrm>
+            <a:off x="4232920" y="3289374"/>
+            <a:ext cx="720080" cy="288032"/>
+          </a:xfrm>
+          <a:prstGeom prst="rect">
+            <a:avLst/>
+          </a:prstGeom>
+        </p:spPr>
+        <p:style>
+          <a:lnRef idx="2">
+            <a:schemeClr val="accent1">
+              <a:shade val="50000"/>
+            </a:schemeClr>
+          </a:lnRef>
+          <a:fillRef idx="1">
+            <a:schemeClr val="accent1"/>
+          </a:fillRef>
+          <a:effectRef idx="0">
+            <a:schemeClr val="accent1"/>
+          </a:effectRef>
+          <a:fontRef idx="minor">
+            <a:schemeClr val="lt1"/>
+          </a:fontRef>
+        </p:style>
+        <p:txBody>
+          <a:bodyPr rtlCol="0" anchor="ctr"/>
+          <a:lstStyle/>
+          <a:p>
+            <a:pPr algn="ctr"/>
+            <a:endParaRPr kumimoji="1" lang="ja-JP" altLang="en-US"/>
+          </a:p>
+        </p:txBody>
+      </p:sp>
+      <p:sp>
+        <p:nvSpPr>
+          <p:cNvPr id="25" name="正方形/長方形 24"/>
+          <p:cNvSpPr/>
+          <p:nvPr/>
+        </p:nvSpPr>
+        <p:spPr>
+          <a:xfrm rot="5400000">
+            <a:off x="5313040" y="2214366"/>
+            <a:ext cx="720080" cy="288032"/>
+          </a:xfrm>
+          <a:prstGeom prst="rect">
+            <a:avLst/>
+          </a:prstGeom>
+        </p:spPr>
+        <p:style>
+          <a:lnRef idx="2">
+            <a:schemeClr val="accent1">
+              <a:shade val="50000"/>
+            </a:schemeClr>
+          </a:lnRef>
+          <a:fillRef idx="1">
+            <a:schemeClr val="accent1"/>
+          </a:fillRef>
+          <a:effectRef idx="0">
+            <a:schemeClr val="accent1"/>
+          </a:effectRef>
+          <a:fontRef idx="minor">
+            <a:schemeClr val="lt1"/>
+          </a:fontRef>
+        </p:style>
+        <p:txBody>
+          <a:bodyPr rtlCol="0" anchor="ctr"/>
+          <a:lstStyle/>
+          <a:p>
+            <a:pPr algn="ctr"/>
+            <a:endParaRPr kumimoji="1" lang="ja-JP" altLang="en-US"/>
+          </a:p>
+        </p:txBody>
+      </p:sp>
+      <p:sp>
+        <p:nvSpPr>
+          <p:cNvPr id="26" name="正方形/長方形 25"/>
+          <p:cNvSpPr/>
+          <p:nvPr/>
+        </p:nvSpPr>
+        <p:spPr>
+          <a:xfrm rot="5400000">
+            <a:off x="3152800" y="2204864"/>
+            <a:ext cx="720080" cy="288032"/>
+          </a:xfrm>
+          <a:prstGeom prst="rect">
+            <a:avLst/>
+          </a:prstGeom>
+        </p:spPr>
+        <p:style>
+          <a:lnRef idx="2">
+            <a:schemeClr val="accent1">
+              <a:shade val="50000"/>
+            </a:schemeClr>
+          </a:lnRef>
+          <a:fillRef idx="1">
+            <a:schemeClr val="accent1"/>
+          </a:fillRef>
+          <a:effectRef idx="0">
+            <a:schemeClr val="accent1"/>
+          </a:effectRef>
+          <a:fontRef idx="minor">
+            <a:schemeClr val="lt1"/>
+          </a:fontRef>
+        </p:style>
+        <p:txBody>
+          <a:bodyPr rtlCol="0" anchor="ctr"/>
+          <a:lstStyle/>
+          <a:p>
+            <a:pPr algn="ctr"/>
+            <a:endParaRPr kumimoji="1" lang="ja-JP" altLang="en-US"/>
+          </a:p>
+        </p:txBody>
+      </p:sp>
+      <p:grpSp>
+        <p:nvGrpSpPr>
+          <p:cNvPr id="30" name="グループ化 29"/>
+          <p:cNvGrpSpPr/>
+          <p:nvPr/>
+        </p:nvGrpSpPr>
+        <p:grpSpPr>
+          <a:xfrm>
+            <a:off x="632520" y="548680"/>
+            <a:ext cx="1440160" cy="1450622"/>
+            <a:chOff x="632520" y="548680"/>
+            <a:chExt cx="1440160" cy="1450622"/>
+          </a:xfrm>
+        </p:grpSpPr>
+        <p:sp>
+          <p:nvSpPr>
+            <p:cNvPr id="28" name="正方形/長方形 27"/>
+            <p:cNvSpPr/>
+            <p:nvPr/>
+          </p:nvSpPr>
+          <p:spPr>
+            <a:xfrm>
+              <a:off x="632520" y="548680"/>
+              <a:ext cx="1440160" cy="729582"/>
+            </a:xfrm>
+            <a:prstGeom prst="rect">
+              <a:avLst/>
+            </a:prstGeom>
+            <a:solidFill>
+              <a:srgbClr val="00B050"/>
+            </a:solidFill>
+          </p:spPr>
+          <p:style>
+            <a:lnRef idx="2">
+              <a:schemeClr val="accent1">
+                <a:shade val="50000"/>
+              </a:schemeClr>
+            </a:lnRef>
+            <a:fillRef idx="1">
+              <a:schemeClr val="accent1"/>
+            </a:fillRef>
+            <a:effectRef idx="0">
+              <a:schemeClr val="accent1"/>
+            </a:effectRef>
+            <a:fontRef idx="minor">
+              <a:schemeClr val="lt1"/>
+            </a:fontRef>
+          </p:style>
+          <p:txBody>
+            <a:bodyPr rtlCol="0" anchor="ctr"/>
+            <a:lstStyle/>
+            <a:p>
+              <a:pPr algn="ctr">
+                <a:defRPr/>
+              </a:pPr>
+              <a:r>
+                <a:rPr kumimoji="1" lang="en-US" altLang="ja-JP" sz="2400" dirty="0"/>
+                <a:t>Memory</a:t>
+              </a:r>
+              <a:endParaRPr kumimoji="1" lang="ja-JP" altLang="en-US" sz="2400" dirty="0"/>
+            </a:p>
+          </p:txBody>
+        </p:sp>
+        <p:sp>
+          <p:nvSpPr>
+            <p:cNvPr id="29" name="正方形/長方形 28"/>
+            <p:cNvSpPr/>
+            <p:nvPr/>
+          </p:nvSpPr>
+          <p:spPr>
+            <a:xfrm>
+              <a:off x="632520" y="1278261"/>
+              <a:ext cx="1440160" cy="721041"/>
+            </a:xfrm>
+            <a:prstGeom prst="rect">
+              <a:avLst/>
+            </a:prstGeom>
+            <a:solidFill>
+              <a:srgbClr val="00B050"/>
+            </a:solidFill>
+          </p:spPr>
+          <p:style>
+            <a:lnRef idx="2">
+              <a:schemeClr val="accent1">
+                <a:shade val="50000"/>
+              </a:schemeClr>
+            </a:lnRef>
+            <a:fillRef idx="1">
+              <a:schemeClr val="accent1"/>
+            </a:fillRef>
+            <a:effectRef idx="0">
+              <a:schemeClr val="accent1"/>
+            </a:effectRef>
+            <a:fontRef idx="minor">
+              <a:schemeClr val="lt1"/>
+            </a:fontRef>
+          </p:style>
+          <p:txBody>
+            <a:bodyPr rtlCol="0" anchor="ctr"/>
+            <a:lstStyle/>
+            <a:p>
+              <a:pPr algn="ctr">
+                <a:defRPr/>
+              </a:pPr>
+              <a:r>
+                <a:rPr kumimoji="1" lang="en-US" altLang="ja-JP" sz="2400" dirty="0"/>
+                <a:t>Memory</a:t>
+              </a:r>
+              <a:endParaRPr kumimoji="1" lang="ja-JP" altLang="en-US" sz="2400" dirty="0"/>
+            </a:p>
+          </p:txBody>
+        </p:sp>
+      </p:grpSp>
+      <p:grpSp>
+        <p:nvGrpSpPr>
+          <p:cNvPr id="31" name="グループ化 30"/>
+          <p:cNvGrpSpPr/>
+          <p:nvPr/>
+        </p:nvGrpSpPr>
+        <p:grpSpPr>
+          <a:xfrm>
+            <a:off x="632520" y="2693720"/>
+            <a:ext cx="1440160" cy="1450622"/>
+            <a:chOff x="632520" y="548680"/>
+            <a:chExt cx="1440160" cy="1450622"/>
+          </a:xfrm>
+        </p:grpSpPr>
+        <p:sp>
+          <p:nvSpPr>
+            <p:cNvPr id="32" name="正方形/長方形 31"/>
+            <p:cNvSpPr/>
+            <p:nvPr/>
+          </p:nvSpPr>
+          <p:spPr>
+            <a:xfrm>
+              <a:off x="632520" y="548680"/>
+              <a:ext cx="1440160" cy="729582"/>
+            </a:xfrm>
+            <a:prstGeom prst="rect">
+              <a:avLst/>
+            </a:prstGeom>
+            <a:solidFill>
+              <a:srgbClr val="00B050"/>
+            </a:solidFill>
+          </p:spPr>
+          <p:style>
+            <a:lnRef idx="2">
+              <a:schemeClr val="accent1">
+                <a:shade val="50000"/>
+              </a:schemeClr>
+            </a:lnRef>
+            <a:fillRef idx="1">
+              <a:schemeClr val="accent1"/>
+            </a:fillRef>
+            <a:effectRef idx="0">
+              <a:schemeClr val="accent1"/>
+            </a:effectRef>
+            <a:fontRef idx="minor">
+              <a:schemeClr val="lt1"/>
+            </a:fontRef>
+          </p:style>
+          <p:txBody>
+            <a:bodyPr rtlCol="0" anchor="ctr"/>
+            <a:lstStyle/>
+            <a:p>
+              <a:pPr algn="ctr">
+                <a:defRPr/>
+              </a:pPr>
+              <a:r>
+                <a:rPr kumimoji="1" lang="en-US" altLang="ja-JP" sz="2400" dirty="0"/>
+                <a:t>Memory</a:t>
+              </a:r>
+              <a:endParaRPr kumimoji="1" lang="ja-JP" altLang="en-US" sz="2400" dirty="0"/>
+            </a:p>
+          </p:txBody>
+        </p:sp>
+        <p:sp>
+          <p:nvSpPr>
+            <p:cNvPr id="33" name="正方形/長方形 32"/>
+            <p:cNvSpPr/>
+            <p:nvPr/>
+          </p:nvSpPr>
+          <p:spPr>
+            <a:xfrm>
+              <a:off x="632520" y="1278261"/>
+              <a:ext cx="1440160" cy="721041"/>
+            </a:xfrm>
+            <a:prstGeom prst="rect">
+              <a:avLst/>
+            </a:prstGeom>
+            <a:solidFill>
+              <a:srgbClr val="00B050"/>
+            </a:solidFill>
+          </p:spPr>
+          <p:style>
+            <a:lnRef idx="2">
+              <a:schemeClr val="accent1">
+                <a:shade val="50000"/>
+              </a:schemeClr>
+            </a:lnRef>
+            <a:fillRef idx="1">
+              <a:schemeClr val="accent1"/>
+            </a:fillRef>
+            <a:effectRef idx="0">
+              <a:schemeClr val="accent1"/>
+            </a:effectRef>
+            <a:fontRef idx="minor">
+              <a:schemeClr val="lt1"/>
+            </a:fontRef>
+          </p:style>
+          <p:txBody>
+            <a:bodyPr rtlCol="0" anchor="ctr"/>
+            <a:lstStyle/>
+            <a:p>
+              <a:pPr algn="ctr">
+                <a:defRPr/>
+              </a:pPr>
+              <a:r>
+                <a:rPr kumimoji="1" lang="en-US" altLang="ja-JP" sz="2400" dirty="0"/>
+                <a:t>Memory</a:t>
+              </a:r>
+              <a:endParaRPr kumimoji="1" lang="ja-JP" altLang="en-US" sz="2400" dirty="0"/>
+            </a:p>
+          </p:txBody>
+        </p:sp>
+      </p:grpSp>
+      <p:grpSp>
+        <p:nvGrpSpPr>
+          <p:cNvPr id="34" name="グループ化 33"/>
+          <p:cNvGrpSpPr/>
+          <p:nvPr/>
+        </p:nvGrpSpPr>
+        <p:grpSpPr>
+          <a:xfrm>
+            <a:off x="7113240" y="558182"/>
+            <a:ext cx="1440160" cy="1450622"/>
+            <a:chOff x="632520" y="548680"/>
+            <a:chExt cx="1440160" cy="1450622"/>
+          </a:xfrm>
+        </p:grpSpPr>
+        <p:sp>
+          <p:nvSpPr>
+            <p:cNvPr id="35" name="正方形/長方形 34"/>
+            <p:cNvSpPr/>
+            <p:nvPr/>
+          </p:nvSpPr>
+          <p:spPr>
+            <a:xfrm>
+              <a:off x="632520" y="548680"/>
+              <a:ext cx="1440160" cy="729582"/>
+            </a:xfrm>
+            <a:prstGeom prst="rect">
+              <a:avLst/>
+            </a:prstGeom>
+            <a:solidFill>
+              <a:srgbClr val="00B050"/>
+            </a:solidFill>
+          </p:spPr>
+          <p:style>
+            <a:lnRef idx="2">
+              <a:schemeClr val="accent1">
+                <a:shade val="50000"/>
+              </a:schemeClr>
+            </a:lnRef>
+            <a:fillRef idx="1">
+              <a:schemeClr val="accent1"/>
+            </a:fillRef>
+            <a:effectRef idx="0">
+              <a:schemeClr val="accent1"/>
+            </a:effectRef>
+            <a:fontRef idx="minor">
+              <a:schemeClr val="lt1"/>
+            </a:fontRef>
+          </p:style>
+          <p:txBody>
+            <a:bodyPr rtlCol="0" anchor="ctr"/>
+            <a:lstStyle/>
+            <a:p>
+              <a:pPr algn="ctr">
+                <a:defRPr/>
+              </a:pPr>
+              <a:r>
+                <a:rPr kumimoji="1" lang="en-US" altLang="ja-JP" sz="2400" dirty="0"/>
+                <a:t>Memory</a:t>
+              </a:r>
+              <a:endParaRPr kumimoji="1" lang="ja-JP" altLang="en-US" sz="2400" dirty="0"/>
+            </a:p>
+          </p:txBody>
+        </p:sp>
+        <p:sp>
+          <p:nvSpPr>
+            <p:cNvPr id="36" name="正方形/長方形 35"/>
+            <p:cNvSpPr/>
+            <p:nvPr/>
+          </p:nvSpPr>
+          <p:spPr>
+            <a:xfrm>
+              <a:off x="632520" y="1278261"/>
+              <a:ext cx="1440160" cy="721041"/>
+            </a:xfrm>
+            <a:prstGeom prst="rect">
+              <a:avLst/>
+            </a:prstGeom>
+            <a:solidFill>
+              <a:srgbClr val="00B050"/>
+            </a:solidFill>
+          </p:spPr>
+          <p:style>
+            <a:lnRef idx="2">
+              <a:schemeClr val="accent1">
+                <a:shade val="50000"/>
+              </a:schemeClr>
+            </a:lnRef>
+            <a:fillRef idx="1">
+              <a:schemeClr val="accent1"/>
+            </a:fillRef>
+            <a:effectRef idx="0">
+              <a:schemeClr val="accent1"/>
+            </a:effectRef>
+            <a:fontRef idx="minor">
+              <a:schemeClr val="lt1"/>
+            </a:fontRef>
+          </p:style>
+          <p:txBody>
+            <a:bodyPr rtlCol="0" anchor="ctr"/>
+            <a:lstStyle/>
+            <a:p>
+              <a:pPr algn="ctr">
+                <a:defRPr/>
+              </a:pPr>
+              <a:r>
+                <a:rPr kumimoji="1" lang="en-US" altLang="ja-JP" sz="2400" dirty="0"/>
+                <a:t>Memory</a:t>
+              </a:r>
+              <a:endParaRPr kumimoji="1" lang="ja-JP" altLang="en-US" sz="2400" dirty="0"/>
+            </a:p>
+          </p:txBody>
+        </p:sp>
+      </p:grpSp>
+      <p:grpSp>
+        <p:nvGrpSpPr>
+          <p:cNvPr id="37" name="グループ化 36"/>
+          <p:cNvGrpSpPr/>
+          <p:nvPr/>
+        </p:nvGrpSpPr>
+        <p:grpSpPr>
+          <a:xfrm>
+            <a:off x="7113240" y="2703222"/>
+            <a:ext cx="1440160" cy="1450622"/>
+            <a:chOff x="632520" y="548680"/>
+            <a:chExt cx="1440160" cy="1450622"/>
+          </a:xfrm>
+        </p:grpSpPr>
+        <p:sp>
+          <p:nvSpPr>
+            <p:cNvPr id="38" name="正方形/長方形 37"/>
+            <p:cNvSpPr/>
+            <p:nvPr/>
+          </p:nvSpPr>
+          <p:spPr>
+            <a:xfrm>
+              <a:off x="632520" y="548680"/>
+              <a:ext cx="1440160" cy="729582"/>
+            </a:xfrm>
+            <a:prstGeom prst="rect">
+              <a:avLst/>
+            </a:prstGeom>
+            <a:solidFill>
+              <a:srgbClr val="00B050"/>
+            </a:solidFill>
+          </p:spPr>
+          <p:style>
+            <a:lnRef idx="2">
+              <a:schemeClr val="accent1">
+                <a:shade val="50000"/>
+              </a:schemeClr>
+            </a:lnRef>
+            <a:fillRef idx="1">
+              <a:schemeClr val="accent1"/>
+            </a:fillRef>
+            <a:effectRef idx="0">
+              <a:schemeClr val="accent1"/>
+            </a:effectRef>
+            <a:fontRef idx="minor">
+              <a:schemeClr val="lt1"/>
+            </a:fontRef>
+          </p:style>
+          <p:txBody>
+            <a:bodyPr rtlCol="0" anchor="ctr"/>
+            <a:lstStyle/>
+            <a:p>
+              <a:pPr algn="ctr">
+                <a:defRPr/>
+              </a:pPr>
+              <a:r>
+                <a:rPr kumimoji="1" lang="en-US" altLang="ja-JP" sz="2400" dirty="0"/>
+                <a:t>Memory</a:t>
+              </a:r>
+              <a:endParaRPr kumimoji="1" lang="ja-JP" altLang="en-US" sz="2400" dirty="0"/>
+            </a:p>
+          </p:txBody>
+        </p:sp>
+        <p:sp>
+          <p:nvSpPr>
+            <p:cNvPr id="39" name="正方形/長方形 38"/>
+            <p:cNvSpPr/>
+            <p:nvPr/>
+          </p:nvSpPr>
+          <p:spPr>
+            <a:xfrm>
+              <a:off x="632520" y="1278261"/>
+              <a:ext cx="1440160" cy="721041"/>
+            </a:xfrm>
+            <a:prstGeom prst="rect">
+              <a:avLst/>
+            </a:prstGeom>
+            <a:solidFill>
+              <a:srgbClr val="00B050"/>
+            </a:solidFill>
+          </p:spPr>
+          <p:style>
+            <a:lnRef idx="2">
+              <a:schemeClr val="accent1">
+                <a:shade val="50000"/>
+              </a:schemeClr>
+            </a:lnRef>
+            <a:fillRef idx="1">
+              <a:schemeClr val="accent1"/>
+            </a:fillRef>
+            <a:effectRef idx="0">
+              <a:schemeClr val="accent1"/>
+            </a:effectRef>
+            <a:fontRef idx="minor">
+              <a:schemeClr val="lt1"/>
+            </a:fontRef>
+          </p:style>
+          <p:txBody>
+            <a:bodyPr rtlCol="0" anchor="ctr"/>
+            <a:lstStyle/>
+            <a:p>
+              <a:pPr algn="ctr">
+                <a:defRPr/>
+              </a:pPr>
+              <a:r>
+                <a:rPr kumimoji="1" lang="en-US" altLang="ja-JP" sz="2400" dirty="0"/>
+                <a:t>Memory</a:t>
+              </a:r>
+              <a:endParaRPr kumimoji="1" lang="ja-JP" altLang="en-US" sz="2400" dirty="0"/>
+            </a:p>
+          </p:txBody>
+        </p:sp>
+      </p:grpSp>
+      <p:sp>
+        <p:nvSpPr>
+          <p:cNvPr id="40" name="正方形/長方形 39"/>
+          <p:cNvSpPr/>
+          <p:nvPr/>
+        </p:nvSpPr>
+        <p:spPr>
+          <a:xfrm>
+            <a:off x="2072680" y="1052736"/>
+            <a:ext cx="722465" cy="432048"/>
+          </a:xfrm>
+          <a:prstGeom prst="rect">
+            <a:avLst/>
+          </a:prstGeom>
+        </p:spPr>
+        <p:style>
+          <a:lnRef idx="2">
+            <a:schemeClr val="accent1">
+              <a:shade val="50000"/>
+            </a:schemeClr>
+          </a:lnRef>
+          <a:fillRef idx="1">
+            <a:schemeClr val="accent1"/>
+          </a:fillRef>
+          <a:effectRef idx="0">
+            <a:schemeClr val="accent1"/>
+          </a:effectRef>
+          <a:fontRef idx="minor">
+            <a:schemeClr val="lt1"/>
+          </a:fontRef>
+        </p:style>
+        <p:txBody>
+          <a:bodyPr rtlCol="0" anchor="ctr"/>
+          <a:lstStyle/>
+          <a:p>
+            <a:pPr algn="ctr"/>
+            <a:endParaRPr kumimoji="1" lang="ja-JP" altLang="en-US"/>
+          </a:p>
+        </p:txBody>
+      </p:sp>
+      <p:sp>
+        <p:nvSpPr>
+          <p:cNvPr id="41" name="正方形/長方形 40"/>
+          <p:cNvSpPr/>
+          <p:nvPr/>
+        </p:nvSpPr>
+        <p:spPr>
+          <a:xfrm>
+            <a:off x="2072681" y="3217366"/>
+            <a:ext cx="720080" cy="432048"/>
+          </a:xfrm>
+          <a:prstGeom prst="rect">
+            <a:avLst/>
+          </a:prstGeom>
+        </p:spPr>
+        <p:style>
+          <a:lnRef idx="2">
+            <a:schemeClr val="accent1">
+              <a:shade val="50000"/>
+            </a:schemeClr>
+          </a:lnRef>
+          <a:fillRef idx="1">
+            <a:schemeClr val="accent1"/>
+          </a:fillRef>
+          <a:effectRef idx="0">
+            <a:schemeClr val="accent1"/>
+          </a:effectRef>
+          <a:fontRef idx="minor">
+            <a:schemeClr val="lt1"/>
+          </a:fontRef>
+        </p:style>
+        <p:txBody>
+          <a:bodyPr rtlCol="0" anchor="ctr"/>
+          <a:lstStyle/>
+          <a:p>
+            <a:pPr algn="ctr"/>
+            <a:endParaRPr kumimoji="1" lang="ja-JP" altLang="en-US"/>
+          </a:p>
+        </p:txBody>
+      </p:sp>
+      <p:sp>
+        <p:nvSpPr>
+          <p:cNvPr id="42" name="正方形/長方形 41"/>
+          <p:cNvSpPr/>
+          <p:nvPr/>
+        </p:nvSpPr>
+        <p:spPr>
+          <a:xfrm>
+            <a:off x="6390774" y="1042647"/>
+            <a:ext cx="722465" cy="432048"/>
+          </a:xfrm>
+          <a:prstGeom prst="rect">
+            <a:avLst/>
+          </a:prstGeom>
+        </p:spPr>
+        <p:style>
+          <a:lnRef idx="2">
+            <a:schemeClr val="accent1">
+              <a:shade val="50000"/>
+            </a:schemeClr>
+          </a:lnRef>
+          <a:fillRef idx="1">
+            <a:schemeClr val="accent1"/>
+          </a:fillRef>
+          <a:effectRef idx="0">
+            <a:schemeClr val="accent1"/>
+          </a:effectRef>
+          <a:fontRef idx="minor">
+            <a:schemeClr val="lt1"/>
+          </a:fontRef>
+        </p:style>
+        <p:txBody>
+          <a:bodyPr rtlCol="0" anchor="ctr"/>
+          <a:lstStyle/>
+          <a:p>
+            <a:pPr algn="ctr"/>
+            <a:endParaRPr kumimoji="1" lang="ja-JP" altLang="en-US"/>
+          </a:p>
+        </p:txBody>
+      </p:sp>
+      <p:sp>
+        <p:nvSpPr>
+          <p:cNvPr id="43" name="正方形/長方形 42"/>
+          <p:cNvSpPr/>
+          <p:nvPr/>
+        </p:nvSpPr>
+        <p:spPr>
+          <a:xfrm>
+            <a:off x="6390775" y="3207277"/>
+            <a:ext cx="720080" cy="432048"/>
+          </a:xfrm>
+          <a:prstGeom prst="rect">
+            <a:avLst/>
+          </a:prstGeom>
+        </p:spPr>
+        <p:style>
+          <a:lnRef idx="2">
+            <a:schemeClr val="accent1">
+              <a:shade val="50000"/>
+            </a:schemeClr>
+          </a:lnRef>
+          <a:fillRef idx="1">
+            <a:schemeClr val="accent1"/>
+          </a:fillRef>
+          <a:effectRef idx="0">
+            <a:schemeClr val="accent1"/>
+          </a:effectRef>
+          <a:fontRef idx="minor">
+            <a:schemeClr val="lt1"/>
+          </a:fontRef>
+        </p:style>
+        <p:txBody>
+          <a:bodyPr rtlCol="0" anchor="ctr"/>
+          <a:lstStyle/>
+          <a:p>
+            <a:pPr algn="ctr"/>
+            <a:endParaRPr kumimoji="1" lang="ja-JP" altLang="en-US"/>
+          </a:p>
+        </p:txBody>
+      </p:sp>
+    </p:spTree>
+    <p:extLst>
+      <p:ext uri="{BB962C8B-B14F-4D97-AF65-F5344CB8AC3E}">
+        <p14:creationId xmlns:p14="http://schemas.microsoft.com/office/powerpoint/2010/main" val="4151188557"/>
+      </p:ext>
+    </p:extLst>
+  </p:cSld>
+  <p:clrMapOvr>
+    <a:masterClrMapping/>
+  </p:clrMapOvr>
+</p:sld>
+</file>
+
+<file path=ppt/slides/slide3.xml><?xml version="1.0" encoding="utf-8"?>
+<p:sld xmlns:a="http://schemas.openxmlformats.org/drawingml/2006/main" xmlns:r="http://schemas.openxmlformats.org/officeDocument/2006/relationships" xmlns:p="http://schemas.openxmlformats.org/presentationml/2006/main">
+  <p:cSld>
+    <p:spTree>
+      <p:nvGrpSpPr>
+        <p:cNvPr id="1" name=""/>
+        <p:cNvGrpSpPr/>
+        <p:nvPr/>
+      </p:nvGrpSpPr>
+      <p:grpSpPr>
+        <a:xfrm>
+          <a:off x="0" y="0"/>
+          <a:ext cx="0" cy="0"/>
+          <a:chOff x="0" y="0"/>
+          <a:chExt cx="0" cy="0"/>
+        </a:xfrm>
+      </p:grpSpPr>
       <p:pic>
         <p:nvPicPr>
           <p:cNvPr id="2" name="図 1"/>
@@ -3230,7 +5092,628 @@
 </p:sld>
 </file>
 
-<file path=ppt/slides/slide3.xml><?xml version="1.0" encoding="utf-8"?>
+<file path=ppt/slides/slide4.xml><?xml version="1.0" encoding="utf-8"?>
+<p:sld xmlns:a="http://schemas.openxmlformats.org/drawingml/2006/main" xmlns:r="http://schemas.openxmlformats.org/officeDocument/2006/relationships" xmlns:p="http://schemas.openxmlformats.org/presentationml/2006/main">
+  <p:cSld>
+    <p:spTree>
+      <p:nvGrpSpPr>
+        <p:cNvPr id="1" name=""/>
+        <p:cNvGrpSpPr/>
+        <p:nvPr/>
+      </p:nvGrpSpPr>
+      <p:grpSpPr>
+        <a:xfrm>
+          <a:off x="0" y="0"/>
+          <a:ext cx="0" cy="0"/>
+          <a:chOff x="0" y="0"/>
+          <a:chExt cx="0" cy="0"/>
+        </a:xfrm>
+      </p:grpSpPr>
+      <p:pic>
+        <p:nvPicPr>
+          <p:cNvPr id="2" name="図 1"/>
+          <p:cNvPicPr>
+            <a:picLocks noChangeAspect="1"/>
+          </p:cNvPicPr>
+          <p:nvPr/>
+        </p:nvPicPr>
+        <p:blipFill>
+          <a:blip r:embed="rId2">
+            <a:extLst>
+              <a:ext uri="{28A0092B-C50C-407E-A947-70E740481C1C}">
+                <a14:useLocalDpi xmlns:a14="http://schemas.microsoft.com/office/drawing/2010/main" val="0"/>
+              </a:ext>
+            </a:extLst>
+          </a:blip>
+          <a:stretch>
+            <a:fillRect/>
+          </a:stretch>
+        </p:blipFill>
+        <p:spPr>
+          <a:xfrm>
+            <a:off x="543367" y="4009281"/>
+            <a:ext cx="2193032" cy="2006624"/>
+          </a:xfrm>
+          <a:prstGeom prst="rect">
+            <a:avLst/>
+          </a:prstGeom>
+        </p:spPr>
+      </p:pic>
+      <p:pic>
+        <p:nvPicPr>
+          <p:cNvPr id="3" name="図 2"/>
+          <p:cNvPicPr>
+            <a:picLocks noChangeAspect="1"/>
+          </p:cNvPicPr>
+          <p:nvPr/>
+        </p:nvPicPr>
+        <p:blipFill>
+          <a:blip r:embed="rId3">
+            <a:extLst>
+              <a:ext uri="{28A0092B-C50C-407E-A947-70E740481C1C}">
+                <a14:useLocalDpi xmlns:a14="http://schemas.microsoft.com/office/drawing/2010/main" val="0"/>
+              </a:ext>
+            </a:extLst>
+          </a:blip>
+          <a:stretch>
+            <a:fillRect/>
+          </a:stretch>
+        </p:blipFill>
+        <p:spPr>
+          <a:xfrm>
+            <a:off x="6969224" y="3971081"/>
+            <a:ext cx="1944216" cy="1944216"/>
+          </a:xfrm>
+          <a:prstGeom prst="rect">
+            <a:avLst/>
+          </a:prstGeom>
+        </p:spPr>
+      </p:pic>
+      <p:pic>
+        <p:nvPicPr>
+          <p:cNvPr id="5" name="図 4"/>
+          <p:cNvPicPr>
+            <a:picLocks noChangeAspect="1"/>
+          </p:cNvPicPr>
+          <p:nvPr/>
+        </p:nvPicPr>
+        <p:blipFill>
+          <a:blip r:embed="rId4">
+            <a:extLst>
+              <a:ext uri="{28A0092B-C50C-407E-A947-70E740481C1C}">
+                <a14:useLocalDpi xmlns:a14="http://schemas.microsoft.com/office/drawing/2010/main" val="0"/>
+              </a:ext>
+            </a:extLst>
+          </a:blip>
+          <a:stretch>
+            <a:fillRect/>
+          </a:stretch>
+        </p:blipFill>
+        <p:spPr>
+          <a:xfrm>
+            <a:off x="6465168" y="2057329"/>
+            <a:ext cx="2448272" cy="1947735"/>
+          </a:xfrm>
+          <a:prstGeom prst="rect">
+            <a:avLst/>
+          </a:prstGeom>
+        </p:spPr>
+      </p:pic>
+      <p:pic>
+        <p:nvPicPr>
+          <p:cNvPr id="8" name="図 7"/>
+          <p:cNvPicPr>
+            <a:picLocks noChangeAspect="1"/>
+          </p:cNvPicPr>
+          <p:nvPr/>
+        </p:nvPicPr>
+        <p:blipFill>
+          <a:blip r:embed="rId5">
+            <a:extLst>
+              <a:ext uri="{28A0092B-C50C-407E-A947-70E740481C1C}">
+                <a14:useLocalDpi xmlns:a14="http://schemas.microsoft.com/office/drawing/2010/main" val="0"/>
+              </a:ext>
+            </a:extLst>
+          </a:blip>
+          <a:stretch>
+            <a:fillRect/>
+          </a:stretch>
+        </p:blipFill>
+        <p:spPr>
+          <a:xfrm>
+            <a:off x="128464" y="1850348"/>
+            <a:ext cx="1674045" cy="1963689"/>
+          </a:xfrm>
+          <a:prstGeom prst="rect">
+            <a:avLst/>
+          </a:prstGeom>
+        </p:spPr>
+      </p:pic>
+      <p:pic>
+        <p:nvPicPr>
+          <p:cNvPr id="10" name="図 9"/>
+          <p:cNvPicPr>
+            <a:picLocks noChangeAspect="1"/>
+          </p:cNvPicPr>
+          <p:nvPr/>
+        </p:nvPicPr>
+        <p:blipFill>
+          <a:blip r:embed="rId6">
+            <a:extLst>
+              <a:ext uri="{28A0092B-C50C-407E-A947-70E740481C1C}">
+                <a14:useLocalDpi xmlns:a14="http://schemas.microsoft.com/office/drawing/2010/main" val="0"/>
+              </a:ext>
+            </a:extLst>
+          </a:blip>
+          <a:stretch>
+            <a:fillRect/>
+          </a:stretch>
+        </p:blipFill>
+        <p:spPr>
+          <a:xfrm>
+            <a:off x="2504728" y="1770689"/>
+            <a:ext cx="1728192" cy="2113277"/>
+          </a:xfrm>
+          <a:prstGeom prst="rect">
+            <a:avLst/>
+          </a:prstGeom>
+        </p:spPr>
+      </p:pic>
+      <p:sp>
+        <p:nvSpPr>
+          <p:cNvPr id="11" name="テキスト ボックス 10"/>
+          <p:cNvSpPr txBox="1"/>
+          <p:nvPr/>
+        </p:nvSpPr>
+        <p:spPr>
+          <a:xfrm>
+            <a:off x="335742" y="6089406"/>
+            <a:ext cx="4031873" cy="707886"/>
+          </a:xfrm>
+          <a:prstGeom prst="rect">
+            <a:avLst/>
+          </a:prstGeom>
+          <a:noFill/>
+        </p:spPr>
+        <p:txBody>
+          <a:bodyPr wrap="square" rtlCol="0"/>
+          <a:lstStyle/>
+          <a:p>
+            <a:pPr>
+              <a:defRPr sz="1600"/>
+            </a:pPr>
+            <a:r>
+              <a:rPr lang="ja-JP" altLang="en-US" sz="1600" dirty="0"/>
+              <a:t>If you accept too much work at first</a:t>
+            </a:r>
+            <a:endParaRPr lang="en-US" altLang="ja-JP" sz="2000" dirty="0"/>
+          </a:p>
+          <a:p>
+            <a:pPr>
+              <a:defRPr sz="1600"/>
+            </a:pPr>
+            <a:r>
+              <a:rPr lang="ja-JP" altLang="en-US" sz="1600" dirty="0"/>
+              <a:t>because it looks easy...</a:t>
+            </a:r>
+            <a:endParaRPr lang="en-US" altLang="ja-JP" sz="2000" dirty="0"/>
+          </a:p>
+        </p:txBody>
+      </p:sp>
+      <p:sp>
+        <p:nvSpPr>
+          <p:cNvPr id="12" name="角丸四角形吹き出し 11"/>
+          <p:cNvSpPr/>
+          <p:nvPr/>
+        </p:nvSpPr>
+        <p:spPr>
+          <a:xfrm>
+            <a:off x="3038834" y="908720"/>
+            <a:ext cx="2160240" cy="592997"/>
+          </a:xfrm>
+          <a:prstGeom prst="wedgeRoundRectCallout">
+            <a:avLst>
+              <a:gd name="adj1" fmla="val -34706"/>
+              <a:gd name="adj2" fmla="val 89748"/>
+              <a:gd name="adj3" fmla="val 16667"/>
+            </a:avLst>
+          </a:prstGeom>
+          <a:solidFill>
+            <a:schemeClr val="bg1"/>
+          </a:solidFill>
+          <a:ln>
+            <a:solidFill>
+              <a:schemeClr val="tx1"/>
+            </a:solidFill>
+          </a:ln>
+        </p:spPr>
+        <p:style>
+          <a:lnRef idx="2">
+            <a:schemeClr val="accent1">
+              <a:shade val="50000"/>
+            </a:schemeClr>
+          </a:lnRef>
+          <a:fillRef idx="1">
+            <a:schemeClr val="accent1"/>
+          </a:fillRef>
+          <a:effectRef idx="0">
+            <a:schemeClr val="accent1"/>
+          </a:effectRef>
+          <a:fontRef idx="minor">
+            <a:schemeClr val="lt1"/>
+          </a:fontRef>
+        </p:style>
+        <p:txBody>
+          <a:bodyPr rtlCol="0" anchor="ctr" wrap="square"/>
+          <a:lstStyle/>
+          <a:p>
+            <a:pPr algn="ctr">
+              <a:defRPr sz="1650"/>
+            </a:pPr>
+            <a:r>
+              <a:rPr lang="ja-JP" altLang="en-US" sz="1650" dirty="0">
+                <a:solidFill>
+                  <a:schemeClr val="tx1"/>
+                </a:solidFill>
+              </a:rPr>
+              <a:t>Please handle this too.</a:t>
+            </a:r>
+          </a:p>
+        </p:txBody>
+      </p:sp>
+      <p:sp>
+        <p:nvSpPr>
+          <p:cNvPr id="13" name="円形吹き出し 12"/>
+          <p:cNvSpPr/>
+          <p:nvPr/>
+        </p:nvSpPr>
+        <p:spPr>
+          <a:xfrm>
+            <a:off x="488504" y="692696"/>
+            <a:ext cx="2130190" cy="936104"/>
+          </a:xfrm>
+          <a:prstGeom prst="wedgeEllipseCallout">
+            <a:avLst>
+              <a:gd name="adj1" fmla="val -19687"/>
+              <a:gd name="adj2" fmla="val 61589"/>
+            </a:avLst>
+          </a:prstGeom>
+          <a:solidFill>
+            <a:schemeClr val="bg1"/>
+          </a:solidFill>
+          <a:ln>
+            <a:solidFill>
+              <a:schemeClr val="tx1"/>
+            </a:solidFill>
+          </a:ln>
+        </p:spPr>
+        <p:style>
+          <a:lnRef idx="2">
+            <a:schemeClr val="accent1">
+              <a:shade val="50000"/>
+            </a:schemeClr>
+          </a:lnRef>
+          <a:fillRef idx="1">
+            <a:schemeClr val="accent1"/>
+          </a:fillRef>
+          <a:effectRef idx="0">
+            <a:schemeClr val="accent1"/>
+          </a:effectRef>
+          <a:fontRef idx="minor">
+            <a:schemeClr val="lt1"/>
+          </a:fontRef>
+        </p:style>
+        <p:txBody>
+          <a:bodyPr rtlCol="0" anchor="ctr"/>
+          <a:lstStyle/>
+          <a:p>
+            <a:pPr algn="ctr">
+              <a:defRPr/>
+            </a:pPr>
+            <a:r>
+              <a:rPr lang="ja-JP" altLang="en-US" sz="2000" dirty="0">
+                <a:solidFill>
+                  <a:schemeClr val="tx1"/>
+                </a:solidFill>
+              </a:rPr>
+              <a:t>Can you take care of this?</a:t>
+            </a:r>
+            <a:endParaRPr kumimoji="1" lang="ja-JP" altLang="en-US" sz="2000" dirty="0">
+              <a:solidFill>
+                <a:schemeClr val="tx1"/>
+              </a:solidFill>
+            </a:endParaRPr>
+          </a:p>
+        </p:txBody>
+      </p:sp>
+      <p:sp>
+        <p:nvSpPr>
+          <p:cNvPr id="15" name="角丸四角形吹き出し 14"/>
+          <p:cNvSpPr/>
+          <p:nvPr/>
+        </p:nvSpPr>
+        <p:spPr>
+          <a:xfrm>
+            <a:off x="2618694" y="3984955"/>
+            <a:ext cx="2160240" cy="592997"/>
+          </a:xfrm>
+          <a:prstGeom prst="wedgeRoundRectCallout">
+            <a:avLst>
+              <a:gd name="adj1" fmla="val -65162"/>
+              <a:gd name="adj2" fmla="val 35213"/>
+              <a:gd name="adj3" fmla="val 16667"/>
+            </a:avLst>
+          </a:prstGeom>
+          <a:solidFill>
+            <a:schemeClr val="bg1"/>
+          </a:solidFill>
+          <a:ln>
+            <a:solidFill>
+              <a:schemeClr val="tx1"/>
+            </a:solidFill>
+          </a:ln>
+        </p:spPr>
+        <p:style>
+          <a:lnRef idx="2">
+            <a:schemeClr val="accent1">
+              <a:shade val="50000"/>
+            </a:schemeClr>
+          </a:lnRef>
+          <a:fillRef idx="1">
+            <a:schemeClr val="accent1"/>
+          </a:fillRef>
+          <a:effectRef idx="0">
+            <a:schemeClr val="accent1"/>
+          </a:effectRef>
+          <a:fontRef idx="minor">
+            <a:schemeClr val="lt1"/>
+          </a:fontRef>
+        </p:style>
+        <p:txBody>
+          <a:bodyPr rtlCol="0" anchor="ctr"/>
+          <a:lstStyle/>
+          <a:p>
+            <a:pPr algn="ctr">
+              <a:defRPr/>
+            </a:pPr>
+            <a:r>
+              <a:rPr kumimoji="1" lang="ja-JP" altLang="en-US" sz="2000" dirty="0" err="1">
+                <a:solidFill>
+                  <a:schemeClr val="tx1"/>
+                </a:solidFill>
+              </a:rPr>
+              <a:t>Sure.</a:t>
+            </a:r>
+            <a:endParaRPr kumimoji="1" lang="ja-JP" altLang="en-US" sz="2000" dirty="0">
+              <a:solidFill>
+                <a:schemeClr val="tx1"/>
+              </a:solidFill>
+            </a:endParaRPr>
+          </a:p>
+        </p:txBody>
+      </p:sp>
+      <p:sp>
+        <p:nvSpPr>
+          <p:cNvPr id="16" name="テキスト ボックス 15"/>
+          <p:cNvSpPr txBox="1"/>
+          <p:nvPr/>
+        </p:nvSpPr>
+        <p:spPr>
+          <a:xfrm>
+            <a:off x="5745088" y="6089406"/>
+            <a:ext cx="4031873" cy="707886"/>
+          </a:xfrm>
+          <a:prstGeom prst="rect">
+            <a:avLst/>
+          </a:prstGeom>
+          <a:noFill/>
+        </p:spPr>
+        <p:txBody>
+          <a:bodyPr wrap="square" rtlCol="0"/>
+          <a:lstStyle/>
+          <a:p>
+            <a:pPr>
+              <a:defRPr sz="1400"/>
+            </a:pPr>
+            <a:r>
+              <a:rPr kumimoji="1" lang="ja-JP" altLang="en-US" sz="1400" dirty="0"/>
+              <a:t>Before you know it, you become</a:t>
+            </a:r>
+            <a:endParaRPr kumimoji="1" lang="en-US" altLang="ja-JP" sz="2000" dirty="0"/>
+          </a:p>
+          <a:p>
+            <a:pPr>
+              <a:defRPr sz="1400"/>
+            </a:pPr>
+            <a:r>
+              <a:rPr kumimoji="1" lang="ja-JP" altLang="en-US" sz="1400" dirty="0"/>
+              <a:t>"the person in charge" and things get painful...</a:t>
+            </a:r>
+            <a:endParaRPr kumimoji="1" lang="en-US" altLang="ja-JP" sz="2000" dirty="0"/>
+          </a:p>
+        </p:txBody>
+      </p:sp>
+      <p:sp>
+        <p:nvSpPr>
+          <p:cNvPr id="17" name="角丸四角形吹き出し 16"/>
+          <p:cNvSpPr/>
+          <p:nvPr/>
+        </p:nvSpPr>
+        <p:spPr>
+          <a:xfrm>
+            <a:off x="6455732" y="847284"/>
+            <a:ext cx="2744023" cy="849162"/>
+          </a:xfrm>
+          <a:prstGeom prst="wedgeRoundRectCallout">
+            <a:avLst>
+              <a:gd name="adj1" fmla="val -34706"/>
+              <a:gd name="adj2" fmla="val 89748"/>
+              <a:gd name="adj3" fmla="val 16667"/>
+            </a:avLst>
+          </a:prstGeom>
+          <a:solidFill>
+            <a:schemeClr val="bg1"/>
+          </a:solidFill>
+          <a:ln>
+            <a:solidFill>
+              <a:schemeClr val="tx1"/>
+            </a:solidFill>
+          </a:ln>
+        </p:spPr>
+        <p:style>
+          <a:lnRef idx="2">
+            <a:schemeClr val="accent1">
+              <a:shade val="50000"/>
+            </a:schemeClr>
+          </a:lnRef>
+          <a:fillRef idx="1">
+            <a:schemeClr val="accent1"/>
+          </a:fillRef>
+          <a:effectRef idx="0">
+            <a:schemeClr val="accent1"/>
+          </a:effectRef>
+          <a:fontRef idx="minor">
+            <a:schemeClr val="lt1"/>
+          </a:fontRef>
+        </p:style>
+        <p:txBody>
+          <a:bodyPr rtlCol="0" anchor="ctr" wrap="square"/>
+          <a:lstStyle/>
+          <a:p>
+            <a:pPr algn="ctr">
+              <a:defRPr sz="1650"/>
+            </a:pPr>
+            <a:r>
+              <a:rPr lang="ja-JP" altLang="en-US" sz="1650" dirty="0">
+                <a:solidFill>
+                  <a:schemeClr val="tx1"/>
+                </a:solidFill>
+              </a:rPr>
+              <a:t>I heard you're in charge</a:t>
+            </a:r>
+            <a:endParaRPr lang="en-US" altLang="ja-JP" sz="2000" dirty="0">
+              <a:solidFill>
+                <a:schemeClr val="tx1"/>
+              </a:solidFill>
+            </a:endParaRPr>
+          </a:p>
+          <a:p>
+            <a:pPr algn="ctr">
+              <a:defRPr sz="1650"/>
+            </a:pPr>
+            <a:r>
+              <a:rPr lang="ja-JP" altLang="en-US" sz="1650" dirty="0">
+                <a:solidFill>
+                  <a:schemeClr val="tx1"/>
+                </a:solidFill>
+              </a:rPr>
+              <a:t>of this.</a:t>
+            </a:r>
+            <a:endParaRPr lang="en-US" altLang="ja-JP" sz="2000" dirty="0">
+              <a:solidFill>
+                <a:schemeClr val="tx1"/>
+              </a:solidFill>
+            </a:endParaRPr>
+          </a:p>
+        </p:txBody>
+      </p:sp>
+      <p:sp>
+        <p:nvSpPr>
+          <p:cNvPr id="18" name="右矢印 17"/>
+          <p:cNvSpPr/>
+          <p:nvPr/>
+        </p:nvSpPr>
+        <p:spPr>
+          <a:xfrm>
+            <a:off x="4953000" y="3506532"/>
+            <a:ext cx="792088" cy="790781"/>
+          </a:xfrm>
+          <a:prstGeom prst="rightArrow">
+            <a:avLst/>
+          </a:prstGeom>
+          <a:solidFill>
+            <a:srgbClr val="FF0000"/>
+          </a:solidFill>
+          <a:ln>
+            <a:solidFill>
+              <a:schemeClr val="tx1"/>
+            </a:solidFill>
+          </a:ln>
+        </p:spPr>
+        <p:style>
+          <a:lnRef idx="2">
+            <a:schemeClr val="accent1">
+              <a:shade val="50000"/>
+            </a:schemeClr>
+          </a:lnRef>
+          <a:fillRef idx="1">
+            <a:schemeClr val="accent1"/>
+          </a:fillRef>
+          <a:effectRef idx="0">
+            <a:schemeClr val="accent1"/>
+          </a:effectRef>
+          <a:fontRef idx="minor">
+            <a:schemeClr val="lt1"/>
+          </a:fontRef>
+        </p:style>
+        <p:txBody>
+          <a:bodyPr rtlCol="0" anchor="ctr"/>
+          <a:lstStyle/>
+          <a:p>
+            <a:pPr algn="ctr"/>
+            <a:endParaRPr kumimoji="1" lang="ja-JP" altLang="en-US"/>
+          </a:p>
+        </p:txBody>
+      </p:sp>
+      <p:sp>
+        <p:nvSpPr>
+          <p:cNvPr id="19" name="テキスト ボックス 18"/>
+          <p:cNvSpPr txBox="1"/>
+          <p:nvPr/>
+        </p:nvSpPr>
+        <p:spPr>
+          <a:xfrm>
+            <a:off x="2727106" y="127008"/>
+            <a:ext cx="4698722" cy="584775"/>
+          </a:xfrm>
+          <a:prstGeom prst="rect">
+            <a:avLst/>
+          </a:prstGeom>
+          <a:noFill/>
+          <a:ln>
+            <a:solidFill>
+              <a:schemeClr val="tx1"/>
+            </a:solidFill>
+          </a:ln>
+        </p:spPr>
+        <p:txBody>
+          <a:bodyPr wrap="square" rtlCol="0"/>
+          <a:lstStyle/>
+          <a:p>
+            <a:pPr>
+              <a:defRPr sz="2900"/>
+            </a:pPr>
+            <a:r>
+              <a:rPr kumimoji="1" lang="ja-JP" altLang="en-US" sz="2900" dirty="0"/>
+              <a:t>First-touch policy</a:t>
+            </a:r>
+          </a:p>
+        </p:txBody>
+      </p:sp>
+    </p:spTree>
+    <p:extLst>
+      <p:ext uri="{BB962C8B-B14F-4D97-AF65-F5344CB8AC3E}">
+        <p14:creationId xmlns:p14="http://schemas.microsoft.com/office/powerpoint/2010/main" val="3084154577"/>
+      </p:ext>
+    </p:extLst>
+  </p:cSld>
+  <p:clrMapOvr>
+    <a:masterClrMapping/>
+  </p:clrMapOvr>
+</p:sld>
+</file>
+
+<file path=ppt/slides/slide5.xml><?xml version="1.0" encoding="utf-8"?>
 <p:sld xmlns:a="http://schemas.openxmlformats.org/drawingml/2006/main" xmlns:r="http://schemas.openxmlformats.org/officeDocument/2006/relationships" xmlns:p="http://schemas.openxmlformats.org/presentationml/2006/main">
   <p:cSld>
     <p:spTree>
@@ -3450,2398 +5933,6 @@
 </p:sld>
 </file>
 
-<file path=ppt/slides/slide4.xml><?xml version="1.0" encoding="utf-8"?>
-<p:sld xmlns:a="http://schemas.openxmlformats.org/drawingml/2006/main" xmlns:r="http://schemas.openxmlformats.org/officeDocument/2006/relationships" xmlns:p="http://schemas.openxmlformats.org/presentationml/2006/main">
-  <p:cSld>
-    <p:spTree>
-      <p:nvGrpSpPr>
-        <p:cNvPr id="1" name=""/>
-        <p:cNvGrpSpPr/>
-        <p:nvPr/>
-      </p:nvGrpSpPr>
-      <p:grpSpPr>
-        <a:xfrm>
-          <a:off x="0" y="0"/>
-          <a:ext cx="0" cy="0"/>
-          <a:chOff x="0" y="0"/>
-          <a:chExt cx="0" cy="0"/>
-        </a:xfrm>
-      </p:grpSpPr>
-      <p:grpSp>
-        <p:nvGrpSpPr>
-          <p:cNvPr id="7" name="グループ化 6"/>
-          <p:cNvGrpSpPr/>
-          <p:nvPr/>
-        </p:nvGrpSpPr>
-        <p:grpSpPr>
-          <a:xfrm>
-            <a:off x="2792760" y="2708920"/>
-            <a:ext cx="1437775" cy="1444550"/>
-            <a:chOff x="2075065" y="548680"/>
-            <a:chExt cx="1437775" cy="1444550"/>
-          </a:xfrm>
-        </p:grpSpPr>
-        <p:sp>
-          <p:nvSpPr>
-            <p:cNvPr id="3" name="正方形/長方形 2"/>
-            <p:cNvSpPr/>
-            <p:nvPr/>
-          </p:nvSpPr>
-          <p:spPr>
-            <a:xfrm>
-              <a:off x="2075065" y="548680"/>
-              <a:ext cx="720080" cy="720080"/>
-            </a:xfrm>
-            <a:prstGeom prst="rect">
-              <a:avLst/>
-            </a:prstGeom>
-            <a:solidFill>
-              <a:srgbClr val="FF0000"/>
-            </a:solidFill>
-            <a:ln>
-              <a:solidFill>
-                <a:schemeClr val="tx1"/>
-              </a:solidFill>
-            </a:ln>
-          </p:spPr>
-          <p:style>
-            <a:lnRef idx="2">
-              <a:schemeClr val="accent1">
-                <a:shade val="50000"/>
-              </a:schemeClr>
-            </a:lnRef>
-            <a:fillRef idx="1">
-              <a:schemeClr val="accent1"/>
-            </a:fillRef>
-            <a:effectRef idx="0">
-              <a:schemeClr val="accent1"/>
-            </a:effectRef>
-            <a:fontRef idx="minor">
-              <a:schemeClr val="lt1"/>
-            </a:fontRef>
-          </p:style>
-          <p:txBody>
-            <a:bodyPr rtlCol="0" anchor="ctr"/>
-            <a:lstStyle/>
-            <a:p>
-              <a:pPr algn="ctr"/>
-              <a:r>
-                <a:rPr kumimoji="1" lang="en-US" altLang="ja-JP" dirty="0"/>
-                <a:t>CPU</a:t>
-              </a:r>
-            </a:p>
-            <a:p>
-              <a:pPr algn="ctr"/>
-              <a:r>
-                <a:rPr kumimoji="1" lang="en-US" altLang="ja-JP" dirty="0"/>
-                <a:t>CORE</a:t>
-              </a:r>
-              <a:endParaRPr kumimoji="1" lang="ja-JP" altLang="en-US" dirty="0"/>
-            </a:p>
-          </p:txBody>
-        </p:sp>
-        <p:sp>
-          <p:nvSpPr>
-            <p:cNvPr id="4" name="正方形/長方形 3"/>
-            <p:cNvSpPr/>
-            <p:nvPr/>
-          </p:nvSpPr>
-          <p:spPr>
-            <a:xfrm>
-              <a:off x="2792760" y="553070"/>
-              <a:ext cx="720080" cy="720080"/>
-            </a:xfrm>
-            <a:prstGeom prst="rect">
-              <a:avLst/>
-            </a:prstGeom>
-            <a:solidFill>
-              <a:srgbClr val="FF0000"/>
-            </a:solidFill>
-            <a:ln>
-              <a:solidFill>
-                <a:schemeClr val="tx1"/>
-              </a:solidFill>
-            </a:ln>
-          </p:spPr>
-          <p:style>
-            <a:lnRef idx="2">
-              <a:schemeClr val="accent1">
-                <a:shade val="50000"/>
-              </a:schemeClr>
-            </a:lnRef>
-            <a:fillRef idx="1">
-              <a:schemeClr val="accent1"/>
-            </a:fillRef>
-            <a:effectRef idx="0">
-              <a:schemeClr val="accent1"/>
-            </a:effectRef>
-            <a:fontRef idx="minor">
-              <a:schemeClr val="lt1"/>
-            </a:fontRef>
-          </p:style>
-          <p:txBody>
-            <a:bodyPr rtlCol="0" anchor="ctr"/>
-            <a:lstStyle/>
-            <a:p>
-              <a:pPr algn="ctr"/>
-              <a:r>
-                <a:rPr kumimoji="1" lang="en-US" altLang="ja-JP" dirty="0"/>
-                <a:t>CPU</a:t>
-              </a:r>
-            </a:p>
-            <a:p>
-              <a:pPr algn="ctr"/>
-              <a:r>
-                <a:rPr kumimoji="1" lang="en-US" altLang="ja-JP" dirty="0"/>
-                <a:t>CORE</a:t>
-              </a:r>
-              <a:endParaRPr kumimoji="1" lang="ja-JP" altLang="en-US" dirty="0"/>
-            </a:p>
-          </p:txBody>
-        </p:sp>
-        <p:sp>
-          <p:nvSpPr>
-            <p:cNvPr id="5" name="正方形/長方形 4"/>
-            <p:cNvSpPr/>
-            <p:nvPr/>
-          </p:nvSpPr>
-          <p:spPr>
-            <a:xfrm>
-              <a:off x="2075065" y="1273150"/>
-              <a:ext cx="720080" cy="720080"/>
-            </a:xfrm>
-            <a:prstGeom prst="rect">
-              <a:avLst/>
-            </a:prstGeom>
-            <a:solidFill>
-              <a:srgbClr val="FF0000"/>
-            </a:solidFill>
-            <a:ln>
-              <a:solidFill>
-                <a:schemeClr val="tx1"/>
-              </a:solidFill>
-            </a:ln>
-          </p:spPr>
-          <p:style>
-            <a:lnRef idx="2">
-              <a:schemeClr val="accent1">
-                <a:shade val="50000"/>
-              </a:schemeClr>
-            </a:lnRef>
-            <a:fillRef idx="1">
-              <a:schemeClr val="accent1"/>
-            </a:fillRef>
-            <a:effectRef idx="0">
-              <a:schemeClr val="accent1"/>
-            </a:effectRef>
-            <a:fontRef idx="minor">
-              <a:schemeClr val="lt1"/>
-            </a:fontRef>
-          </p:style>
-          <p:txBody>
-            <a:bodyPr rtlCol="0" anchor="ctr"/>
-            <a:lstStyle/>
-            <a:p>
-              <a:pPr algn="ctr"/>
-              <a:r>
-                <a:rPr lang="en-US" altLang="ja-JP" dirty="0"/>
-                <a:t>CPU</a:t>
-              </a:r>
-              <a:br>
-                <a:rPr lang="en-US" altLang="ja-JP" dirty="0"/>
-              </a:br>
-              <a:r>
-                <a:rPr lang="en-US" altLang="ja-JP" dirty="0"/>
-                <a:t>CORE</a:t>
-              </a:r>
-              <a:endParaRPr kumimoji="1" lang="ja-JP" altLang="en-US" dirty="0"/>
-            </a:p>
-          </p:txBody>
-        </p:sp>
-        <p:sp>
-          <p:nvSpPr>
-            <p:cNvPr id="6" name="正方形/長方形 5"/>
-            <p:cNvSpPr/>
-            <p:nvPr/>
-          </p:nvSpPr>
-          <p:spPr>
-            <a:xfrm>
-              <a:off x="2792760" y="1273150"/>
-              <a:ext cx="720080" cy="720080"/>
-            </a:xfrm>
-            <a:prstGeom prst="rect">
-              <a:avLst/>
-            </a:prstGeom>
-            <a:solidFill>
-              <a:srgbClr val="FF0000"/>
-            </a:solidFill>
-            <a:ln>
-              <a:solidFill>
-                <a:schemeClr val="tx1"/>
-              </a:solidFill>
-            </a:ln>
-          </p:spPr>
-          <p:style>
-            <a:lnRef idx="2">
-              <a:schemeClr val="accent1">
-                <a:shade val="50000"/>
-              </a:schemeClr>
-            </a:lnRef>
-            <a:fillRef idx="1">
-              <a:schemeClr val="accent1"/>
-            </a:fillRef>
-            <a:effectRef idx="0">
-              <a:schemeClr val="accent1"/>
-            </a:effectRef>
-            <a:fontRef idx="minor">
-              <a:schemeClr val="lt1"/>
-            </a:fontRef>
-          </p:style>
-          <p:txBody>
-            <a:bodyPr rtlCol="0" anchor="ctr"/>
-            <a:lstStyle/>
-            <a:p>
-              <a:pPr algn="ctr"/>
-              <a:r>
-                <a:rPr kumimoji="1" lang="en-US" altLang="ja-JP" dirty="0"/>
-                <a:t>CPU</a:t>
-              </a:r>
-            </a:p>
-            <a:p>
-              <a:pPr algn="ctr"/>
-              <a:r>
-                <a:rPr lang="en-US" altLang="ja-JP" dirty="0"/>
-                <a:t>CORE</a:t>
-              </a:r>
-              <a:endParaRPr kumimoji="1" lang="ja-JP" altLang="en-US" dirty="0"/>
-            </a:p>
-          </p:txBody>
-        </p:sp>
-      </p:grpSp>
-      <p:grpSp>
-        <p:nvGrpSpPr>
-          <p:cNvPr id="8" name="グループ化 7"/>
-          <p:cNvGrpSpPr/>
-          <p:nvPr/>
-        </p:nvGrpSpPr>
-        <p:grpSpPr>
-          <a:xfrm>
-            <a:off x="4953000" y="553792"/>
-            <a:ext cx="1437775" cy="1444550"/>
-            <a:chOff x="2075065" y="548680"/>
-            <a:chExt cx="1437775" cy="1444550"/>
-          </a:xfrm>
-        </p:grpSpPr>
-        <p:sp>
-          <p:nvSpPr>
-            <p:cNvPr id="9" name="正方形/長方形 8"/>
-            <p:cNvSpPr/>
-            <p:nvPr/>
-          </p:nvSpPr>
-          <p:spPr>
-            <a:xfrm>
-              <a:off x="2075065" y="548680"/>
-              <a:ext cx="720080" cy="720080"/>
-            </a:xfrm>
-            <a:prstGeom prst="rect">
-              <a:avLst/>
-            </a:prstGeom>
-            <a:solidFill>
-              <a:srgbClr val="FF0000"/>
-            </a:solidFill>
-            <a:ln>
-              <a:solidFill>
-                <a:schemeClr val="tx1"/>
-              </a:solidFill>
-            </a:ln>
-          </p:spPr>
-          <p:style>
-            <a:lnRef idx="2">
-              <a:schemeClr val="accent1">
-                <a:shade val="50000"/>
-              </a:schemeClr>
-            </a:lnRef>
-            <a:fillRef idx="1">
-              <a:schemeClr val="accent1"/>
-            </a:fillRef>
-            <a:effectRef idx="0">
-              <a:schemeClr val="accent1"/>
-            </a:effectRef>
-            <a:fontRef idx="minor">
-              <a:schemeClr val="lt1"/>
-            </a:fontRef>
-          </p:style>
-          <p:txBody>
-            <a:bodyPr rtlCol="0" anchor="ctr"/>
-            <a:lstStyle/>
-            <a:p>
-              <a:pPr algn="ctr"/>
-              <a:r>
-                <a:rPr kumimoji="1" lang="en-US" altLang="ja-JP" dirty="0"/>
-                <a:t>CPU</a:t>
-              </a:r>
-            </a:p>
-            <a:p>
-              <a:pPr algn="ctr"/>
-              <a:r>
-                <a:rPr kumimoji="1" lang="en-US" altLang="ja-JP" dirty="0"/>
-                <a:t>CORE</a:t>
-              </a:r>
-              <a:endParaRPr kumimoji="1" lang="ja-JP" altLang="en-US" dirty="0"/>
-            </a:p>
-          </p:txBody>
-        </p:sp>
-        <p:sp>
-          <p:nvSpPr>
-            <p:cNvPr id="10" name="正方形/長方形 9"/>
-            <p:cNvSpPr/>
-            <p:nvPr/>
-          </p:nvSpPr>
-          <p:spPr>
-            <a:xfrm>
-              <a:off x="2792760" y="553070"/>
-              <a:ext cx="720080" cy="720080"/>
-            </a:xfrm>
-            <a:prstGeom prst="rect">
-              <a:avLst/>
-            </a:prstGeom>
-            <a:solidFill>
-              <a:srgbClr val="FF0000"/>
-            </a:solidFill>
-            <a:ln>
-              <a:solidFill>
-                <a:schemeClr val="tx1"/>
-              </a:solidFill>
-            </a:ln>
-          </p:spPr>
-          <p:style>
-            <a:lnRef idx="2">
-              <a:schemeClr val="accent1">
-                <a:shade val="50000"/>
-              </a:schemeClr>
-            </a:lnRef>
-            <a:fillRef idx="1">
-              <a:schemeClr val="accent1"/>
-            </a:fillRef>
-            <a:effectRef idx="0">
-              <a:schemeClr val="accent1"/>
-            </a:effectRef>
-            <a:fontRef idx="minor">
-              <a:schemeClr val="lt1"/>
-            </a:fontRef>
-          </p:style>
-          <p:txBody>
-            <a:bodyPr rtlCol="0" anchor="ctr"/>
-            <a:lstStyle/>
-            <a:p>
-              <a:pPr algn="ctr"/>
-              <a:r>
-                <a:rPr kumimoji="1" lang="en-US" altLang="ja-JP" dirty="0"/>
-                <a:t>CPU</a:t>
-              </a:r>
-            </a:p>
-            <a:p>
-              <a:pPr algn="ctr"/>
-              <a:r>
-                <a:rPr kumimoji="1" lang="en-US" altLang="ja-JP" dirty="0"/>
-                <a:t>CORE</a:t>
-              </a:r>
-              <a:endParaRPr kumimoji="1" lang="ja-JP" altLang="en-US" dirty="0"/>
-            </a:p>
-          </p:txBody>
-        </p:sp>
-        <p:sp>
-          <p:nvSpPr>
-            <p:cNvPr id="11" name="正方形/長方形 10"/>
-            <p:cNvSpPr/>
-            <p:nvPr/>
-          </p:nvSpPr>
-          <p:spPr>
-            <a:xfrm>
-              <a:off x="2075065" y="1273150"/>
-              <a:ext cx="720080" cy="720080"/>
-            </a:xfrm>
-            <a:prstGeom prst="rect">
-              <a:avLst/>
-            </a:prstGeom>
-            <a:solidFill>
-              <a:srgbClr val="FF0000"/>
-            </a:solidFill>
-            <a:ln>
-              <a:solidFill>
-                <a:schemeClr val="tx1"/>
-              </a:solidFill>
-            </a:ln>
-          </p:spPr>
-          <p:style>
-            <a:lnRef idx="2">
-              <a:schemeClr val="accent1">
-                <a:shade val="50000"/>
-              </a:schemeClr>
-            </a:lnRef>
-            <a:fillRef idx="1">
-              <a:schemeClr val="accent1"/>
-            </a:fillRef>
-            <a:effectRef idx="0">
-              <a:schemeClr val="accent1"/>
-            </a:effectRef>
-            <a:fontRef idx="minor">
-              <a:schemeClr val="lt1"/>
-            </a:fontRef>
-          </p:style>
-          <p:txBody>
-            <a:bodyPr rtlCol="0" anchor="ctr"/>
-            <a:lstStyle/>
-            <a:p>
-              <a:pPr algn="ctr"/>
-              <a:r>
-                <a:rPr lang="en-US" altLang="ja-JP" dirty="0"/>
-                <a:t>CPU</a:t>
-              </a:r>
-              <a:br>
-                <a:rPr lang="en-US" altLang="ja-JP" dirty="0"/>
-              </a:br>
-              <a:r>
-                <a:rPr lang="en-US" altLang="ja-JP" dirty="0"/>
-                <a:t>CORE</a:t>
-              </a:r>
-              <a:endParaRPr kumimoji="1" lang="ja-JP" altLang="en-US" dirty="0"/>
-            </a:p>
-          </p:txBody>
-        </p:sp>
-        <p:sp>
-          <p:nvSpPr>
-            <p:cNvPr id="12" name="正方形/長方形 11"/>
-            <p:cNvSpPr/>
-            <p:nvPr/>
-          </p:nvSpPr>
-          <p:spPr>
-            <a:xfrm>
-              <a:off x="2792760" y="1273150"/>
-              <a:ext cx="720080" cy="720080"/>
-            </a:xfrm>
-            <a:prstGeom prst="rect">
-              <a:avLst/>
-            </a:prstGeom>
-            <a:solidFill>
-              <a:srgbClr val="FF0000"/>
-            </a:solidFill>
-            <a:ln>
-              <a:solidFill>
-                <a:schemeClr val="tx1"/>
-              </a:solidFill>
-            </a:ln>
-          </p:spPr>
-          <p:style>
-            <a:lnRef idx="2">
-              <a:schemeClr val="accent1">
-                <a:shade val="50000"/>
-              </a:schemeClr>
-            </a:lnRef>
-            <a:fillRef idx="1">
-              <a:schemeClr val="accent1"/>
-            </a:fillRef>
-            <a:effectRef idx="0">
-              <a:schemeClr val="accent1"/>
-            </a:effectRef>
-            <a:fontRef idx="minor">
-              <a:schemeClr val="lt1"/>
-            </a:fontRef>
-          </p:style>
-          <p:txBody>
-            <a:bodyPr rtlCol="0" anchor="ctr"/>
-            <a:lstStyle/>
-            <a:p>
-              <a:pPr algn="ctr"/>
-              <a:r>
-                <a:rPr kumimoji="1" lang="en-US" altLang="ja-JP" dirty="0"/>
-                <a:t>CPU</a:t>
-              </a:r>
-            </a:p>
-            <a:p>
-              <a:pPr algn="ctr"/>
-              <a:r>
-                <a:rPr lang="en-US" altLang="ja-JP" dirty="0"/>
-                <a:t>CORE</a:t>
-              </a:r>
-              <a:endParaRPr kumimoji="1" lang="ja-JP" altLang="en-US" dirty="0"/>
-            </a:p>
-          </p:txBody>
-        </p:sp>
-      </p:grpSp>
-      <p:grpSp>
-        <p:nvGrpSpPr>
-          <p:cNvPr id="13" name="グループ化 12"/>
-          <p:cNvGrpSpPr/>
-          <p:nvPr/>
-        </p:nvGrpSpPr>
-        <p:grpSpPr>
-          <a:xfrm>
-            <a:off x="2795145" y="548680"/>
-            <a:ext cx="1437775" cy="1444550"/>
-            <a:chOff x="2075065" y="548680"/>
-            <a:chExt cx="1437775" cy="1444550"/>
-          </a:xfrm>
-        </p:grpSpPr>
-        <p:sp>
-          <p:nvSpPr>
-            <p:cNvPr id="14" name="正方形/長方形 13"/>
-            <p:cNvSpPr/>
-            <p:nvPr/>
-          </p:nvSpPr>
-          <p:spPr>
-            <a:xfrm>
-              <a:off x="2075065" y="548680"/>
-              <a:ext cx="720080" cy="720080"/>
-            </a:xfrm>
-            <a:prstGeom prst="rect">
-              <a:avLst/>
-            </a:prstGeom>
-            <a:solidFill>
-              <a:srgbClr val="FF0000"/>
-            </a:solidFill>
-            <a:ln>
-              <a:solidFill>
-                <a:schemeClr val="tx1"/>
-              </a:solidFill>
-            </a:ln>
-          </p:spPr>
-          <p:style>
-            <a:lnRef idx="2">
-              <a:schemeClr val="accent1">
-                <a:shade val="50000"/>
-              </a:schemeClr>
-            </a:lnRef>
-            <a:fillRef idx="1">
-              <a:schemeClr val="accent1"/>
-            </a:fillRef>
-            <a:effectRef idx="0">
-              <a:schemeClr val="accent1"/>
-            </a:effectRef>
-            <a:fontRef idx="minor">
-              <a:schemeClr val="lt1"/>
-            </a:fontRef>
-          </p:style>
-          <p:txBody>
-            <a:bodyPr rtlCol="0" anchor="ctr"/>
-            <a:lstStyle/>
-            <a:p>
-              <a:pPr algn="ctr"/>
-              <a:r>
-                <a:rPr kumimoji="1" lang="en-US" altLang="ja-JP" dirty="0"/>
-                <a:t>CPU</a:t>
-              </a:r>
-            </a:p>
-            <a:p>
-              <a:pPr algn="ctr"/>
-              <a:r>
-                <a:rPr kumimoji="1" lang="en-US" altLang="ja-JP" dirty="0"/>
-                <a:t>CORE</a:t>
-              </a:r>
-              <a:endParaRPr kumimoji="1" lang="ja-JP" altLang="en-US" dirty="0"/>
-            </a:p>
-          </p:txBody>
-        </p:sp>
-        <p:sp>
-          <p:nvSpPr>
-            <p:cNvPr id="15" name="正方形/長方形 14"/>
-            <p:cNvSpPr/>
-            <p:nvPr/>
-          </p:nvSpPr>
-          <p:spPr>
-            <a:xfrm>
-              <a:off x="2792760" y="553070"/>
-              <a:ext cx="720080" cy="720080"/>
-            </a:xfrm>
-            <a:prstGeom prst="rect">
-              <a:avLst/>
-            </a:prstGeom>
-            <a:solidFill>
-              <a:srgbClr val="FF0000"/>
-            </a:solidFill>
-            <a:ln>
-              <a:solidFill>
-                <a:schemeClr val="tx1"/>
-              </a:solidFill>
-            </a:ln>
-          </p:spPr>
-          <p:style>
-            <a:lnRef idx="2">
-              <a:schemeClr val="accent1">
-                <a:shade val="50000"/>
-              </a:schemeClr>
-            </a:lnRef>
-            <a:fillRef idx="1">
-              <a:schemeClr val="accent1"/>
-            </a:fillRef>
-            <a:effectRef idx="0">
-              <a:schemeClr val="accent1"/>
-            </a:effectRef>
-            <a:fontRef idx="minor">
-              <a:schemeClr val="lt1"/>
-            </a:fontRef>
-          </p:style>
-          <p:txBody>
-            <a:bodyPr rtlCol="0" anchor="ctr"/>
-            <a:lstStyle/>
-            <a:p>
-              <a:pPr algn="ctr"/>
-              <a:r>
-                <a:rPr kumimoji="1" lang="en-US" altLang="ja-JP" dirty="0"/>
-                <a:t>CPU</a:t>
-              </a:r>
-            </a:p>
-            <a:p>
-              <a:pPr algn="ctr"/>
-              <a:r>
-                <a:rPr kumimoji="1" lang="en-US" altLang="ja-JP" dirty="0"/>
-                <a:t>CORE</a:t>
-              </a:r>
-              <a:endParaRPr kumimoji="1" lang="ja-JP" altLang="en-US" dirty="0"/>
-            </a:p>
-          </p:txBody>
-        </p:sp>
-        <p:sp>
-          <p:nvSpPr>
-            <p:cNvPr id="16" name="正方形/長方形 15"/>
-            <p:cNvSpPr/>
-            <p:nvPr/>
-          </p:nvSpPr>
-          <p:spPr>
-            <a:xfrm>
-              <a:off x="2075065" y="1273150"/>
-              <a:ext cx="720080" cy="720080"/>
-            </a:xfrm>
-            <a:prstGeom prst="rect">
-              <a:avLst/>
-            </a:prstGeom>
-            <a:solidFill>
-              <a:srgbClr val="FF0000"/>
-            </a:solidFill>
-            <a:ln>
-              <a:solidFill>
-                <a:schemeClr val="tx1"/>
-              </a:solidFill>
-            </a:ln>
-          </p:spPr>
-          <p:style>
-            <a:lnRef idx="2">
-              <a:schemeClr val="accent1">
-                <a:shade val="50000"/>
-              </a:schemeClr>
-            </a:lnRef>
-            <a:fillRef idx="1">
-              <a:schemeClr val="accent1"/>
-            </a:fillRef>
-            <a:effectRef idx="0">
-              <a:schemeClr val="accent1"/>
-            </a:effectRef>
-            <a:fontRef idx="minor">
-              <a:schemeClr val="lt1"/>
-            </a:fontRef>
-          </p:style>
-          <p:txBody>
-            <a:bodyPr rtlCol="0" anchor="ctr"/>
-            <a:lstStyle/>
-            <a:p>
-              <a:pPr algn="ctr"/>
-              <a:r>
-                <a:rPr lang="en-US" altLang="ja-JP" dirty="0"/>
-                <a:t>CPU</a:t>
-              </a:r>
-              <a:br>
-                <a:rPr lang="en-US" altLang="ja-JP" dirty="0"/>
-              </a:br>
-              <a:r>
-                <a:rPr lang="en-US" altLang="ja-JP" dirty="0"/>
-                <a:t>CORE</a:t>
-              </a:r>
-              <a:endParaRPr kumimoji="1" lang="ja-JP" altLang="en-US" dirty="0"/>
-            </a:p>
-          </p:txBody>
-        </p:sp>
-        <p:sp>
-          <p:nvSpPr>
-            <p:cNvPr id="17" name="正方形/長方形 16"/>
-            <p:cNvSpPr/>
-            <p:nvPr/>
-          </p:nvSpPr>
-          <p:spPr>
-            <a:xfrm>
-              <a:off x="2792760" y="1273150"/>
-              <a:ext cx="720080" cy="720080"/>
-            </a:xfrm>
-            <a:prstGeom prst="rect">
-              <a:avLst/>
-            </a:prstGeom>
-            <a:solidFill>
-              <a:srgbClr val="FF0000"/>
-            </a:solidFill>
-            <a:ln>
-              <a:solidFill>
-                <a:schemeClr val="tx1"/>
-              </a:solidFill>
-            </a:ln>
-          </p:spPr>
-          <p:style>
-            <a:lnRef idx="2">
-              <a:schemeClr val="accent1">
-                <a:shade val="50000"/>
-              </a:schemeClr>
-            </a:lnRef>
-            <a:fillRef idx="1">
-              <a:schemeClr val="accent1"/>
-            </a:fillRef>
-            <a:effectRef idx="0">
-              <a:schemeClr val="accent1"/>
-            </a:effectRef>
-            <a:fontRef idx="minor">
-              <a:schemeClr val="lt1"/>
-            </a:fontRef>
-          </p:style>
-          <p:txBody>
-            <a:bodyPr rtlCol="0" anchor="ctr"/>
-            <a:lstStyle/>
-            <a:p>
-              <a:pPr algn="ctr"/>
-              <a:r>
-                <a:rPr kumimoji="1" lang="en-US" altLang="ja-JP" dirty="0"/>
-                <a:t>CPU</a:t>
-              </a:r>
-            </a:p>
-            <a:p>
-              <a:pPr algn="ctr"/>
-              <a:r>
-                <a:rPr lang="en-US" altLang="ja-JP" dirty="0"/>
-                <a:t>CORE</a:t>
-              </a:r>
-              <a:endParaRPr kumimoji="1" lang="ja-JP" altLang="en-US" dirty="0"/>
-            </a:p>
-          </p:txBody>
-        </p:sp>
-      </p:grpSp>
-      <p:grpSp>
-        <p:nvGrpSpPr>
-          <p:cNvPr id="18" name="グループ化 17"/>
-          <p:cNvGrpSpPr/>
-          <p:nvPr/>
-        </p:nvGrpSpPr>
-        <p:grpSpPr>
-          <a:xfrm>
-            <a:off x="4953000" y="2708920"/>
-            <a:ext cx="1437775" cy="1444550"/>
-            <a:chOff x="2075065" y="548680"/>
-            <a:chExt cx="1437775" cy="1444550"/>
-          </a:xfrm>
-        </p:grpSpPr>
-        <p:sp>
-          <p:nvSpPr>
-            <p:cNvPr id="19" name="正方形/長方形 18"/>
-            <p:cNvSpPr/>
-            <p:nvPr/>
-          </p:nvSpPr>
-          <p:spPr>
-            <a:xfrm>
-              <a:off x="2075065" y="548680"/>
-              <a:ext cx="720080" cy="720080"/>
-            </a:xfrm>
-            <a:prstGeom prst="rect">
-              <a:avLst/>
-            </a:prstGeom>
-            <a:solidFill>
-              <a:srgbClr val="FF0000"/>
-            </a:solidFill>
-            <a:ln>
-              <a:solidFill>
-                <a:schemeClr val="tx1"/>
-              </a:solidFill>
-            </a:ln>
-          </p:spPr>
-          <p:style>
-            <a:lnRef idx="2">
-              <a:schemeClr val="accent1">
-                <a:shade val="50000"/>
-              </a:schemeClr>
-            </a:lnRef>
-            <a:fillRef idx="1">
-              <a:schemeClr val="accent1"/>
-            </a:fillRef>
-            <a:effectRef idx="0">
-              <a:schemeClr val="accent1"/>
-            </a:effectRef>
-            <a:fontRef idx="minor">
-              <a:schemeClr val="lt1"/>
-            </a:fontRef>
-          </p:style>
-          <p:txBody>
-            <a:bodyPr rtlCol="0" anchor="ctr"/>
-            <a:lstStyle/>
-            <a:p>
-              <a:pPr algn="ctr"/>
-              <a:r>
-                <a:rPr kumimoji="1" lang="en-US" altLang="ja-JP" dirty="0"/>
-                <a:t>CPU</a:t>
-              </a:r>
-            </a:p>
-            <a:p>
-              <a:pPr algn="ctr"/>
-              <a:r>
-                <a:rPr kumimoji="1" lang="en-US" altLang="ja-JP" dirty="0"/>
-                <a:t>CORE</a:t>
-              </a:r>
-              <a:endParaRPr kumimoji="1" lang="ja-JP" altLang="en-US" dirty="0"/>
-            </a:p>
-          </p:txBody>
-        </p:sp>
-        <p:sp>
-          <p:nvSpPr>
-            <p:cNvPr id="20" name="正方形/長方形 19"/>
-            <p:cNvSpPr/>
-            <p:nvPr/>
-          </p:nvSpPr>
-          <p:spPr>
-            <a:xfrm>
-              <a:off x="2792760" y="553070"/>
-              <a:ext cx="720080" cy="720080"/>
-            </a:xfrm>
-            <a:prstGeom prst="rect">
-              <a:avLst/>
-            </a:prstGeom>
-            <a:solidFill>
-              <a:srgbClr val="FF0000"/>
-            </a:solidFill>
-            <a:ln>
-              <a:solidFill>
-                <a:schemeClr val="tx1"/>
-              </a:solidFill>
-            </a:ln>
-          </p:spPr>
-          <p:style>
-            <a:lnRef idx="2">
-              <a:schemeClr val="accent1">
-                <a:shade val="50000"/>
-              </a:schemeClr>
-            </a:lnRef>
-            <a:fillRef idx="1">
-              <a:schemeClr val="accent1"/>
-            </a:fillRef>
-            <a:effectRef idx="0">
-              <a:schemeClr val="accent1"/>
-            </a:effectRef>
-            <a:fontRef idx="minor">
-              <a:schemeClr val="lt1"/>
-            </a:fontRef>
-          </p:style>
-          <p:txBody>
-            <a:bodyPr rtlCol="0" anchor="ctr"/>
-            <a:lstStyle/>
-            <a:p>
-              <a:pPr algn="ctr"/>
-              <a:r>
-                <a:rPr kumimoji="1" lang="en-US" altLang="ja-JP" dirty="0"/>
-                <a:t>CPU</a:t>
-              </a:r>
-            </a:p>
-            <a:p>
-              <a:pPr algn="ctr"/>
-              <a:r>
-                <a:rPr kumimoji="1" lang="en-US" altLang="ja-JP" dirty="0"/>
-                <a:t>CORE</a:t>
-              </a:r>
-              <a:endParaRPr kumimoji="1" lang="ja-JP" altLang="en-US" dirty="0"/>
-            </a:p>
-          </p:txBody>
-        </p:sp>
-        <p:sp>
-          <p:nvSpPr>
-            <p:cNvPr id="21" name="正方形/長方形 20"/>
-            <p:cNvSpPr/>
-            <p:nvPr/>
-          </p:nvSpPr>
-          <p:spPr>
-            <a:xfrm>
-              <a:off x="2075065" y="1273150"/>
-              <a:ext cx="720080" cy="720080"/>
-            </a:xfrm>
-            <a:prstGeom prst="rect">
-              <a:avLst/>
-            </a:prstGeom>
-            <a:solidFill>
-              <a:srgbClr val="FF0000"/>
-            </a:solidFill>
-            <a:ln>
-              <a:solidFill>
-                <a:schemeClr val="tx1"/>
-              </a:solidFill>
-            </a:ln>
-          </p:spPr>
-          <p:style>
-            <a:lnRef idx="2">
-              <a:schemeClr val="accent1">
-                <a:shade val="50000"/>
-              </a:schemeClr>
-            </a:lnRef>
-            <a:fillRef idx="1">
-              <a:schemeClr val="accent1"/>
-            </a:fillRef>
-            <a:effectRef idx="0">
-              <a:schemeClr val="accent1"/>
-            </a:effectRef>
-            <a:fontRef idx="minor">
-              <a:schemeClr val="lt1"/>
-            </a:fontRef>
-          </p:style>
-          <p:txBody>
-            <a:bodyPr rtlCol="0" anchor="ctr"/>
-            <a:lstStyle/>
-            <a:p>
-              <a:pPr algn="ctr"/>
-              <a:r>
-                <a:rPr lang="en-US" altLang="ja-JP" dirty="0"/>
-                <a:t>CPU</a:t>
-              </a:r>
-              <a:br>
-                <a:rPr lang="en-US" altLang="ja-JP" dirty="0"/>
-              </a:br>
-              <a:r>
-                <a:rPr lang="en-US" altLang="ja-JP" dirty="0"/>
-                <a:t>CORE</a:t>
-              </a:r>
-              <a:endParaRPr kumimoji="1" lang="ja-JP" altLang="en-US" dirty="0"/>
-            </a:p>
-          </p:txBody>
-        </p:sp>
-        <p:sp>
-          <p:nvSpPr>
-            <p:cNvPr id="22" name="正方形/長方形 21"/>
-            <p:cNvSpPr/>
-            <p:nvPr/>
-          </p:nvSpPr>
-          <p:spPr>
-            <a:xfrm>
-              <a:off x="2792760" y="1273150"/>
-              <a:ext cx="720080" cy="720080"/>
-            </a:xfrm>
-            <a:prstGeom prst="rect">
-              <a:avLst/>
-            </a:prstGeom>
-            <a:solidFill>
-              <a:srgbClr val="FF0000"/>
-            </a:solidFill>
-            <a:ln>
-              <a:solidFill>
-                <a:schemeClr val="tx1"/>
-              </a:solidFill>
-            </a:ln>
-          </p:spPr>
-          <p:style>
-            <a:lnRef idx="2">
-              <a:schemeClr val="accent1">
-                <a:shade val="50000"/>
-              </a:schemeClr>
-            </a:lnRef>
-            <a:fillRef idx="1">
-              <a:schemeClr val="accent1"/>
-            </a:fillRef>
-            <a:effectRef idx="0">
-              <a:schemeClr val="accent1"/>
-            </a:effectRef>
-            <a:fontRef idx="minor">
-              <a:schemeClr val="lt1"/>
-            </a:fontRef>
-          </p:style>
-          <p:txBody>
-            <a:bodyPr rtlCol="0" anchor="ctr"/>
-            <a:lstStyle/>
-            <a:p>
-              <a:pPr algn="ctr"/>
-              <a:r>
-                <a:rPr kumimoji="1" lang="en-US" altLang="ja-JP" dirty="0"/>
-                <a:t>CPU</a:t>
-              </a:r>
-            </a:p>
-            <a:p>
-              <a:pPr algn="ctr"/>
-              <a:r>
-                <a:rPr lang="en-US" altLang="ja-JP" dirty="0"/>
-                <a:t>CORE</a:t>
-              </a:r>
-              <a:endParaRPr kumimoji="1" lang="ja-JP" altLang="en-US" dirty="0"/>
-            </a:p>
-          </p:txBody>
-        </p:sp>
-      </p:grpSp>
-      <p:sp>
-        <p:nvSpPr>
-          <p:cNvPr id="23" name="正方形/長方形 22"/>
-          <p:cNvSpPr/>
-          <p:nvPr/>
-        </p:nvSpPr>
-        <p:spPr>
-          <a:xfrm>
-            <a:off x="4232920" y="1124744"/>
-            <a:ext cx="720080" cy="288032"/>
-          </a:xfrm>
-          <a:prstGeom prst="rect">
-            <a:avLst/>
-          </a:prstGeom>
-        </p:spPr>
-        <p:style>
-          <a:lnRef idx="2">
-            <a:schemeClr val="accent1">
-              <a:shade val="50000"/>
-            </a:schemeClr>
-          </a:lnRef>
-          <a:fillRef idx="1">
-            <a:schemeClr val="accent1"/>
-          </a:fillRef>
-          <a:effectRef idx="0">
-            <a:schemeClr val="accent1"/>
-          </a:effectRef>
-          <a:fontRef idx="minor">
-            <a:schemeClr val="lt1"/>
-          </a:fontRef>
-        </p:style>
-        <p:txBody>
-          <a:bodyPr rtlCol="0" anchor="ctr"/>
-          <a:lstStyle/>
-          <a:p>
-            <a:pPr algn="ctr"/>
-            <a:endParaRPr kumimoji="1" lang="ja-JP" altLang="en-US"/>
-          </a:p>
-        </p:txBody>
-      </p:sp>
-      <p:sp>
-        <p:nvSpPr>
-          <p:cNvPr id="24" name="正方形/長方形 23"/>
-          <p:cNvSpPr/>
-          <p:nvPr/>
-        </p:nvSpPr>
-        <p:spPr>
-          <a:xfrm>
-            <a:off x="4232920" y="3289374"/>
-            <a:ext cx="720080" cy="288032"/>
-          </a:xfrm>
-          <a:prstGeom prst="rect">
-            <a:avLst/>
-          </a:prstGeom>
-        </p:spPr>
-        <p:style>
-          <a:lnRef idx="2">
-            <a:schemeClr val="accent1">
-              <a:shade val="50000"/>
-            </a:schemeClr>
-          </a:lnRef>
-          <a:fillRef idx="1">
-            <a:schemeClr val="accent1"/>
-          </a:fillRef>
-          <a:effectRef idx="0">
-            <a:schemeClr val="accent1"/>
-          </a:effectRef>
-          <a:fontRef idx="minor">
-            <a:schemeClr val="lt1"/>
-          </a:fontRef>
-        </p:style>
-        <p:txBody>
-          <a:bodyPr rtlCol="0" anchor="ctr"/>
-          <a:lstStyle/>
-          <a:p>
-            <a:pPr algn="ctr"/>
-            <a:endParaRPr kumimoji="1" lang="ja-JP" altLang="en-US"/>
-          </a:p>
-        </p:txBody>
-      </p:sp>
-      <p:sp>
-        <p:nvSpPr>
-          <p:cNvPr id="25" name="正方形/長方形 24"/>
-          <p:cNvSpPr/>
-          <p:nvPr/>
-        </p:nvSpPr>
-        <p:spPr>
-          <a:xfrm rot="5400000">
-            <a:off x="5313040" y="2214366"/>
-            <a:ext cx="720080" cy="288032"/>
-          </a:xfrm>
-          <a:prstGeom prst="rect">
-            <a:avLst/>
-          </a:prstGeom>
-        </p:spPr>
-        <p:style>
-          <a:lnRef idx="2">
-            <a:schemeClr val="accent1">
-              <a:shade val="50000"/>
-            </a:schemeClr>
-          </a:lnRef>
-          <a:fillRef idx="1">
-            <a:schemeClr val="accent1"/>
-          </a:fillRef>
-          <a:effectRef idx="0">
-            <a:schemeClr val="accent1"/>
-          </a:effectRef>
-          <a:fontRef idx="minor">
-            <a:schemeClr val="lt1"/>
-          </a:fontRef>
-        </p:style>
-        <p:txBody>
-          <a:bodyPr rtlCol="0" anchor="ctr"/>
-          <a:lstStyle/>
-          <a:p>
-            <a:pPr algn="ctr"/>
-            <a:endParaRPr kumimoji="1" lang="ja-JP" altLang="en-US"/>
-          </a:p>
-        </p:txBody>
-      </p:sp>
-      <p:sp>
-        <p:nvSpPr>
-          <p:cNvPr id="26" name="正方形/長方形 25"/>
-          <p:cNvSpPr/>
-          <p:nvPr/>
-        </p:nvSpPr>
-        <p:spPr>
-          <a:xfrm rot="5400000">
-            <a:off x="3152800" y="2204864"/>
-            <a:ext cx="720080" cy="288032"/>
-          </a:xfrm>
-          <a:prstGeom prst="rect">
-            <a:avLst/>
-          </a:prstGeom>
-        </p:spPr>
-        <p:style>
-          <a:lnRef idx="2">
-            <a:schemeClr val="accent1">
-              <a:shade val="50000"/>
-            </a:schemeClr>
-          </a:lnRef>
-          <a:fillRef idx="1">
-            <a:schemeClr val="accent1"/>
-          </a:fillRef>
-          <a:effectRef idx="0">
-            <a:schemeClr val="accent1"/>
-          </a:effectRef>
-          <a:fontRef idx="minor">
-            <a:schemeClr val="lt1"/>
-          </a:fontRef>
-        </p:style>
-        <p:txBody>
-          <a:bodyPr rtlCol="0" anchor="ctr"/>
-          <a:lstStyle/>
-          <a:p>
-            <a:pPr algn="ctr"/>
-            <a:endParaRPr kumimoji="1" lang="ja-JP" altLang="en-US"/>
-          </a:p>
-        </p:txBody>
-      </p:sp>
-      <p:grpSp>
-        <p:nvGrpSpPr>
-          <p:cNvPr id="30" name="グループ化 29"/>
-          <p:cNvGrpSpPr/>
-          <p:nvPr/>
-        </p:nvGrpSpPr>
-        <p:grpSpPr>
-          <a:xfrm>
-            <a:off x="632520" y="548680"/>
-            <a:ext cx="1440160" cy="1450622"/>
-            <a:chOff x="632520" y="548680"/>
-            <a:chExt cx="1440160" cy="1450622"/>
-          </a:xfrm>
-        </p:grpSpPr>
-        <p:sp>
-          <p:nvSpPr>
-            <p:cNvPr id="28" name="正方形/長方形 27"/>
-            <p:cNvSpPr/>
-            <p:nvPr/>
-          </p:nvSpPr>
-          <p:spPr>
-            <a:xfrm>
-              <a:off x="632520" y="548680"/>
-              <a:ext cx="1440160" cy="729582"/>
-            </a:xfrm>
-            <a:prstGeom prst="rect">
-              <a:avLst/>
-            </a:prstGeom>
-            <a:solidFill>
-              <a:srgbClr val="00B050"/>
-            </a:solidFill>
-          </p:spPr>
-          <p:style>
-            <a:lnRef idx="2">
-              <a:schemeClr val="accent1">
-                <a:shade val="50000"/>
-              </a:schemeClr>
-            </a:lnRef>
-            <a:fillRef idx="1">
-              <a:schemeClr val="accent1"/>
-            </a:fillRef>
-            <a:effectRef idx="0">
-              <a:schemeClr val="accent1"/>
-            </a:effectRef>
-            <a:fontRef idx="minor">
-              <a:schemeClr val="lt1"/>
-            </a:fontRef>
-          </p:style>
-          <p:txBody>
-            <a:bodyPr rtlCol="0" anchor="ctr"/>
-            <a:lstStyle/>
-            <a:p>
-              <a:pPr algn="ctr"/>
-              <a:r>
-                <a:rPr kumimoji="1" lang="en-US" altLang="ja-JP" sz="2400" dirty="0"/>
-                <a:t>Memory</a:t>
-              </a:r>
-              <a:endParaRPr kumimoji="1" lang="ja-JP" altLang="en-US" sz="2400" dirty="0"/>
-            </a:p>
-          </p:txBody>
-        </p:sp>
-        <p:sp>
-          <p:nvSpPr>
-            <p:cNvPr id="29" name="正方形/長方形 28"/>
-            <p:cNvSpPr/>
-            <p:nvPr/>
-          </p:nvSpPr>
-          <p:spPr>
-            <a:xfrm>
-              <a:off x="632520" y="1278261"/>
-              <a:ext cx="1440160" cy="721041"/>
-            </a:xfrm>
-            <a:prstGeom prst="rect">
-              <a:avLst/>
-            </a:prstGeom>
-            <a:solidFill>
-              <a:srgbClr val="00B050"/>
-            </a:solidFill>
-          </p:spPr>
-          <p:style>
-            <a:lnRef idx="2">
-              <a:schemeClr val="accent1">
-                <a:shade val="50000"/>
-              </a:schemeClr>
-            </a:lnRef>
-            <a:fillRef idx="1">
-              <a:schemeClr val="accent1"/>
-            </a:fillRef>
-            <a:effectRef idx="0">
-              <a:schemeClr val="accent1"/>
-            </a:effectRef>
-            <a:fontRef idx="minor">
-              <a:schemeClr val="lt1"/>
-            </a:fontRef>
-          </p:style>
-          <p:txBody>
-            <a:bodyPr rtlCol="0" anchor="ctr"/>
-            <a:lstStyle/>
-            <a:p>
-              <a:pPr algn="ctr"/>
-              <a:r>
-                <a:rPr kumimoji="1" lang="en-US" altLang="ja-JP" sz="2400" dirty="0"/>
-                <a:t>Memory</a:t>
-              </a:r>
-              <a:endParaRPr kumimoji="1" lang="ja-JP" altLang="en-US" sz="2400" dirty="0"/>
-            </a:p>
-          </p:txBody>
-        </p:sp>
-      </p:grpSp>
-      <p:grpSp>
-        <p:nvGrpSpPr>
-          <p:cNvPr id="31" name="グループ化 30"/>
-          <p:cNvGrpSpPr/>
-          <p:nvPr/>
-        </p:nvGrpSpPr>
-        <p:grpSpPr>
-          <a:xfrm>
-            <a:off x="632520" y="2693720"/>
-            <a:ext cx="1440160" cy="1450622"/>
-            <a:chOff x="632520" y="548680"/>
-            <a:chExt cx="1440160" cy="1450622"/>
-          </a:xfrm>
-        </p:grpSpPr>
-        <p:sp>
-          <p:nvSpPr>
-            <p:cNvPr id="32" name="正方形/長方形 31"/>
-            <p:cNvSpPr/>
-            <p:nvPr/>
-          </p:nvSpPr>
-          <p:spPr>
-            <a:xfrm>
-              <a:off x="632520" y="548680"/>
-              <a:ext cx="1440160" cy="729582"/>
-            </a:xfrm>
-            <a:prstGeom prst="rect">
-              <a:avLst/>
-            </a:prstGeom>
-            <a:solidFill>
-              <a:srgbClr val="00B050"/>
-            </a:solidFill>
-          </p:spPr>
-          <p:style>
-            <a:lnRef idx="2">
-              <a:schemeClr val="accent1">
-                <a:shade val="50000"/>
-              </a:schemeClr>
-            </a:lnRef>
-            <a:fillRef idx="1">
-              <a:schemeClr val="accent1"/>
-            </a:fillRef>
-            <a:effectRef idx="0">
-              <a:schemeClr val="accent1"/>
-            </a:effectRef>
-            <a:fontRef idx="minor">
-              <a:schemeClr val="lt1"/>
-            </a:fontRef>
-          </p:style>
-          <p:txBody>
-            <a:bodyPr rtlCol="0" anchor="ctr"/>
-            <a:lstStyle/>
-            <a:p>
-              <a:pPr algn="ctr"/>
-              <a:r>
-                <a:rPr kumimoji="1" lang="en-US" altLang="ja-JP" sz="2400" dirty="0"/>
-                <a:t>Memory</a:t>
-              </a:r>
-              <a:endParaRPr kumimoji="1" lang="ja-JP" altLang="en-US" sz="2400" dirty="0"/>
-            </a:p>
-          </p:txBody>
-        </p:sp>
-        <p:sp>
-          <p:nvSpPr>
-            <p:cNvPr id="33" name="正方形/長方形 32"/>
-            <p:cNvSpPr/>
-            <p:nvPr/>
-          </p:nvSpPr>
-          <p:spPr>
-            <a:xfrm>
-              <a:off x="632520" y="1278261"/>
-              <a:ext cx="1440160" cy="721041"/>
-            </a:xfrm>
-            <a:prstGeom prst="rect">
-              <a:avLst/>
-            </a:prstGeom>
-            <a:solidFill>
-              <a:srgbClr val="00B050"/>
-            </a:solidFill>
-          </p:spPr>
-          <p:style>
-            <a:lnRef idx="2">
-              <a:schemeClr val="accent1">
-                <a:shade val="50000"/>
-              </a:schemeClr>
-            </a:lnRef>
-            <a:fillRef idx="1">
-              <a:schemeClr val="accent1"/>
-            </a:fillRef>
-            <a:effectRef idx="0">
-              <a:schemeClr val="accent1"/>
-            </a:effectRef>
-            <a:fontRef idx="minor">
-              <a:schemeClr val="lt1"/>
-            </a:fontRef>
-          </p:style>
-          <p:txBody>
-            <a:bodyPr rtlCol="0" anchor="ctr"/>
-            <a:lstStyle/>
-            <a:p>
-              <a:pPr algn="ctr"/>
-              <a:r>
-                <a:rPr kumimoji="1" lang="en-US" altLang="ja-JP" sz="2400" dirty="0"/>
-                <a:t>Memory</a:t>
-              </a:r>
-              <a:endParaRPr kumimoji="1" lang="ja-JP" altLang="en-US" sz="2400" dirty="0"/>
-            </a:p>
-          </p:txBody>
-        </p:sp>
-      </p:grpSp>
-      <p:grpSp>
-        <p:nvGrpSpPr>
-          <p:cNvPr id="34" name="グループ化 33"/>
-          <p:cNvGrpSpPr/>
-          <p:nvPr/>
-        </p:nvGrpSpPr>
-        <p:grpSpPr>
-          <a:xfrm>
-            <a:off x="7113240" y="558182"/>
-            <a:ext cx="1440160" cy="1450622"/>
-            <a:chOff x="632520" y="548680"/>
-            <a:chExt cx="1440160" cy="1450622"/>
-          </a:xfrm>
-        </p:grpSpPr>
-        <p:sp>
-          <p:nvSpPr>
-            <p:cNvPr id="35" name="正方形/長方形 34"/>
-            <p:cNvSpPr/>
-            <p:nvPr/>
-          </p:nvSpPr>
-          <p:spPr>
-            <a:xfrm>
-              <a:off x="632520" y="548680"/>
-              <a:ext cx="1440160" cy="729582"/>
-            </a:xfrm>
-            <a:prstGeom prst="rect">
-              <a:avLst/>
-            </a:prstGeom>
-            <a:solidFill>
-              <a:srgbClr val="00B050"/>
-            </a:solidFill>
-          </p:spPr>
-          <p:style>
-            <a:lnRef idx="2">
-              <a:schemeClr val="accent1">
-                <a:shade val="50000"/>
-              </a:schemeClr>
-            </a:lnRef>
-            <a:fillRef idx="1">
-              <a:schemeClr val="accent1"/>
-            </a:fillRef>
-            <a:effectRef idx="0">
-              <a:schemeClr val="accent1"/>
-            </a:effectRef>
-            <a:fontRef idx="minor">
-              <a:schemeClr val="lt1"/>
-            </a:fontRef>
-          </p:style>
-          <p:txBody>
-            <a:bodyPr rtlCol="0" anchor="ctr"/>
-            <a:lstStyle/>
-            <a:p>
-              <a:pPr algn="ctr"/>
-              <a:r>
-                <a:rPr kumimoji="1" lang="en-US" altLang="ja-JP" sz="2400" dirty="0"/>
-                <a:t>Memory</a:t>
-              </a:r>
-              <a:endParaRPr kumimoji="1" lang="ja-JP" altLang="en-US" sz="2400" dirty="0"/>
-            </a:p>
-          </p:txBody>
-        </p:sp>
-        <p:sp>
-          <p:nvSpPr>
-            <p:cNvPr id="36" name="正方形/長方形 35"/>
-            <p:cNvSpPr/>
-            <p:nvPr/>
-          </p:nvSpPr>
-          <p:spPr>
-            <a:xfrm>
-              <a:off x="632520" y="1278261"/>
-              <a:ext cx="1440160" cy="721041"/>
-            </a:xfrm>
-            <a:prstGeom prst="rect">
-              <a:avLst/>
-            </a:prstGeom>
-            <a:solidFill>
-              <a:srgbClr val="00B050"/>
-            </a:solidFill>
-          </p:spPr>
-          <p:style>
-            <a:lnRef idx="2">
-              <a:schemeClr val="accent1">
-                <a:shade val="50000"/>
-              </a:schemeClr>
-            </a:lnRef>
-            <a:fillRef idx="1">
-              <a:schemeClr val="accent1"/>
-            </a:fillRef>
-            <a:effectRef idx="0">
-              <a:schemeClr val="accent1"/>
-            </a:effectRef>
-            <a:fontRef idx="minor">
-              <a:schemeClr val="lt1"/>
-            </a:fontRef>
-          </p:style>
-          <p:txBody>
-            <a:bodyPr rtlCol="0" anchor="ctr"/>
-            <a:lstStyle/>
-            <a:p>
-              <a:pPr algn="ctr"/>
-              <a:r>
-                <a:rPr kumimoji="1" lang="en-US" altLang="ja-JP" sz="2400" dirty="0"/>
-                <a:t>Memory</a:t>
-              </a:r>
-              <a:endParaRPr kumimoji="1" lang="ja-JP" altLang="en-US" sz="2400" dirty="0"/>
-            </a:p>
-          </p:txBody>
-        </p:sp>
-      </p:grpSp>
-      <p:grpSp>
-        <p:nvGrpSpPr>
-          <p:cNvPr id="37" name="グループ化 36"/>
-          <p:cNvGrpSpPr/>
-          <p:nvPr/>
-        </p:nvGrpSpPr>
-        <p:grpSpPr>
-          <a:xfrm>
-            <a:off x="7113240" y="2703222"/>
-            <a:ext cx="1440160" cy="1450622"/>
-            <a:chOff x="632520" y="548680"/>
-            <a:chExt cx="1440160" cy="1450622"/>
-          </a:xfrm>
-        </p:grpSpPr>
-        <p:sp>
-          <p:nvSpPr>
-            <p:cNvPr id="38" name="正方形/長方形 37"/>
-            <p:cNvSpPr/>
-            <p:nvPr/>
-          </p:nvSpPr>
-          <p:spPr>
-            <a:xfrm>
-              <a:off x="632520" y="548680"/>
-              <a:ext cx="1440160" cy="729582"/>
-            </a:xfrm>
-            <a:prstGeom prst="rect">
-              <a:avLst/>
-            </a:prstGeom>
-            <a:solidFill>
-              <a:srgbClr val="00B050"/>
-            </a:solidFill>
-          </p:spPr>
-          <p:style>
-            <a:lnRef idx="2">
-              <a:schemeClr val="accent1">
-                <a:shade val="50000"/>
-              </a:schemeClr>
-            </a:lnRef>
-            <a:fillRef idx="1">
-              <a:schemeClr val="accent1"/>
-            </a:fillRef>
-            <a:effectRef idx="0">
-              <a:schemeClr val="accent1"/>
-            </a:effectRef>
-            <a:fontRef idx="minor">
-              <a:schemeClr val="lt1"/>
-            </a:fontRef>
-          </p:style>
-          <p:txBody>
-            <a:bodyPr rtlCol="0" anchor="ctr"/>
-            <a:lstStyle/>
-            <a:p>
-              <a:pPr algn="ctr"/>
-              <a:r>
-                <a:rPr kumimoji="1" lang="en-US" altLang="ja-JP" sz="2400" dirty="0"/>
-                <a:t>Memory</a:t>
-              </a:r>
-              <a:endParaRPr kumimoji="1" lang="ja-JP" altLang="en-US" sz="2400" dirty="0"/>
-            </a:p>
-          </p:txBody>
-        </p:sp>
-        <p:sp>
-          <p:nvSpPr>
-            <p:cNvPr id="39" name="正方形/長方形 38"/>
-            <p:cNvSpPr/>
-            <p:nvPr/>
-          </p:nvSpPr>
-          <p:spPr>
-            <a:xfrm>
-              <a:off x="632520" y="1278261"/>
-              <a:ext cx="1440160" cy="721041"/>
-            </a:xfrm>
-            <a:prstGeom prst="rect">
-              <a:avLst/>
-            </a:prstGeom>
-            <a:solidFill>
-              <a:srgbClr val="00B050"/>
-            </a:solidFill>
-          </p:spPr>
-          <p:style>
-            <a:lnRef idx="2">
-              <a:schemeClr val="accent1">
-                <a:shade val="50000"/>
-              </a:schemeClr>
-            </a:lnRef>
-            <a:fillRef idx="1">
-              <a:schemeClr val="accent1"/>
-            </a:fillRef>
-            <a:effectRef idx="0">
-              <a:schemeClr val="accent1"/>
-            </a:effectRef>
-            <a:fontRef idx="minor">
-              <a:schemeClr val="lt1"/>
-            </a:fontRef>
-          </p:style>
-          <p:txBody>
-            <a:bodyPr rtlCol="0" anchor="ctr"/>
-            <a:lstStyle/>
-            <a:p>
-              <a:pPr algn="ctr"/>
-              <a:r>
-                <a:rPr kumimoji="1" lang="en-US" altLang="ja-JP" sz="2400" dirty="0"/>
-                <a:t>Memory</a:t>
-              </a:r>
-              <a:endParaRPr kumimoji="1" lang="ja-JP" altLang="en-US" sz="2400" dirty="0"/>
-            </a:p>
-          </p:txBody>
-        </p:sp>
-      </p:grpSp>
-      <p:sp>
-        <p:nvSpPr>
-          <p:cNvPr id="40" name="正方形/長方形 39"/>
-          <p:cNvSpPr/>
-          <p:nvPr/>
-        </p:nvSpPr>
-        <p:spPr>
-          <a:xfrm>
-            <a:off x="2072680" y="1052736"/>
-            <a:ext cx="722465" cy="432048"/>
-          </a:xfrm>
-          <a:prstGeom prst="rect">
-            <a:avLst/>
-          </a:prstGeom>
-        </p:spPr>
-        <p:style>
-          <a:lnRef idx="2">
-            <a:schemeClr val="accent1">
-              <a:shade val="50000"/>
-            </a:schemeClr>
-          </a:lnRef>
-          <a:fillRef idx="1">
-            <a:schemeClr val="accent1"/>
-          </a:fillRef>
-          <a:effectRef idx="0">
-            <a:schemeClr val="accent1"/>
-          </a:effectRef>
-          <a:fontRef idx="minor">
-            <a:schemeClr val="lt1"/>
-          </a:fontRef>
-        </p:style>
-        <p:txBody>
-          <a:bodyPr rtlCol="0" anchor="ctr"/>
-          <a:lstStyle/>
-          <a:p>
-            <a:pPr algn="ctr"/>
-            <a:endParaRPr kumimoji="1" lang="ja-JP" altLang="en-US"/>
-          </a:p>
-        </p:txBody>
-      </p:sp>
-      <p:sp>
-        <p:nvSpPr>
-          <p:cNvPr id="41" name="正方形/長方形 40"/>
-          <p:cNvSpPr/>
-          <p:nvPr/>
-        </p:nvSpPr>
-        <p:spPr>
-          <a:xfrm>
-            <a:off x="2072681" y="3217366"/>
-            <a:ext cx="720080" cy="432048"/>
-          </a:xfrm>
-          <a:prstGeom prst="rect">
-            <a:avLst/>
-          </a:prstGeom>
-        </p:spPr>
-        <p:style>
-          <a:lnRef idx="2">
-            <a:schemeClr val="accent1">
-              <a:shade val="50000"/>
-            </a:schemeClr>
-          </a:lnRef>
-          <a:fillRef idx="1">
-            <a:schemeClr val="accent1"/>
-          </a:fillRef>
-          <a:effectRef idx="0">
-            <a:schemeClr val="accent1"/>
-          </a:effectRef>
-          <a:fontRef idx="minor">
-            <a:schemeClr val="lt1"/>
-          </a:fontRef>
-        </p:style>
-        <p:txBody>
-          <a:bodyPr rtlCol="0" anchor="ctr"/>
-          <a:lstStyle/>
-          <a:p>
-            <a:pPr algn="ctr"/>
-            <a:endParaRPr kumimoji="1" lang="ja-JP" altLang="en-US"/>
-          </a:p>
-        </p:txBody>
-      </p:sp>
-      <p:sp>
-        <p:nvSpPr>
-          <p:cNvPr id="42" name="正方形/長方形 41"/>
-          <p:cNvSpPr/>
-          <p:nvPr/>
-        </p:nvSpPr>
-        <p:spPr>
-          <a:xfrm>
-            <a:off x="6390774" y="1042647"/>
-            <a:ext cx="722465" cy="432048"/>
-          </a:xfrm>
-          <a:prstGeom prst="rect">
-            <a:avLst/>
-          </a:prstGeom>
-        </p:spPr>
-        <p:style>
-          <a:lnRef idx="2">
-            <a:schemeClr val="accent1">
-              <a:shade val="50000"/>
-            </a:schemeClr>
-          </a:lnRef>
-          <a:fillRef idx="1">
-            <a:schemeClr val="accent1"/>
-          </a:fillRef>
-          <a:effectRef idx="0">
-            <a:schemeClr val="accent1"/>
-          </a:effectRef>
-          <a:fontRef idx="minor">
-            <a:schemeClr val="lt1"/>
-          </a:fontRef>
-        </p:style>
-        <p:txBody>
-          <a:bodyPr rtlCol="0" anchor="ctr"/>
-          <a:lstStyle/>
-          <a:p>
-            <a:pPr algn="ctr"/>
-            <a:endParaRPr kumimoji="1" lang="ja-JP" altLang="en-US"/>
-          </a:p>
-        </p:txBody>
-      </p:sp>
-      <p:sp>
-        <p:nvSpPr>
-          <p:cNvPr id="43" name="正方形/長方形 42"/>
-          <p:cNvSpPr/>
-          <p:nvPr/>
-        </p:nvSpPr>
-        <p:spPr>
-          <a:xfrm>
-            <a:off x="6390775" y="3207277"/>
-            <a:ext cx="720080" cy="432048"/>
-          </a:xfrm>
-          <a:prstGeom prst="rect">
-            <a:avLst/>
-          </a:prstGeom>
-        </p:spPr>
-        <p:style>
-          <a:lnRef idx="2">
-            <a:schemeClr val="accent1">
-              <a:shade val="50000"/>
-            </a:schemeClr>
-          </a:lnRef>
-          <a:fillRef idx="1">
-            <a:schemeClr val="accent1"/>
-          </a:fillRef>
-          <a:effectRef idx="0">
-            <a:schemeClr val="accent1"/>
-          </a:effectRef>
-          <a:fontRef idx="minor">
-            <a:schemeClr val="lt1"/>
-          </a:fontRef>
-        </p:style>
-        <p:txBody>
-          <a:bodyPr rtlCol="0" anchor="ctr"/>
-          <a:lstStyle/>
-          <a:p>
-            <a:pPr algn="ctr"/>
-            <a:endParaRPr kumimoji="1" lang="ja-JP" altLang="en-US"/>
-          </a:p>
-        </p:txBody>
-      </p:sp>
-    </p:spTree>
-    <p:extLst>
-      <p:ext uri="{BB962C8B-B14F-4D97-AF65-F5344CB8AC3E}">
-        <p14:creationId xmlns:p14="http://schemas.microsoft.com/office/powerpoint/2010/main" val="4151188557"/>
-      </p:ext>
-    </p:extLst>
-  </p:cSld>
-  <p:clrMapOvr>
-    <a:masterClrMapping/>
-  </p:clrMapOvr>
-</p:sld>
-</file>
-
-<file path=ppt/slides/slide5.xml><?xml version="1.0" encoding="utf-8"?>
-<p:sld xmlns:a="http://schemas.openxmlformats.org/drawingml/2006/main" xmlns:r="http://schemas.openxmlformats.org/officeDocument/2006/relationships" xmlns:p="http://schemas.openxmlformats.org/presentationml/2006/main">
-  <p:cSld>
-    <p:spTree>
-      <p:nvGrpSpPr>
-        <p:cNvPr id="1" name=""/>
-        <p:cNvGrpSpPr/>
-        <p:nvPr/>
-      </p:nvGrpSpPr>
-      <p:grpSpPr>
-        <a:xfrm>
-          <a:off x="0" y="0"/>
-          <a:ext cx="0" cy="0"/>
-          <a:chOff x="0" y="0"/>
-          <a:chExt cx="0" cy="0"/>
-        </a:xfrm>
-      </p:grpSpPr>
-      <p:pic>
-        <p:nvPicPr>
-          <p:cNvPr id="2" name="図 1"/>
-          <p:cNvPicPr>
-            <a:picLocks noChangeAspect="1"/>
-          </p:cNvPicPr>
-          <p:nvPr/>
-        </p:nvPicPr>
-        <p:blipFill>
-          <a:blip r:embed="rId2">
-            <a:extLst>
-              <a:ext uri="{28A0092B-C50C-407E-A947-70E740481C1C}">
-                <a14:useLocalDpi xmlns:a14="http://schemas.microsoft.com/office/drawing/2010/main" val="0"/>
-              </a:ext>
-            </a:extLst>
-          </a:blip>
-          <a:stretch>
-            <a:fillRect/>
-          </a:stretch>
-        </p:blipFill>
-        <p:spPr>
-          <a:xfrm>
-            <a:off x="543367" y="4009281"/>
-            <a:ext cx="2193032" cy="2006624"/>
-          </a:xfrm>
-          <a:prstGeom prst="rect">
-            <a:avLst/>
-          </a:prstGeom>
-        </p:spPr>
-      </p:pic>
-      <p:pic>
-        <p:nvPicPr>
-          <p:cNvPr id="3" name="図 2"/>
-          <p:cNvPicPr>
-            <a:picLocks noChangeAspect="1"/>
-          </p:cNvPicPr>
-          <p:nvPr/>
-        </p:nvPicPr>
-        <p:blipFill>
-          <a:blip r:embed="rId3">
-            <a:extLst>
-              <a:ext uri="{28A0092B-C50C-407E-A947-70E740481C1C}">
-                <a14:useLocalDpi xmlns:a14="http://schemas.microsoft.com/office/drawing/2010/main" val="0"/>
-              </a:ext>
-            </a:extLst>
-          </a:blip>
-          <a:stretch>
-            <a:fillRect/>
-          </a:stretch>
-        </p:blipFill>
-        <p:spPr>
-          <a:xfrm>
-            <a:off x="6969224" y="3971081"/>
-            <a:ext cx="1944216" cy="1944216"/>
-          </a:xfrm>
-          <a:prstGeom prst="rect">
-            <a:avLst/>
-          </a:prstGeom>
-        </p:spPr>
-      </p:pic>
-      <p:pic>
-        <p:nvPicPr>
-          <p:cNvPr id="5" name="図 4"/>
-          <p:cNvPicPr>
-            <a:picLocks noChangeAspect="1"/>
-          </p:cNvPicPr>
-          <p:nvPr/>
-        </p:nvPicPr>
-        <p:blipFill>
-          <a:blip r:embed="rId4">
-            <a:extLst>
-              <a:ext uri="{28A0092B-C50C-407E-A947-70E740481C1C}">
-                <a14:useLocalDpi xmlns:a14="http://schemas.microsoft.com/office/drawing/2010/main" val="0"/>
-              </a:ext>
-            </a:extLst>
-          </a:blip>
-          <a:stretch>
-            <a:fillRect/>
-          </a:stretch>
-        </p:blipFill>
-        <p:spPr>
-          <a:xfrm>
-            <a:off x="6465168" y="2057329"/>
-            <a:ext cx="2448272" cy="1947735"/>
-          </a:xfrm>
-          <a:prstGeom prst="rect">
-            <a:avLst/>
-          </a:prstGeom>
-        </p:spPr>
-      </p:pic>
-      <p:pic>
-        <p:nvPicPr>
-          <p:cNvPr id="8" name="図 7"/>
-          <p:cNvPicPr>
-            <a:picLocks noChangeAspect="1"/>
-          </p:cNvPicPr>
-          <p:nvPr/>
-        </p:nvPicPr>
-        <p:blipFill>
-          <a:blip r:embed="rId5">
-            <a:extLst>
-              <a:ext uri="{28A0092B-C50C-407E-A947-70E740481C1C}">
-                <a14:useLocalDpi xmlns:a14="http://schemas.microsoft.com/office/drawing/2010/main" val="0"/>
-              </a:ext>
-            </a:extLst>
-          </a:blip>
-          <a:stretch>
-            <a:fillRect/>
-          </a:stretch>
-        </p:blipFill>
-        <p:spPr>
-          <a:xfrm>
-            <a:off x="128464" y="1850348"/>
-            <a:ext cx="1674045" cy="1963689"/>
-          </a:xfrm>
-          <a:prstGeom prst="rect">
-            <a:avLst/>
-          </a:prstGeom>
-        </p:spPr>
-      </p:pic>
-      <p:pic>
-        <p:nvPicPr>
-          <p:cNvPr id="10" name="図 9"/>
-          <p:cNvPicPr>
-            <a:picLocks noChangeAspect="1"/>
-          </p:cNvPicPr>
-          <p:nvPr/>
-        </p:nvPicPr>
-        <p:blipFill>
-          <a:blip r:embed="rId6">
-            <a:extLst>
-              <a:ext uri="{28A0092B-C50C-407E-A947-70E740481C1C}">
-                <a14:useLocalDpi xmlns:a14="http://schemas.microsoft.com/office/drawing/2010/main" val="0"/>
-              </a:ext>
-            </a:extLst>
-          </a:blip>
-          <a:stretch>
-            <a:fillRect/>
-          </a:stretch>
-        </p:blipFill>
-        <p:spPr>
-          <a:xfrm>
-            <a:off x="2504728" y="1770689"/>
-            <a:ext cx="1728192" cy="2113277"/>
-          </a:xfrm>
-          <a:prstGeom prst="rect">
-            <a:avLst/>
-          </a:prstGeom>
-        </p:spPr>
-      </p:pic>
-      <p:sp>
-        <p:nvSpPr>
-          <p:cNvPr id="11" name="テキスト ボックス 10"/>
-          <p:cNvSpPr txBox="1"/>
-          <p:nvPr/>
-        </p:nvSpPr>
-        <p:spPr>
-          <a:xfrm>
-            <a:off x="335742" y="6089406"/>
-            <a:ext cx="4031873" cy="707886"/>
-          </a:xfrm>
-          <a:prstGeom prst="rect">
-            <a:avLst/>
-          </a:prstGeom>
-          <a:noFill/>
-        </p:spPr>
-        <p:txBody>
-          <a:bodyPr wrap="none" rtlCol="0">
-            <a:spAutoFit/>
-          </a:bodyPr>
-          <a:lstStyle/>
-          <a:p>
-            <a:r>
-              <a:rPr lang="ja-JP" altLang="en-US" sz="2000" dirty="0"/>
-              <a:t>If you accept too much work at first</a:t>
-            </a:r>
-            <a:endParaRPr lang="en-US" altLang="ja-JP" sz="2000" dirty="0"/>
-          </a:p>
-          <a:p>
-            <a:r>
-              <a:rPr lang="ja-JP" altLang="en-US" sz="2000" dirty="0"/>
-              <a:t>because it looks easy...</a:t>
-            </a:r>
-            <a:endParaRPr lang="en-US" altLang="ja-JP" sz="2000" dirty="0"/>
-          </a:p>
-        </p:txBody>
-      </p:sp>
-      <p:sp>
-        <p:nvSpPr>
-          <p:cNvPr id="12" name="角丸四角形吹き出し 11"/>
-          <p:cNvSpPr/>
-          <p:nvPr/>
-        </p:nvSpPr>
-        <p:spPr>
-          <a:xfrm>
-            <a:off x="3038834" y="908720"/>
-            <a:ext cx="2160240" cy="592997"/>
-          </a:xfrm>
-          <a:prstGeom prst="wedgeRoundRectCallout">
-            <a:avLst>
-              <a:gd name="adj1" fmla="val -34706"/>
-              <a:gd name="adj2" fmla="val 89748"/>
-              <a:gd name="adj3" fmla="val 16667"/>
-            </a:avLst>
-          </a:prstGeom>
-          <a:solidFill>
-            <a:schemeClr val="bg1"/>
-          </a:solidFill>
-          <a:ln>
-            <a:solidFill>
-              <a:schemeClr val="tx1"/>
-            </a:solidFill>
-          </a:ln>
-        </p:spPr>
-        <p:style>
-          <a:lnRef idx="2">
-            <a:schemeClr val="accent1">
-              <a:shade val="50000"/>
-            </a:schemeClr>
-          </a:lnRef>
-          <a:fillRef idx="1">
-            <a:schemeClr val="accent1"/>
-          </a:fillRef>
-          <a:effectRef idx="0">
-            <a:schemeClr val="accent1"/>
-          </a:effectRef>
-          <a:fontRef idx="minor">
-            <a:schemeClr val="lt1"/>
-          </a:fontRef>
-        </p:style>
-        <p:txBody>
-          <a:bodyPr rtlCol="0" anchor="ctr"/>
-          <a:lstStyle/>
-          <a:p>
-            <a:pPr algn="ctr"/>
-            <a:r>
-              <a:rPr lang="ja-JP" altLang="en-US" sz="2000" dirty="0">
-                <a:solidFill>
-                  <a:schemeClr val="tx1"/>
-                </a:solidFill>
-              </a:rPr>
-              <a:t>Please handle this too.</a:t>
-            </a:r>
-          </a:p>
-        </p:txBody>
-      </p:sp>
-      <p:sp>
-        <p:nvSpPr>
-          <p:cNvPr id="13" name="円形吹き出し 12"/>
-          <p:cNvSpPr/>
-          <p:nvPr/>
-        </p:nvSpPr>
-        <p:spPr>
-          <a:xfrm>
-            <a:off x="488504" y="692696"/>
-            <a:ext cx="2130190" cy="936104"/>
-          </a:xfrm>
-          <a:prstGeom prst="wedgeEllipseCallout">
-            <a:avLst>
-              <a:gd name="adj1" fmla="val -19687"/>
-              <a:gd name="adj2" fmla="val 61589"/>
-            </a:avLst>
-          </a:prstGeom>
-          <a:solidFill>
-            <a:schemeClr val="bg1"/>
-          </a:solidFill>
-          <a:ln>
-            <a:solidFill>
-              <a:schemeClr val="tx1"/>
-            </a:solidFill>
-          </a:ln>
-        </p:spPr>
-        <p:style>
-          <a:lnRef idx="2">
-            <a:schemeClr val="accent1">
-              <a:shade val="50000"/>
-            </a:schemeClr>
-          </a:lnRef>
-          <a:fillRef idx="1">
-            <a:schemeClr val="accent1"/>
-          </a:fillRef>
-          <a:effectRef idx="0">
-            <a:schemeClr val="accent1"/>
-          </a:effectRef>
-          <a:fontRef idx="minor">
-            <a:schemeClr val="lt1"/>
-          </a:fontRef>
-        </p:style>
-        <p:txBody>
-          <a:bodyPr rtlCol="0" anchor="ctr"/>
-          <a:lstStyle/>
-          <a:p>
-            <a:pPr algn="ctr"/>
-            <a:r>
-              <a:rPr lang="ja-JP" altLang="en-US" sz="2000" dirty="0">
-                <a:solidFill>
-                  <a:schemeClr val="tx1"/>
-                </a:solidFill>
-              </a:rPr>
-              <a:t>Can you take care of this?</a:t>
-            </a:r>
-            <a:endParaRPr kumimoji="1" lang="ja-JP" altLang="en-US" sz="2000" dirty="0">
-              <a:solidFill>
-                <a:schemeClr val="tx1"/>
-              </a:solidFill>
-            </a:endParaRPr>
-          </a:p>
-        </p:txBody>
-      </p:sp>
-      <p:sp>
-        <p:nvSpPr>
-          <p:cNvPr id="15" name="角丸四角形吹き出し 14"/>
-          <p:cNvSpPr/>
-          <p:nvPr/>
-        </p:nvSpPr>
-        <p:spPr>
-          <a:xfrm>
-            <a:off x="2618694" y="3984955"/>
-            <a:ext cx="2160240" cy="592997"/>
-          </a:xfrm>
-          <a:prstGeom prst="wedgeRoundRectCallout">
-            <a:avLst>
-              <a:gd name="adj1" fmla="val -65162"/>
-              <a:gd name="adj2" fmla="val 35213"/>
-              <a:gd name="adj3" fmla="val 16667"/>
-            </a:avLst>
-          </a:prstGeom>
-          <a:solidFill>
-            <a:schemeClr val="bg1"/>
-          </a:solidFill>
-          <a:ln>
-            <a:solidFill>
-              <a:schemeClr val="tx1"/>
-            </a:solidFill>
-          </a:ln>
-        </p:spPr>
-        <p:style>
-          <a:lnRef idx="2">
-            <a:schemeClr val="accent1">
-              <a:shade val="50000"/>
-            </a:schemeClr>
-          </a:lnRef>
-          <a:fillRef idx="1">
-            <a:schemeClr val="accent1"/>
-          </a:fillRef>
-          <a:effectRef idx="0">
-            <a:schemeClr val="accent1"/>
-          </a:effectRef>
-          <a:fontRef idx="minor">
-            <a:schemeClr val="lt1"/>
-          </a:fontRef>
-        </p:style>
-        <p:txBody>
-          <a:bodyPr rtlCol="0" anchor="ctr"/>
-          <a:lstStyle/>
-          <a:p>
-            <a:pPr algn="ctr"/>
-            <a:r>
-              <a:rPr kumimoji="1" lang="ja-JP" altLang="en-US" sz="2000" dirty="0" err="1">
-                <a:solidFill>
-                  <a:schemeClr val="tx1"/>
-                </a:solidFill>
-              </a:rPr>
-              <a:t>Sure.</a:t>
-            </a:r>
-            <a:endParaRPr kumimoji="1" lang="ja-JP" altLang="en-US" sz="2000" dirty="0">
-              <a:solidFill>
-                <a:schemeClr val="tx1"/>
-              </a:solidFill>
-            </a:endParaRPr>
-          </a:p>
-        </p:txBody>
-      </p:sp>
-      <p:sp>
-        <p:nvSpPr>
-          <p:cNvPr id="16" name="テキスト ボックス 15"/>
-          <p:cNvSpPr txBox="1"/>
-          <p:nvPr/>
-        </p:nvSpPr>
-        <p:spPr>
-          <a:xfrm>
-            <a:off x="5745088" y="6089406"/>
-            <a:ext cx="4031873" cy="707886"/>
-          </a:xfrm>
-          <a:prstGeom prst="rect">
-            <a:avLst/>
-          </a:prstGeom>
-          <a:noFill/>
-        </p:spPr>
-        <p:txBody>
-          <a:bodyPr wrap="none" rtlCol="0">
-            <a:spAutoFit/>
-          </a:bodyPr>
-          <a:lstStyle/>
-          <a:p>
-            <a:r>
-              <a:rPr kumimoji="1" lang="ja-JP" altLang="en-US" sz="2000" dirty="0"/>
-              <a:t>Before you know it, you become</a:t>
-            </a:r>
-            <a:endParaRPr kumimoji="1" lang="en-US" altLang="ja-JP" sz="2000" dirty="0"/>
-          </a:p>
-          <a:p>
-            <a:r>
-              <a:rPr kumimoji="1" lang="ja-JP" altLang="en-US" sz="2000" dirty="0"/>
-              <a:t>"the person in charge" and things get painful...</a:t>
-            </a:r>
-            <a:endParaRPr kumimoji="1" lang="en-US" altLang="ja-JP" sz="2000" dirty="0"/>
-          </a:p>
-        </p:txBody>
-      </p:sp>
-      <p:sp>
-        <p:nvSpPr>
-          <p:cNvPr id="17" name="角丸四角形吹き出し 16"/>
-          <p:cNvSpPr/>
-          <p:nvPr/>
-        </p:nvSpPr>
-        <p:spPr>
-          <a:xfrm>
-            <a:off x="6455732" y="847284"/>
-            <a:ext cx="2744023" cy="849162"/>
-          </a:xfrm>
-          <a:prstGeom prst="wedgeRoundRectCallout">
-            <a:avLst>
-              <a:gd name="adj1" fmla="val -34706"/>
-              <a:gd name="adj2" fmla="val 89748"/>
-              <a:gd name="adj3" fmla="val 16667"/>
-            </a:avLst>
-          </a:prstGeom>
-          <a:solidFill>
-            <a:schemeClr val="bg1"/>
-          </a:solidFill>
-          <a:ln>
-            <a:solidFill>
-              <a:schemeClr val="tx1"/>
-            </a:solidFill>
-          </a:ln>
-        </p:spPr>
-        <p:style>
-          <a:lnRef idx="2">
-            <a:schemeClr val="accent1">
-              <a:shade val="50000"/>
-            </a:schemeClr>
-          </a:lnRef>
-          <a:fillRef idx="1">
-            <a:schemeClr val="accent1"/>
-          </a:fillRef>
-          <a:effectRef idx="0">
-            <a:schemeClr val="accent1"/>
-          </a:effectRef>
-          <a:fontRef idx="minor">
-            <a:schemeClr val="lt1"/>
-          </a:fontRef>
-        </p:style>
-        <p:txBody>
-          <a:bodyPr rtlCol="0" anchor="ctr"/>
-          <a:lstStyle/>
-          <a:p>
-            <a:pPr algn="ctr"/>
-            <a:r>
-              <a:rPr lang="ja-JP" altLang="en-US" sz="2000" dirty="0">
-                <a:solidFill>
-                  <a:schemeClr val="tx1"/>
-                </a:solidFill>
-              </a:rPr>
-              <a:t>I heard you're in charge</a:t>
-            </a:r>
-            <a:endParaRPr lang="en-US" altLang="ja-JP" sz="2000" dirty="0">
-              <a:solidFill>
-                <a:schemeClr val="tx1"/>
-              </a:solidFill>
-            </a:endParaRPr>
-          </a:p>
-          <a:p>
-            <a:pPr algn="ctr"/>
-            <a:r>
-              <a:rPr lang="ja-JP" altLang="en-US" sz="2000" dirty="0">
-                <a:solidFill>
-                  <a:schemeClr val="tx1"/>
-                </a:solidFill>
-              </a:rPr>
-              <a:t>of this.</a:t>
-            </a:r>
-            <a:endParaRPr lang="en-US" altLang="ja-JP" sz="2000" dirty="0">
-              <a:solidFill>
-                <a:schemeClr val="tx1"/>
-              </a:solidFill>
-            </a:endParaRPr>
-          </a:p>
-        </p:txBody>
-      </p:sp>
-      <p:sp>
-        <p:nvSpPr>
-          <p:cNvPr id="18" name="右矢印 17"/>
-          <p:cNvSpPr/>
-          <p:nvPr/>
-        </p:nvSpPr>
-        <p:spPr>
-          <a:xfrm>
-            <a:off x="4953000" y="3506532"/>
-            <a:ext cx="792088" cy="790781"/>
-          </a:xfrm>
-          <a:prstGeom prst="rightArrow">
-            <a:avLst/>
-          </a:prstGeom>
-          <a:solidFill>
-            <a:srgbClr val="FF0000"/>
-          </a:solidFill>
-          <a:ln>
-            <a:solidFill>
-              <a:schemeClr val="tx1"/>
-            </a:solidFill>
-          </a:ln>
-        </p:spPr>
-        <p:style>
-          <a:lnRef idx="2">
-            <a:schemeClr val="accent1">
-              <a:shade val="50000"/>
-            </a:schemeClr>
-          </a:lnRef>
-          <a:fillRef idx="1">
-            <a:schemeClr val="accent1"/>
-          </a:fillRef>
-          <a:effectRef idx="0">
-            <a:schemeClr val="accent1"/>
-          </a:effectRef>
-          <a:fontRef idx="minor">
-            <a:schemeClr val="lt1"/>
-          </a:fontRef>
-        </p:style>
-        <p:txBody>
-          <a:bodyPr rtlCol="0" anchor="ctr"/>
-          <a:lstStyle/>
-          <a:p>
-            <a:pPr algn="ctr"/>
-            <a:endParaRPr kumimoji="1" lang="ja-JP" altLang="en-US"/>
-          </a:p>
-        </p:txBody>
-      </p:sp>
-      <p:sp>
-        <p:nvSpPr>
-          <p:cNvPr id="19" name="テキスト ボックス 18"/>
-          <p:cNvSpPr txBox="1"/>
-          <p:nvPr/>
-        </p:nvSpPr>
-        <p:spPr>
-          <a:xfrm>
-            <a:off x="2727106" y="127008"/>
-            <a:ext cx="4698722" cy="584775"/>
-          </a:xfrm>
-          <a:prstGeom prst="rect">
-            <a:avLst/>
-          </a:prstGeom>
-          <a:noFill/>
-          <a:ln>
-            <a:solidFill>
-              <a:schemeClr val="tx1"/>
-            </a:solidFill>
-          </a:ln>
-        </p:spPr>
-        <p:txBody>
-          <a:bodyPr wrap="none" rtlCol="0">
-            <a:spAutoFit/>
-          </a:bodyPr>
-          <a:lstStyle/>
-          <a:p>
-            <a:r>
-              <a:rPr kumimoji="1" lang="ja-JP" altLang="en-US" sz="3200" dirty="0"/>
-              <a:t>First-touch policy</a:t>
-            </a:r>
-          </a:p>
-        </p:txBody>
-      </p:sp>
-    </p:spTree>
-    <p:extLst>
-      <p:ext uri="{BB962C8B-B14F-4D97-AF65-F5344CB8AC3E}">
-        <p14:creationId xmlns:p14="http://schemas.microsoft.com/office/powerpoint/2010/main" val="3084154577"/>
-      </p:ext>
-    </p:extLst>
-  </p:cSld>
-  <p:clrMapOvr>
-    <a:masterClrMapping/>
-  </p:clrMapOvr>
-</p:sld>
-</file>
-
 <file path=ppt/slides/slide6.xml><?xml version="1.0" encoding="utf-8"?>
 <p:sld xmlns:a="http://schemas.openxmlformats.org/drawingml/2006/main" xmlns:r="http://schemas.openxmlformats.org/officeDocument/2006/relationships" xmlns:p="http://schemas.openxmlformats.org/presentationml/2006/main">
   <p:cSld>
@@ -5942,13 +6033,14 @@
           <a:noFill/>
         </p:spPr>
         <p:txBody>
-          <a:bodyPr wrap="none" rtlCol="0">
-            <a:spAutoFit/>
-          </a:bodyPr>
+          <a:bodyPr wrap="square" rtlCol="0"/>
           <a:lstStyle/>
           <a:p>
+            <a:pPr>
+              <a:defRPr sz="1750"/>
+            </a:pPr>
             <a:r>
-              <a:rPr kumimoji="1" lang="ja-JP" altLang="en-US"/>
+              <a:rPr kumimoji="1" lang="ja-JP" altLang="en-US" sz="1750"/>
               <a:t>Scaling on a single node (12 cores x 2 sockets)</a:t>
             </a:r>
             <a:endParaRPr kumimoji="1" lang="ja-JP" altLang="en-US"/>
@@ -5978,11 +6070,14 @@
           <a:noFill/>
         </p:spPr>
         <p:txBody>
-          <a:bodyPr wrap="none" rtlCol="0">
-            <a:spAutoFit/>
+          <a:bodyPr wrap="square" rtlCol="0">
+            <a:normAutofit/>
           </a:bodyPr>
           <a:lstStyle/>
           <a:p>
+            <a:pPr>
+              <a:defRPr/>
+            </a:pPr>
             <a:r>
               <a:rPr kumimoji="1" lang="ja-JP" altLang="en-US"/>
               <a:t>Execution time</a:t>
@@ -6013,11 +6108,14 @@
           <a:noFill/>
         </p:spPr>
         <p:txBody>
-          <a:bodyPr wrap="none" rtlCol="0">
-            <a:spAutoFit/>
+          <a:bodyPr wrap="square" rtlCol="0">
+            <a:normAutofit/>
           </a:bodyPr>
           <a:lstStyle/>
           <a:p>
+            <a:pPr>
+              <a:defRPr/>
+            </a:pPr>
             <a:r>
               <a:rPr kumimoji="1" lang="ja-JP" altLang="en-US"/>
               <a:t>Parallel efficiency</a:t>

--- a/site-assets/sources/day6/fig-ja-en.pptx
+++ b/site-assets/sources/day6/fig-ja-en.pptx
@@ -5,15 +5,17 @@
     <p:sldMasterId id="2147483660" r:id="rId1"/>
   </p:sldMasterIdLst>
   <p:notesMasterIdLst>
-    <p:notesMasterId r:id="rId5"/>
+    <p:notesMasterId r:id="rId10"/>
   </p:notesMasterIdLst>
   <p:sldIdLst>
     <p:sldId id="256" r:id="rId2"/>
-    <p:sldId id="259" r:id="rId10"/>
-    <p:sldId id="257" r:id="rId3"/>
-    <p:sldId id="260" r:id="rId11"/>
-    <p:sldId id="258" r:id="rId4"/>
-    <p:sldId id="261" r:id="rId12"/>
+    <p:sldId id="259" r:id="rId3"/>
+    <p:sldId id="262" r:id="rId4"/>
+    <p:sldId id="263" r:id="rId5"/>
+    <p:sldId id="257" r:id="rId6"/>
+    <p:sldId id="260" r:id="rId7"/>
+    <p:sldId id="258" r:id="rId8"/>
+    <p:sldId id="261" r:id="rId9"/>
   </p:sldIdLst>
   <p:sldSz cx="9906000" cy="6858000" type="A4"/>
   <p:notesSz cx="6858000" cy="9144000"/>
@@ -204,7 +206,7 @@
           </a:lstStyle>
           <a:p>
             <a:fld id="{234B1B89-6D29-7849-8E65-921CEBC6CA4C}" type="datetimeFigureOut">
-              <a:t>2018/11/20</a:t>
+              <a:t>2026/8/7</a:t>
             </a:fld>
             <a:endParaRPr kumimoji="1" lang="ja-JP" altLang="en-US"/>
           </a:p>
@@ -4494,6 +4496,126 @@
       </p:grpSpPr>
       <p:pic>
         <p:nvPicPr>
+          <p:cNvPr id="2" name="図 1" descr="Page walk for small pages">
+            <a:extLst>
+              <a:ext uri="{FF2B5EF4-FFF2-40B4-BE49-F238E27FC236}">
+                <a16:creationId xmlns:a16="http://schemas.microsoft.com/office/drawing/2014/main" id="{4C41FBB6-FAB9-000F-D1BC-BF14F5096935}"/>
+              </a:ext>
+            </a:extLst>
+          </p:cNvPr>
+          <p:cNvPicPr>
+            <a:picLocks noChangeAspect="1"/>
+          </p:cNvPicPr>
+          <p:nvPr/>
+        </p:nvPicPr>
+        <p:blipFill>
+          <a:blip r:embed="rId2"/>
+          <a:stretch>
+            <a:fillRect/>
+          </a:stretch>
+        </p:blipFill>
+        <p:spPr>
+          <a:xfrm>
+            <a:off x="1568624" y="1412776"/>
+            <a:ext cx="7429500" cy="3776663"/>
+          </a:xfrm>
+          <a:prstGeom prst="rect">
+            <a:avLst/>
+          </a:prstGeom>
+        </p:spPr>
+      </p:pic>
+    </p:spTree>
+    <p:extLst>
+      <p:ext uri="{BB962C8B-B14F-4D97-AF65-F5344CB8AC3E}">
+        <p14:creationId xmlns:p14="http://schemas.microsoft.com/office/powerpoint/2010/main" val="1152607544"/>
+      </p:ext>
+    </p:extLst>
+  </p:cSld>
+  <p:clrMapOvr>
+    <a:masterClrMapping/>
+  </p:clrMapOvr>
+</p:sld>
+</file>
+
+<file path=ppt/slides/slide4.xml><?xml version="1.0" encoding="utf-8"?>
+<p:sld xmlns:a="http://schemas.openxmlformats.org/drawingml/2006/main" xmlns:r="http://schemas.openxmlformats.org/officeDocument/2006/relationships" xmlns:p="http://schemas.openxmlformats.org/presentationml/2006/main">
+  <p:cSld>
+    <p:spTree>
+      <p:nvGrpSpPr>
+        <p:cNvPr id="1" name=""/>
+        <p:cNvGrpSpPr/>
+        <p:nvPr/>
+      </p:nvGrpSpPr>
+      <p:grpSpPr>
+        <a:xfrm>
+          <a:off x="0" y="0"/>
+          <a:ext cx="0" cy="0"/>
+          <a:chOff x="0" y="0"/>
+          <a:chExt cx="0" cy="0"/>
+        </a:xfrm>
+      </p:grpSpPr>
+      <p:pic>
+        <p:nvPicPr>
+          <p:cNvPr id="2" name="図 1" descr="Page walk for large pages">
+            <a:extLst>
+              <a:ext uri="{FF2B5EF4-FFF2-40B4-BE49-F238E27FC236}">
+                <a16:creationId xmlns:a16="http://schemas.microsoft.com/office/drawing/2014/main" id="{908126D7-6DA6-A097-246C-04E68FCE236C}"/>
+              </a:ext>
+            </a:extLst>
+          </p:cNvPr>
+          <p:cNvPicPr>
+            <a:picLocks noChangeAspect="1"/>
+          </p:cNvPicPr>
+          <p:nvPr/>
+        </p:nvPicPr>
+        <p:blipFill>
+          <a:blip r:embed="rId2"/>
+          <a:stretch>
+            <a:fillRect/>
+          </a:stretch>
+        </p:blipFill>
+        <p:spPr>
+          <a:xfrm>
+            <a:off x="1238250" y="1280636"/>
+            <a:ext cx="7429500" cy="4296728"/>
+          </a:xfrm>
+          <a:prstGeom prst="rect">
+            <a:avLst/>
+          </a:prstGeom>
+        </p:spPr>
+      </p:pic>
+    </p:spTree>
+    <p:extLst>
+      <p:ext uri="{BB962C8B-B14F-4D97-AF65-F5344CB8AC3E}">
+        <p14:creationId xmlns:p14="http://schemas.microsoft.com/office/powerpoint/2010/main" val="2660441941"/>
+      </p:ext>
+    </p:extLst>
+  </p:cSld>
+  <p:clrMapOvr>
+    <a:masterClrMapping/>
+  </p:clrMapOvr>
+</p:sld>
+</file>
+
+<file path=ppt/slides/slide5.xml><?xml version="1.0" encoding="utf-8"?>
+<p:sld xmlns:a="http://schemas.openxmlformats.org/drawingml/2006/main" xmlns:r="http://schemas.openxmlformats.org/officeDocument/2006/relationships" xmlns:p="http://schemas.openxmlformats.org/presentationml/2006/main">
+  <p:cSld>
+    <p:spTree>
+      <p:nvGrpSpPr>
+        <p:cNvPr id="1" name=""/>
+        <p:cNvGrpSpPr/>
+        <p:nvPr/>
+      </p:nvGrpSpPr>
+      <p:grpSpPr>
+        <a:xfrm>
+          <a:off x="0" y="0"/>
+          <a:ext cx="0" cy="0"/>
+          <a:chOff x="0" y="0"/>
+          <a:chExt cx="0" cy="0"/>
+        </a:xfrm>
+      </p:grpSpPr>
+      <p:pic>
+        <p:nvPicPr>
           <p:cNvPr id="2" name="図 1"/>
           <p:cNvPicPr>
             <a:picLocks noChangeAspect="1"/>
@@ -5092,7 +5214,7 @@
 </p:sld>
 </file>
 
-<file path=ppt/slides/slide4.xml><?xml version="1.0" encoding="utf-8"?>
+<file path=ppt/slides/slide6.xml><?xml version="1.0" encoding="utf-8"?>
 <p:sld xmlns:a="http://schemas.openxmlformats.org/drawingml/2006/main" xmlns:r="http://schemas.openxmlformats.org/officeDocument/2006/relationships" xmlns:p="http://schemas.openxmlformats.org/presentationml/2006/main">
   <p:cSld>
     <p:spTree>
@@ -5259,47 +5381,6 @@
           </a:prstGeom>
         </p:spPr>
       </p:pic>
-      <p:sp>
-        <p:nvSpPr>
-          <p:cNvPr id="11" name="テキスト ボックス 10"/>
-          <p:cNvSpPr txBox="1"/>
-          <p:nvPr/>
-        </p:nvSpPr>
-        <p:spPr>
-          <a:xfrm>
-            <a:off x="335742" y="6089406"/>
-            <a:ext cx="4031873" cy="707886"/>
-          </a:xfrm>
-          <a:prstGeom prst="rect">
-            <a:avLst/>
-          </a:prstGeom>
-          <a:noFill/>
-        </p:spPr>
-        <p:txBody>
-          <a:bodyPr wrap="square" rtlCol="0"/>
-          <a:lstStyle/>
-          <a:p>
-            <a:pPr>
-              <a:defRPr sz="1600"/>
-            </a:pPr>
-            <a:r>
-              <a:rPr lang="ja-JP" altLang="en-US" sz="1600" dirty="0"/>
-              <a:t>If you accept too much work at first</a:t>
-            </a:r>
-            <a:endParaRPr lang="en-US" altLang="ja-JP" sz="2000" dirty="0"/>
-          </a:p>
-          <a:p>
-            <a:pPr>
-              <a:defRPr sz="1600"/>
-            </a:pPr>
-            <a:r>
-              <a:rPr lang="ja-JP" altLang="en-US" sz="1600" dirty="0"/>
-              <a:t>because it looks easy...</a:t>
-            </a:r>
-            <a:endParaRPr lang="en-US" altLang="ja-JP" sz="2000" dirty="0"/>
-          </a:p>
-        </p:txBody>
-      </p:sp>
       <p:sp>
         <p:nvSpPr>
           <p:cNvPr id="12" name="角丸四角形吹き出し 11"/>
@@ -5344,7 +5425,7 @@
           </a:fontRef>
         </p:style>
         <p:txBody>
-          <a:bodyPr rtlCol="0" anchor="ctr" wrap="square"/>
+          <a:bodyPr wrap="square" rtlCol="0" anchor="ctr"/>
           <a:lstStyle/>
           <a:p>
             <a:pPr algn="ctr">
@@ -5477,59 +5558,26 @@
               <a:defRPr/>
             </a:pPr>
             <a:r>
-              <a:rPr kumimoji="1" lang="ja-JP" altLang="en-US" sz="2000" dirty="0" err="1">
+              <a:rPr kumimoji="1" lang="ja-JP" altLang="en-US" sz="2000">
                 <a:solidFill>
                   <a:schemeClr val="tx1"/>
                 </a:solidFill>
               </a:rPr>
-              <a:t>Sure.</a:t>
+              <a:t>Sure</a:t>
+            </a:r>
+            <a:r>
+              <a:rPr kumimoji="1" lang="en-US" altLang="ja-JP" sz="2000" dirty="0">
+                <a:solidFill>
+                  <a:schemeClr val="tx1"/>
+                </a:solidFill>
+              </a:rPr>
+              <a:t>!</a:t>
             </a:r>
             <a:endParaRPr kumimoji="1" lang="ja-JP" altLang="en-US" sz="2000" dirty="0">
               <a:solidFill>
                 <a:schemeClr val="tx1"/>
               </a:solidFill>
             </a:endParaRPr>
-          </a:p>
-        </p:txBody>
-      </p:sp>
-      <p:sp>
-        <p:nvSpPr>
-          <p:cNvPr id="16" name="テキスト ボックス 15"/>
-          <p:cNvSpPr txBox="1"/>
-          <p:nvPr/>
-        </p:nvSpPr>
-        <p:spPr>
-          <a:xfrm>
-            <a:off x="5745088" y="6089406"/>
-            <a:ext cx="4031873" cy="707886"/>
-          </a:xfrm>
-          <a:prstGeom prst="rect">
-            <a:avLst/>
-          </a:prstGeom>
-          <a:noFill/>
-        </p:spPr>
-        <p:txBody>
-          <a:bodyPr wrap="square" rtlCol="0"/>
-          <a:lstStyle/>
-          <a:p>
-            <a:pPr>
-              <a:defRPr sz="1400"/>
-            </a:pPr>
-            <a:r>
-              <a:rPr kumimoji="1" lang="ja-JP" altLang="en-US" sz="1400" dirty="0"/>
-              <a:t>Before you know it, you become</a:t>
-            </a:r>
-            <a:endParaRPr kumimoji="1" lang="en-US" altLang="ja-JP" sz="2000" dirty="0"/>
-          </a:p>
-          <a:p>
-            <a:pPr>
-              <a:defRPr sz="1400"/>
-            </a:pPr>
-            <a:r>
-              <a:rPr kumimoji="1" lang="ja-JP" altLang="en-US" sz="1400" dirty="0"/>
-              <a:t>"the person in charge" and things get painful...</a:t>
-            </a:r>
-            <a:endParaRPr kumimoji="1" lang="en-US" altLang="ja-JP" sz="2000" dirty="0"/>
           </a:p>
         </p:txBody>
       </p:sp>
@@ -5577,7 +5625,7 @@
           </a:fontRef>
         </p:style>
         <p:txBody>
-          <a:bodyPr rtlCol="0" anchor="ctr" wrap="square"/>
+          <a:bodyPr wrap="square" rtlCol="0" anchor="ctr"/>
           <a:lstStyle/>
           <a:p>
             <a:pPr algn="ctr">
@@ -5673,8 +5721,8 @@
         </p:nvSpPr>
         <p:spPr>
           <a:xfrm>
-            <a:off x="2727106" y="127008"/>
-            <a:ext cx="4698722" cy="584775"/>
+            <a:off x="3480013" y="107921"/>
+            <a:ext cx="2945974" cy="584775"/>
           </a:xfrm>
           <a:prstGeom prst="rect">
             <a:avLst/>
@@ -5690,12 +5738,98 @@
           <a:bodyPr wrap="square" rtlCol="0"/>
           <a:lstStyle/>
           <a:p>
-            <a:pPr>
+            <a:pPr algn="ctr">
               <a:defRPr sz="2900"/>
             </a:pPr>
             <a:r>
               <a:rPr kumimoji="1" lang="ja-JP" altLang="en-US" sz="2900" dirty="0"/>
               <a:t>First-touch policy</a:t>
+            </a:r>
+          </a:p>
+        </p:txBody>
+      </p:sp>
+      <p:sp>
+        <p:nvSpPr>
+          <p:cNvPr id="6" name="テキスト ボックス 5">
+            <a:extLst>
+              <a:ext uri="{FF2B5EF4-FFF2-40B4-BE49-F238E27FC236}">
+                <a16:creationId xmlns:a16="http://schemas.microsoft.com/office/drawing/2014/main" id="{91853457-179E-9FEC-B5E7-98CB612FB765}"/>
+              </a:ext>
+            </a:extLst>
+          </p:cNvPr>
+          <p:cNvSpPr txBox="1"/>
+          <p:nvPr/>
+        </p:nvSpPr>
+        <p:spPr>
+          <a:xfrm>
+            <a:off x="5532199" y="6007165"/>
+            <a:ext cx="4247591" cy="646331"/>
+          </a:xfrm>
+          <a:prstGeom prst="rect">
+            <a:avLst/>
+          </a:prstGeom>
+          <a:noFill/>
+        </p:spPr>
+        <p:txBody>
+          <a:bodyPr wrap="square">
+            <a:spAutoFit/>
+          </a:bodyPr>
+          <a:lstStyle/>
+          <a:p>
+            <a:r>
+              <a:rPr lang="ja-JP" altLang="en-US"/>
+              <a:t>Before you know it, you become</a:t>
+            </a:r>
+            <a:r>
+              <a:rPr lang="en-US" altLang="ja-JP" dirty="0"/>
+              <a:t> </a:t>
+            </a:r>
+            <a:r>
+              <a:rPr lang="ja-JP" altLang="en-US"/>
+              <a:t>"the person in charge" and things get painful...</a:t>
+            </a:r>
+          </a:p>
+        </p:txBody>
+      </p:sp>
+      <p:sp>
+        <p:nvSpPr>
+          <p:cNvPr id="9" name="テキスト ボックス 8">
+            <a:extLst>
+              <a:ext uri="{FF2B5EF4-FFF2-40B4-BE49-F238E27FC236}">
+                <a16:creationId xmlns:a16="http://schemas.microsoft.com/office/drawing/2014/main" id="{727FB147-5A2E-D01D-B4DD-C3EE5C68DF4B}"/>
+              </a:ext>
+            </a:extLst>
+          </p:cNvPr>
+          <p:cNvSpPr txBox="1"/>
+          <p:nvPr/>
+        </p:nvSpPr>
+        <p:spPr>
+          <a:xfrm>
+            <a:off x="534664" y="6007165"/>
+            <a:ext cx="3704793" cy="646331"/>
+          </a:xfrm>
+          <a:prstGeom prst="rect">
+            <a:avLst/>
+          </a:prstGeom>
+          <a:noFill/>
+        </p:spPr>
+        <p:txBody>
+          <a:bodyPr wrap="square">
+            <a:spAutoFit/>
+          </a:bodyPr>
+          <a:lstStyle/>
+          <a:p>
+            <a:r>
+              <a:rPr lang="ja-JP" altLang="en-US"/>
+              <a:t>If you accept too much work at first</a:t>
+            </a:r>
+            <a:r>
+              <a:rPr lang="en-US" altLang="ja-JP" dirty="0"/>
+              <a:t> </a:t>
+            </a:r>
+            <a:r>
+              <a:rPr lang="ja-JP" altLang="en-US"/>
+              <a:t>because it looks easy...</a:t>
             </a:r>
           </a:p>
         </p:txBody>
@@ -5713,7 +5847,7 @@
 </p:sld>
 </file>
 
-<file path=ppt/slides/slide5.xml><?xml version="1.0" encoding="utf-8"?>
+<file path=ppt/slides/slide7.xml><?xml version="1.0" encoding="utf-8"?>
 <p:sld xmlns:a="http://schemas.openxmlformats.org/drawingml/2006/main" xmlns:r="http://schemas.openxmlformats.org/officeDocument/2006/relationships" xmlns:p="http://schemas.openxmlformats.org/presentationml/2006/main">
   <p:cSld>
     <p:spTree>
@@ -5933,7 +6067,7 @@
 </p:sld>
 </file>
 
-<file path=ppt/slides/slide6.xml><?xml version="1.0" encoding="utf-8"?>
+<file path=ppt/slides/slide8.xml><?xml version="1.0" encoding="utf-8"?>
 <p:sld xmlns:a="http://schemas.openxmlformats.org/drawingml/2006/main" xmlns:r="http://schemas.openxmlformats.org/officeDocument/2006/relationships" xmlns:p="http://schemas.openxmlformats.org/presentationml/2006/main">
   <p:cSld>
     <p:spTree>
@@ -6061,8 +6195,8 @@
         </p:nvSpPr>
         <p:spPr>
           <a:xfrm>
-            <a:off x="1928664" y="692696"/>
-            <a:ext cx="1107996" cy="369332"/>
+            <a:off x="1352600" y="692696"/>
+            <a:ext cx="1684060" cy="369332"/>
           </a:xfrm>
           <a:prstGeom prst="rect">
             <a:avLst/>
@@ -6100,7 +6234,7 @@
         <p:spPr>
           <a:xfrm>
             <a:off x="6105128" y="692696"/>
-            <a:ext cx="1338828" cy="369332"/>
+            <a:ext cx="1872208" cy="369332"/>
           </a:xfrm>
           <a:prstGeom prst="rect">
             <a:avLst/>

--- a/site-assets/sources/day6/fig-ja-en.pptx
+++ b/site-assets/sources/day6/fig-ja-en.pptx
@@ -5,17 +5,19 @@
     <p:sldMasterId id="2147483660" r:id="rId1"/>
   </p:sldMasterIdLst>
   <p:notesMasterIdLst>
-    <p:notesMasterId r:id="rId10"/>
+    <p:notesMasterId r:id="rId12"/>
   </p:notesMasterIdLst>
   <p:sldIdLst>
     <p:sldId id="256" r:id="rId2"/>
     <p:sldId id="259" r:id="rId3"/>
-    <p:sldId id="262" r:id="rId4"/>
-    <p:sldId id="263" r:id="rId5"/>
-    <p:sldId id="257" r:id="rId6"/>
-    <p:sldId id="260" r:id="rId7"/>
-    <p:sldId id="258" r:id="rId8"/>
-    <p:sldId id="261" r:id="rId9"/>
+    <p:sldId id="257" r:id="rId4"/>
+    <p:sldId id="260" r:id="rId5"/>
+    <p:sldId id="263" r:id="rId6"/>
+    <p:sldId id="262" r:id="rId7"/>
+    <p:sldId id="264" r:id="rId8"/>
+    <p:sldId id="265" r:id="rId9"/>
+    <p:sldId id="258" r:id="rId10"/>
+    <p:sldId id="261" r:id="rId11"/>
   </p:sldIdLst>
   <p:sldSz cx="9906000" cy="6858000" type="A4"/>
   <p:notesSz cx="6858000" cy="9144000"/>
@@ -2615,6 +2617,208 @@
 </p:sld>
 </file>
 
+<file path=ppt/slides/slide10.xml><?xml version="1.0" encoding="utf-8"?>
+<p:sld xmlns:a="http://schemas.openxmlformats.org/drawingml/2006/main" xmlns:r="http://schemas.openxmlformats.org/officeDocument/2006/relationships" xmlns:p="http://schemas.openxmlformats.org/presentationml/2006/main">
+  <p:cSld>
+    <p:spTree>
+      <p:nvGrpSpPr>
+        <p:cNvPr id="1" name=""/>
+        <p:cNvGrpSpPr/>
+        <p:nvPr/>
+      </p:nvGrpSpPr>
+      <p:grpSpPr>
+        <a:xfrm>
+          <a:off x="0" y="0"/>
+          <a:ext cx="0" cy="0"/>
+          <a:chOff x="0" y="0"/>
+          <a:chExt cx="0" cy="0"/>
+        </a:xfrm>
+      </p:grpSpPr>
+      <p:pic>
+        <p:nvPicPr>
+          <p:cNvPr id="2" name="図 1">
+            <a:extLst>
+              <a:ext uri="{FF2B5EF4-FFF2-40B4-BE49-F238E27FC236}">
+                <a16:creationId xmlns:a16="http://schemas.microsoft.com/office/drawing/2014/main" id="{E72C49AB-44CB-F74E-9F08-ACE909D7372F}"/>
+              </a:ext>
+            </a:extLst>
+          </p:cNvPr>
+          <p:cNvPicPr>
+            <a:picLocks noChangeAspect="1"/>
+          </p:cNvPicPr>
+          <p:nvPr/>
+        </p:nvPicPr>
+        <p:blipFill>
+          <a:blip r:embed="rId2"/>
+          <a:stretch>
+            <a:fillRect/>
+          </a:stretch>
+        </p:blipFill>
+        <p:spPr>
+          <a:xfrm>
+            <a:off x="4592960" y="1052736"/>
+            <a:ext cx="4064000" cy="3048000"/>
+          </a:xfrm>
+          <a:prstGeom prst="rect">
+            <a:avLst/>
+          </a:prstGeom>
+        </p:spPr>
+      </p:pic>
+      <p:pic>
+        <p:nvPicPr>
+          <p:cNvPr id="3" name="図 2">
+            <a:extLst>
+              <a:ext uri="{FF2B5EF4-FFF2-40B4-BE49-F238E27FC236}">
+                <a16:creationId xmlns:a16="http://schemas.microsoft.com/office/drawing/2014/main" id="{3B0E9ACC-C7CD-FD48-A0CB-FEF5F5402F1C}"/>
+              </a:ext>
+            </a:extLst>
+          </p:cNvPr>
+          <p:cNvPicPr>
+            <a:picLocks noChangeAspect="1"/>
+          </p:cNvPicPr>
+          <p:nvPr/>
+        </p:nvPicPr>
+        <p:blipFill>
+          <a:blip r:embed="rId3"/>
+          <a:stretch>
+            <a:fillRect/>
+          </a:stretch>
+        </p:blipFill>
+        <p:spPr>
+          <a:xfrm>
+            <a:off x="272480" y="980728"/>
+            <a:ext cx="4064000" cy="3048000"/>
+          </a:xfrm>
+          <a:prstGeom prst="rect">
+            <a:avLst/>
+          </a:prstGeom>
+        </p:spPr>
+      </p:pic>
+      <p:sp>
+        <p:nvSpPr>
+          <p:cNvPr id="5" name="テキスト ボックス 4">
+            <a:extLst>
+              <a:ext uri="{FF2B5EF4-FFF2-40B4-BE49-F238E27FC236}">
+                <a16:creationId xmlns:a16="http://schemas.microsoft.com/office/drawing/2014/main" id="{B5E7FE39-4188-A945-951F-59A75AF5A6A7}"/>
+              </a:ext>
+            </a:extLst>
+          </p:cNvPr>
+          <p:cNvSpPr txBox="1"/>
+          <p:nvPr/>
+        </p:nvSpPr>
+        <p:spPr>
+          <a:xfrm>
+            <a:off x="1352600" y="692696"/>
+            <a:ext cx="1684060" cy="369332"/>
+          </a:xfrm>
+          <a:prstGeom prst="rect">
+            <a:avLst/>
+          </a:prstGeom>
+          <a:noFill/>
+        </p:spPr>
+        <p:txBody>
+          <a:bodyPr wrap="square" rtlCol="0">
+            <a:normAutofit/>
+          </a:bodyPr>
+          <a:lstStyle/>
+          <a:p>
+            <a:pPr>
+              <a:defRPr/>
+            </a:pPr>
+            <a:r>
+              <a:rPr kumimoji="1" lang="ja-JP" altLang="en-US"/>
+              <a:t>Execution time</a:t>
+            </a:r>
+          </a:p>
+        </p:txBody>
+      </p:sp>
+      <p:sp>
+        <p:nvSpPr>
+          <p:cNvPr id="6" name="テキスト ボックス 5">
+            <a:extLst>
+              <a:ext uri="{FF2B5EF4-FFF2-40B4-BE49-F238E27FC236}">
+                <a16:creationId xmlns:a16="http://schemas.microsoft.com/office/drawing/2014/main" id="{F20085AF-BAB7-B043-B964-5B3833EBB4B4}"/>
+              </a:ext>
+            </a:extLst>
+          </p:cNvPr>
+          <p:cNvSpPr txBox="1"/>
+          <p:nvPr/>
+        </p:nvSpPr>
+        <p:spPr>
+          <a:xfrm>
+            <a:off x="6105128" y="692696"/>
+            <a:ext cx="1872208" cy="369332"/>
+          </a:xfrm>
+          <a:prstGeom prst="rect">
+            <a:avLst/>
+          </a:prstGeom>
+          <a:noFill/>
+        </p:spPr>
+        <p:txBody>
+          <a:bodyPr wrap="square" rtlCol="0">
+            <a:normAutofit/>
+          </a:bodyPr>
+          <a:lstStyle/>
+          <a:p>
+            <a:pPr>
+              <a:defRPr/>
+            </a:pPr>
+            <a:r>
+              <a:rPr kumimoji="1" lang="ja-JP" altLang="en-US"/>
+              <a:t>Parallel efficiency</a:t>
+            </a:r>
+          </a:p>
+        </p:txBody>
+      </p:sp>
+      <p:sp>
+        <p:nvSpPr>
+          <p:cNvPr id="8" name="テキスト ボックス 7">
+            <a:extLst>
+              <a:ext uri="{FF2B5EF4-FFF2-40B4-BE49-F238E27FC236}">
+                <a16:creationId xmlns:a16="http://schemas.microsoft.com/office/drawing/2014/main" id="{9E890EB1-34A4-F7F9-94A5-68BCB0512C04}"/>
+              </a:ext>
+            </a:extLst>
+          </p:cNvPr>
+          <p:cNvSpPr txBox="1"/>
+          <p:nvPr/>
+        </p:nvSpPr>
+        <p:spPr>
+          <a:xfrm>
+            <a:off x="2194630" y="143344"/>
+            <a:ext cx="4953000" cy="369332"/>
+          </a:xfrm>
+          <a:prstGeom prst="rect">
+            <a:avLst/>
+          </a:prstGeom>
+          <a:noFill/>
+        </p:spPr>
+        <p:txBody>
+          <a:bodyPr wrap="square">
+            <a:spAutoFit/>
+          </a:bodyPr>
+          <a:lstStyle/>
+          <a:p>
+            <a:pPr algn="ctr"/>
+            <a:r>
+              <a:rPr lang="ja-JP" altLang="en-US"/>
+              <a:t>Scaling on a single node (12 cores x 2 sockets)</a:t>
+            </a:r>
+          </a:p>
+        </p:txBody>
+      </p:sp>
+    </p:spTree>
+    <p:extLst>
+      <p:ext uri="{BB962C8B-B14F-4D97-AF65-F5344CB8AC3E}">
+        <p14:creationId xmlns:p14="http://schemas.microsoft.com/office/powerpoint/2010/main" val="5540923"/>
+      </p:ext>
+    </p:extLst>
+  </p:cSld>
+  <p:clrMapOvr>
+    <a:masterClrMapping/>
+  </p:clrMapOvr>
+</p:sld>
+</file>
+
 <file path=ppt/slides/slide2.xml><?xml version="1.0" encoding="utf-8"?>
 <p:sld xmlns:a="http://schemas.openxmlformats.org/drawingml/2006/main" xmlns:r="http://schemas.openxmlformats.org/officeDocument/2006/relationships" xmlns:p="http://schemas.openxmlformats.org/presentationml/2006/main">
   <p:cSld>
@@ -4478,126 +4682,6 @@
 </file>
 
 <file path=ppt/slides/slide3.xml><?xml version="1.0" encoding="utf-8"?>
-<p:sld xmlns:a="http://schemas.openxmlformats.org/drawingml/2006/main" xmlns:r="http://schemas.openxmlformats.org/officeDocument/2006/relationships" xmlns:p="http://schemas.openxmlformats.org/presentationml/2006/main">
-  <p:cSld>
-    <p:spTree>
-      <p:nvGrpSpPr>
-        <p:cNvPr id="1" name=""/>
-        <p:cNvGrpSpPr/>
-        <p:nvPr/>
-      </p:nvGrpSpPr>
-      <p:grpSpPr>
-        <a:xfrm>
-          <a:off x="0" y="0"/>
-          <a:ext cx="0" cy="0"/>
-          <a:chOff x="0" y="0"/>
-          <a:chExt cx="0" cy="0"/>
-        </a:xfrm>
-      </p:grpSpPr>
-      <p:pic>
-        <p:nvPicPr>
-          <p:cNvPr id="2" name="図 1" descr="Page walk for small pages">
-            <a:extLst>
-              <a:ext uri="{FF2B5EF4-FFF2-40B4-BE49-F238E27FC236}">
-                <a16:creationId xmlns:a16="http://schemas.microsoft.com/office/drawing/2014/main" id="{4C41FBB6-FAB9-000F-D1BC-BF14F5096935}"/>
-              </a:ext>
-            </a:extLst>
-          </p:cNvPr>
-          <p:cNvPicPr>
-            <a:picLocks noChangeAspect="1"/>
-          </p:cNvPicPr>
-          <p:nvPr/>
-        </p:nvPicPr>
-        <p:blipFill>
-          <a:blip r:embed="rId2"/>
-          <a:stretch>
-            <a:fillRect/>
-          </a:stretch>
-        </p:blipFill>
-        <p:spPr>
-          <a:xfrm>
-            <a:off x="1568624" y="1412776"/>
-            <a:ext cx="7429500" cy="3776663"/>
-          </a:xfrm>
-          <a:prstGeom prst="rect">
-            <a:avLst/>
-          </a:prstGeom>
-        </p:spPr>
-      </p:pic>
-    </p:spTree>
-    <p:extLst>
-      <p:ext uri="{BB962C8B-B14F-4D97-AF65-F5344CB8AC3E}">
-        <p14:creationId xmlns:p14="http://schemas.microsoft.com/office/powerpoint/2010/main" val="1152607544"/>
-      </p:ext>
-    </p:extLst>
-  </p:cSld>
-  <p:clrMapOvr>
-    <a:masterClrMapping/>
-  </p:clrMapOvr>
-</p:sld>
-</file>
-
-<file path=ppt/slides/slide4.xml><?xml version="1.0" encoding="utf-8"?>
-<p:sld xmlns:a="http://schemas.openxmlformats.org/drawingml/2006/main" xmlns:r="http://schemas.openxmlformats.org/officeDocument/2006/relationships" xmlns:p="http://schemas.openxmlformats.org/presentationml/2006/main">
-  <p:cSld>
-    <p:spTree>
-      <p:nvGrpSpPr>
-        <p:cNvPr id="1" name=""/>
-        <p:cNvGrpSpPr/>
-        <p:nvPr/>
-      </p:nvGrpSpPr>
-      <p:grpSpPr>
-        <a:xfrm>
-          <a:off x="0" y="0"/>
-          <a:ext cx="0" cy="0"/>
-          <a:chOff x="0" y="0"/>
-          <a:chExt cx="0" cy="0"/>
-        </a:xfrm>
-      </p:grpSpPr>
-      <p:pic>
-        <p:nvPicPr>
-          <p:cNvPr id="2" name="図 1" descr="Page walk for large pages">
-            <a:extLst>
-              <a:ext uri="{FF2B5EF4-FFF2-40B4-BE49-F238E27FC236}">
-                <a16:creationId xmlns:a16="http://schemas.microsoft.com/office/drawing/2014/main" id="{908126D7-6DA6-A097-246C-04E68FCE236C}"/>
-              </a:ext>
-            </a:extLst>
-          </p:cNvPr>
-          <p:cNvPicPr>
-            <a:picLocks noChangeAspect="1"/>
-          </p:cNvPicPr>
-          <p:nvPr/>
-        </p:nvPicPr>
-        <p:blipFill>
-          <a:blip r:embed="rId2"/>
-          <a:stretch>
-            <a:fillRect/>
-          </a:stretch>
-        </p:blipFill>
-        <p:spPr>
-          <a:xfrm>
-            <a:off x="1238250" y="1280636"/>
-            <a:ext cx="7429500" cy="4296728"/>
-          </a:xfrm>
-          <a:prstGeom prst="rect">
-            <a:avLst/>
-          </a:prstGeom>
-        </p:spPr>
-      </p:pic>
-    </p:spTree>
-    <p:extLst>
-      <p:ext uri="{BB962C8B-B14F-4D97-AF65-F5344CB8AC3E}">
-        <p14:creationId xmlns:p14="http://schemas.microsoft.com/office/powerpoint/2010/main" val="2660441941"/>
-      </p:ext>
-    </p:extLst>
-  </p:cSld>
-  <p:clrMapOvr>
-    <a:masterClrMapping/>
-  </p:clrMapOvr>
-</p:sld>
-</file>
-
-<file path=ppt/slides/slide5.xml><?xml version="1.0" encoding="utf-8"?>
 <p:sld xmlns:a="http://schemas.openxmlformats.org/drawingml/2006/main" xmlns:r="http://schemas.openxmlformats.org/officeDocument/2006/relationships" xmlns:p="http://schemas.openxmlformats.org/presentationml/2006/main">
   <p:cSld>
     <p:spTree>
@@ -5214,7 +5298,7 @@
 </p:sld>
 </file>
 
-<file path=ppt/slides/slide6.xml><?xml version="1.0" encoding="utf-8"?>
+<file path=ppt/slides/slide4.xml><?xml version="1.0" encoding="utf-8"?>
 <p:sld xmlns:a="http://schemas.openxmlformats.org/drawingml/2006/main" xmlns:r="http://schemas.openxmlformats.org/officeDocument/2006/relationships" xmlns:p="http://schemas.openxmlformats.org/presentationml/2006/main">
   <p:cSld>
     <p:spTree>
@@ -5847,7 +5931,577 @@
 </p:sld>
 </file>
 
+<file path=ppt/slides/slide5.xml><?xml version="1.0" encoding="utf-8"?>
+<p:sld xmlns:a="http://schemas.openxmlformats.org/drawingml/2006/main" xmlns:r="http://schemas.openxmlformats.org/officeDocument/2006/relationships" xmlns:p="http://schemas.openxmlformats.org/presentationml/2006/main">
+  <p:cSld>
+    <p:spTree>
+      <p:nvGrpSpPr>
+        <p:cNvPr id="1" name="">
+          <a:extLst>
+            <a:ext uri="{FF2B5EF4-FFF2-40B4-BE49-F238E27FC236}">
+              <a16:creationId xmlns:a16="http://schemas.microsoft.com/office/drawing/2014/main" id="{A77B1D12-227F-B3E1-AE98-7BD5A27D9E5A}"/>
+            </a:ext>
+          </a:extLst>
+        </p:cNvPr>
+        <p:cNvGrpSpPr/>
+        <p:nvPr/>
+      </p:nvGrpSpPr>
+      <p:grpSpPr>
+        <a:xfrm>
+          <a:off x="0" y="0"/>
+          <a:ext cx="0" cy="0"/>
+          <a:chOff x="0" y="0"/>
+          <a:chExt cx="0" cy="0"/>
+        </a:xfrm>
+      </p:grpSpPr>
+      <p:pic>
+        <p:nvPicPr>
+          <p:cNvPr id="2" name="図 1" descr="ディレクティブを内側に入れた場合">
+            <a:extLst>
+              <a:ext uri="{FF2B5EF4-FFF2-40B4-BE49-F238E27FC236}">
+                <a16:creationId xmlns:a16="http://schemas.microsoft.com/office/drawing/2014/main" id="{EF07D2B2-900E-6184-AA1A-56248ECD8EC0}"/>
+              </a:ext>
+            </a:extLst>
+          </p:cNvPr>
+          <p:cNvPicPr>
+            <a:picLocks noChangeAspect="1"/>
+          </p:cNvPicPr>
+          <p:nvPr/>
+        </p:nvPicPr>
+        <p:blipFill>
+          <a:blip r:embed="rId2"/>
+          <a:stretch>
+            <a:fillRect/>
+          </a:stretch>
+        </p:blipFill>
+        <p:spPr>
+          <a:xfrm>
+            <a:off x="1238250" y="1146816"/>
+            <a:ext cx="7429500" cy="4564367"/>
+          </a:xfrm>
+          <a:prstGeom prst="rect">
+            <a:avLst/>
+          </a:prstGeom>
+        </p:spPr>
+      </p:pic>
+    </p:spTree>
+    <p:extLst>
+      <p:ext uri="{BB962C8B-B14F-4D97-AF65-F5344CB8AC3E}">
+        <p14:creationId xmlns:p14="http://schemas.microsoft.com/office/powerpoint/2010/main" val="1736146002"/>
+      </p:ext>
+    </p:extLst>
+  </p:cSld>
+  <p:clrMapOvr>
+    <a:masterClrMapping/>
+  </p:clrMapOvr>
+</p:sld>
+</file>
+
+<file path=ppt/slides/slide6.xml><?xml version="1.0" encoding="utf-8"?>
+<p:sld xmlns:a="http://schemas.openxmlformats.org/drawingml/2006/main" xmlns:r="http://schemas.openxmlformats.org/officeDocument/2006/relationships" xmlns:p="http://schemas.openxmlformats.org/presentationml/2006/main">
+  <p:cSld>
+    <p:spTree>
+      <p:nvGrpSpPr>
+        <p:cNvPr id="1" name=""/>
+        <p:cNvGrpSpPr/>
+        <p:nvPr/>
+      </p:nvGrpSpPr>
+      <p:grpSpPr>
+        <a:xfrm>
+          <a:off x="0" y="0"/>
+          <a:ext cx="0" cy="0"/>
+          <a:chOff x="0" y="0"/>
+          <a:chExt cx="0" cy="0"/>
+        </a:xfrm>
+      </p:grpSpPr>
+      <p:pic>
+        <p:nvPicPr>
+          <p:cNvPr id="2" name="図 1" descr="ディレクティブを内側に入れた場合">
+            <a:extLst>
+              <a:ext uri="{FF2B5EF4-FFF2-40B4-BE49-F238E27FC236}">
+                <a16:creationId xmlns:a16="http://schemas.microsoft.com/office/drawing/2014/main" id="{2F4F3DB2-D115-97C7-DC81-051F7A5268CC}"/>
+              </a:ext>
+            </a:extLst>
+          </p:cNvPr>
+          <p:cNvPicPr>
+            <a:picLocks noChangeAspect="1"/>
+          </p:cNvPicPr>
+          <p:nvPr/>
+        </p:nvPicPr>
+        <p:blipFill>
+          <a:blip r:embed="rId2"/>
+          <a:stretch>
+            <a:fillRect/>
+          </a:stretch>
+        </p:blipFill>
+        <p:spPr>
+          <a:xfrm>
+            <a:off x="1238250" y="1146816"/>
+            <a:ext cx="7429500" cy="4564367"/>
+          </a:xfrm>
+          <a:prstGeom prst="rect">
+            <a:avLst/>
+          </a:prstGeom>
+        </p:spPr>
+      </p:pic>
+      <p:sp>
+        <p:nvSpPr>
+          <p:cNvPr id="4" name="テキスト ボックス 3">
+            <a:extLst>
+              <a:ext uri="{FF2B5EF4-FFF2-40B4-BE49-F238E27FC236}">
+                <a16:creationId xmlns:a16="http://schemas.microsoft.com/office/drawing/2014/main" id="{B579582F-E0F7-A7D1-4434-1D533098F096}"/>
+              </a:ext>
+            </a:extLst>
+          </p:cNvPr>
+          <p:cNvSpPr txBox="1"/>
+          <p:nvPr/>
+        </p:nvSpPr>
+        <p:spPr>
+          <a:xfrm>
+            <a:off x="992560" y="1125232"/>
+            <a:ext cx="4953000" cy="461665"/>
+          </a:xfrm>
+          <a:prstGeom prst="rect">
+            <a:avLst/>
+          </a:prstGeom>
+          <a:solidFill>
+            <a:schemeClr val="bg1"/>
+          </a:solidFill>
+        </p:spPr>
+        <p:txBody>
+          <a:bodyPr wrap="square">
+            <a:spAutoFit/>
+          </a:bodyPr>
+          <a:lstStyle/>
+          <a:p>
+            <a:r>
+              <a:rPr lang="en-US" altLang="ja-JP" sz="2400" dirty="0"/>
+              <a:t>W</a:t>
+            </a:r>
+            <a:r>
+              <a:rPr lang="ja-JP" altLang="en-US" sz="2400"/>
+              <a:t>hen parallelizing the inner loop</a:t>
+            </a:r>
+          </a:p>
+        </p:txBody>
+      </p:sp>
+      <p:sp>
+        <p:nvSpPr>
+          <p:cNvPr id="5" name="テキスト ボックス 4">
+            <a:extLst>
+              <a:ext uri="{FF2B5EF4-FFF2-40B4-BE49-F238E27FC236}">
+                <a16:creationId xmlns:a16="http://schemas.microsoft.com/office/drawing/2014/main" id="{C16F0596-FF6B-286D-3677-1D61F5D8BF09}"/>
+              </a:ext>
+            </a:extLst>
+          </p:cNvPr>
+          <p:cNvSpPr txBox="1"/>
+          <p:nvPr/>
+        </p:nvSpPr>
+        <p:spPr>
+          <a:xfrm>
+            <a:off x="7401272" y="1639258"/>
+            <a:ext cx="1152128" cy="307777"/>
+          </a:xfrm>
+          <a:prstGeom prst="rect">
+            <a:avLst/>
+          </a:prstGeom>
+          <a:solidFill>
+            <a:schemeClr val="bg1"/>
+          </a:solidFill>
+        </p:spPr>
+        <p:txBody>
+          <a:bodyPr wrap="square">
+            <a:spAutoFit/>
+          </a:bodyPr>
+          <a:lstStyle/>
+          <a:p>
+            <a:r>
+              <a:rPr lang="en-US" altLang="ja-JP" sz="1400" dirty="0"/>
+              <a:t>Overhead</a:t>
+            </a:r>
+            <a:endParaRPr lang="ja-JP" altLang="en-US" sz="1400"/>
+          </a:p>
+        </p:txBody>
+      </p:sp>
+      <p:sp>
+        <p:nvSpPr>
+          <p:cNvPr id="6" name="テキスト ボックス 5">
+            <a:extLst>
+              <a:ext uri="{FF2B5EF4-FFF2-40B4-BE49-F238E27FC236}">
+                <a16:creationId xmlns:a16="http://schemas.microsoft.com/office/drawing/2014/main" id="{A4DD780E-6ED0-38A4-2788-51A76F78BF98}"/>
+              </a:ext>
+            </a:extLst>
+          </p:cNvPr>
+          <p:cNvSpPr txBox="1"/>
+          <p:nvPr/>
+        </p:nvSpPr>
+        <p:spPr>
+          <a:xfrm>
+            <a:off x="7401272" y="1947035"/>
+            <a:ext cx="1266478" cy="307777"/>
+          </a:xfrm>
+          <a:prstGeom prst="rect">
+            <a:avLst/>
+          </a:prstGeom>
+          <a:solidFill>
+            <a:schemeClr val="bg1"/>
+          </a:solidFill>
+        </p:spPr>
+        <p:txBody>
+          <a:bodyPr wrap="square">
+            <a:spAutoFit/>
+          </a:bodyPr>
+          <a:lstStyle/>
+          <a:p>
+            <a:r>
+              <a:rPr lang="en-US" altLang="ja-JP" sz="1400" dirty="0"/>
+              <a:t>Computation</a:t>
+            </a:r>
+            <a:endParaRPr lang="ja-JP" altLang="en-US" sz="1400"/>
+          </a:p>
+        </p:txBody>
+      </p:sp>
+      <p:sp>
+        <p:nvSpPr>
+          <p:cNvPr id="7" name="テキスト ボックス 6">
+            <a:extLst>
+              <a:ext uri="{FF2B5EF4-FFF2-40B4-BE49-F238E27FC236}">
+                <a16:creationId xmlns:a16="http://schemas.microsoft.com/office/drawing/2014/main" id="{F710EE6C-3261-3338-BE8D-CF69D4DAACFA}"/>
+              </a:ext>
+            </a:extLst>
+          </p:cNvPr>
+          <p:cNvSpPr txBox="1"/>
+          <p:nvPr/>
+        </p:nvSpPr>
+        <p:spPr>
+          <a:xfrm>
+            <a:off x="3728864" y="5301208"/>
+            <a:ext cx="1584176" cy="307777"/>
+          </a:xfrm>
+          <a:prstGeom prst="rect">
+            <a:avLst/>
+          </a:prstGeom>
+          <a:solidFill>
+            <a:schemeClr val="bg1"/>
+          </a:solidFill>
+        </p:spPr>
+        <p:txBody>
+          <a:bodyPr wrap="square">
+            <a:spAutoFit/>
+          </a:bodyPr>
+          <a:lstStyle/>
+          <a:p>
+            <a:r>
+              <a:rPr lang="ja-JP" altLang="ja-JP" sz="1400"/>
+              <a:t>Number of Threads</a:t>
+            </a:r>
+            <a:endParaRPr lang="ja-JP" altLang="en-US" sz="1400"/>
+          </a:p>
+        </p:txBody>
+      </p:sp>
+    </p:spTree>
+    <p:extLst>
+      <p:ext uri="{BB962C8B-B14F-4D97-AF65-F5344CB8AC3E}">
+        <p14:creationId xmlns:p14="http://schemas.microsoft.com/office/powerpoint/2010/main" val="2819822184"/>
+      </p:ext>
+    </p:extLst>
+  </p:cSld>
+  <p:clrMapOvr>
+    <a:masterClrMapping/>
+  </p:clrMapOvr>
+</p:sld>
+</file>
+
 <file path=ppt/slides/slide7.xml><?xml version="1.0" encoding="utf-8"?>
+<p:sld xmlns:a="http://schemas.openxmlformats.org/drawingml/2006/main" xmlns:r="http://schemas.openxmlformats.org/officeDocument/2006/relationships" xmlns:p="http://schemas.openxmlformats.org/presentationml/2006/main">
+  <p:cSld>
+    <p:spTree>
+      <p:nvGrpSpPr>
+        <p:cNvPr id="1" name=""/>
+        <p:cNvGrpSpPr/>
+        <p:nvPr/>
+      </p:nvGrpSpPr>
+      <p:grpSpPr>
+        <a:xfrm>
+          <a:off x="0" y="0"/>
+          <a:ext cx="0" cy="0"/>
+          <a:chOff x="0" y="0"/>
+          <a:chExt cx="0" cy="0"/>
+        </a:xfrm>
+      </p:grpSpPr>
+      <p:pic>
+        <p:nvPicPr>
+          <p:cNvPr id="2" name="図 1" descr="ディレクティブを外側に入れた場合">
+            <a:extLst>
+              <a:ext uri="{FF2B5EF4-FFF2-40B4-BE49-F238E27FC236}">
+                <a16:creationId xmlns:a16="http://schemas.microsoft.com/office/drawing/2014/main" id="{BE6B0BD2-9E63-CD70-1AFA-ADF7FC8A659F}"/>
+              </a:ext>
+            </a:extLst>
+          </p:cNvPr>
+          <p:cNvPicPr>
+            <a:picLocks noChangeAspect="1"/>
+          </p:cNvPicPr>
+          <p:nvPr/>
+        </p:nvPicPr>
+        <p:blipFill>
+          <a:blip r:embed="rId2"/>
+          <a:stretch>
+            <a:fillRect/>
+          </a:stretch>
+        </p:blipFill>
+        <p:spPr>
+          <a:xfrm>
+            <a:off x="1238250" y="1139171"/>
+            <a:ext cx="7429500" cy="4579658"/>
+          </a:xfrm>
+          <a:prstGeom prst="rect">
+            <a:avLst/>
+          </a:prstGeom>
+        </p:spPr>
+      </p:pic>
+      <p:sp>
+        <p:nvSpPr>
+          <p:cNvPr id="3" name="テキスト ボックス 2">
+            <a:extLst>
+              <a:ext uri="{FF2B5EF4-FFF2-40B4-BE49-F238E27FC236}">
+                <a16:creationId xmlns:a16="http://schemas.microsoft.com/office/drawing/2014/main" id="{5CE82331-170E-A604-2B80-F5731966814A}"/>
+              </a:ext>
+            </a:extLst>
+          </p:cNvPr>
+          <p:cNvSpPr txBox="1"/>
+          <p:nvPr/>
+        </p:nvSpPr>
+        <p:spPr>
+          <a:xfrm>
+            <a:off x="992560" y="1125232"/>
+            <a:ext cx="4953000" cy="461665"/>
+          </a:xfrm>
+          <a:prstGeom prst="rect">
+            <a:avLst/>
+          </a:prstGeom>
+          <a:solidFill>
+            <a:schemeClr val="bg1"/>
+          </a:solidFill>
+        </p:spPr>
+        <p:txBody>
+          <a:bodyPr wrap="square">
+            <a:spAutoFit/>
+          </a:bodyPr>
+          <a:lstStyle/>
+          <a:p>
+            <a:r>
+              <a:rPr lang="en-US" altLang="ja-JP" sz="2400" dirty="0"/>
+              <a:t>W</a:t>
+            </a:r>
+            <a:r>
+              <a:rPr lang="ja-JP" altLang="en-US" sz="2400"/>
+              <a:t>hen parallelizing the </a:t>
+            </a:r>
+            <a:r>
+              <a:rPr lang="en-US" altLang="ja-JP" sz="2400" dirty="0"/>
+              <a:t>outer</a:t>
+            </a:r>
+            <a:r>
+              <a:rPr lang="ja-JP" altLang="en-US" sz="2400"/>
+              <a:t> loop</a:t>
+            </a:r>
+          </a:p>
+        </p:txBody>
+      </p:sp>
+      <p:sp>
+        <p:nvSpPr>
+          <p:cNvPr id="4" name="テキスト ボックス 3">
+            <a:extLst>
+              <a:ext uri="{FF2B5EF4-FFF2-40B4-BE49-F238E27FC236}">
+                <a16:creationId xmlns:a16="http://schemas.microsoft.com/office/drawing/2014/main" id="{87473E90-3807-23FA-CC54-48327A27743B}"/>
+              </a:ext>
+            </a:extLst>
+          </p:cNvPr>
+          <p:cNvSpPr txBox="1"/>
+          <p:nvPr/>
+        </p:nvSpPr>
+        <p:spPr>
+          <a:xfrm>
+            <a:off x="7432517" y="1619772"/>
+            <a:ext cx="1152128" cy="307777"/>
+          </a:xfrm>
+          <a:prstGeom prst="rect">
+            <a:avLst/>
+          </a:prstGeom>
+          <a:solidFill>
+            <a:schemeClr val="bg1"/>
+          </a:solidFill>
+        </p:spPr>
+        <p:txBody>
+          <a:bodyPr wrap="square">
+            <a:spAutoFit/>
+          </a:bodyPr>
+          <a:lstStyle/>
+          <a:p>
+            <a:r>
+              <a:rPr lang="en-US" altLang="ja-JP" sz="1400" dirty="0"/>
+              <a:t>Overhead</a:t>
+            </a:r>
+            <a:endParaRPr lang="ja-JP" altLang="en-US" sz="1400"/>
+          </a:p>
+        </p:txBody>
+      </p:sp>
+      <p:sp>
+        <p:nvSpPr>
+          <p:cNvPr id="5" name="テキスト ボックス 4">
+            <a:extLst>
+              <a:ext uri="{FF2B5EF4-FFF2-40B4-BE49-F238E27FC236}">
+                <a16:creationId xmlns:a16="http://schemas.microsoft.com/office/drawing/2014/main" id="{BCDCA964-E714-46F5-4D91-0D5F0C0ACAD8}"/>
+              </a:ext>
+            </a:extLst>
+          </p:cNvPr>
+          <p:cNvSpPr txBox="1"/>
+          <p:nvPr/>
+        </p:nvSpPr>
+        <p:spPr>
+          <a:xfrm>
+            <a:off x="7432517" y="1927549"/>
+            <a:ext cx="1266478" cy="307777"/>
+          </a:xfrm>
+          <a:prstGeom prst="rect">
+            <a:avLst/>
+          </a:prstGeom>
+          <a:solidFill>
+            <a:schemeClr val="bg1"/>
+          </a:solidFill>
+        </p:spPr>
+        <p:txBody>
+          <a:bodyPr wrap="square">
+            <a:spAutoFit/>
+          </a:bodyPr>
+          <a:lstStyle/>
+          <a:p>
+            <a:r>
+              <a:rPr lang="en-US" altLang="ja-JP" sz="1400" dirty="0"/>
+              <a:t>Computation</a:t>
+            </a:r>
+            <a:endParaRPr lang="ja-JP" altLang="en-US" sz="1400"/>
+          </a:p>
+        </p:txBody>
+      </p:sp>
+      <p:sp>
+        <p:nvSpPr>
+          <p:cNvPr id="6" name="テキスト ボックス 5">
+            <a:extLst>
+              <a:ext uri="{FF2B5EF4-FFF2-40B4-BE49-F238E27FC236}">
+                <a16:creationId xmlns:a16="http://schemas.microsoft.com/office/drawing/2014/main" id="{F6698695-EE55-C544-F910-2BDC4B2C7A17}"/>
+              </a:ext>
+            </a:extLst>
+          </p:cNvPr>
+          <p:cNvSpPr txBox="1"/>
+          <p:nvPr/>
+        </p:nvSpPr>
+        <p:spPr>
+          <a:xfrm>
+            <a:off x="3728864" y="5301208"/>
+            <a:ext cx="1584176" cy="307777"/>
+          </a:xfrm>
+          <a:prstGeom prst="rect">
+            <a:avLst/>
+          </a:prstGeom>
+          <a:solidFill>
+            <a:schemeClr val="bg1"/>
+          </a:solidFill>
+        </p:spPr>
+        <p:txBody>
+          <a:bodyPr wrap="square">
+            <a:spAutoFit/>
+          </a:bodyPr>
+          <a:lstStyle/>
+          <a:p>
+            <a:r>
+              <a:rPr lang="ja-JP" altLang="ja-JP" sz="1400"/>
+              <a:t>Number of Threads</a:t>
+            </a:r>
+            <a:endParaRPr lang="ja-JP" altLang="en-US" sz="1400"/>
+          </a:p>
+        </p:txBody>
+      </p:sp>
+    </p:spTree>
+    <p:extLst>
+      <p:ext uri="{BB962C8B-B14F-4D97-AF65-F5344CB8AC3E}">
+        <p14:creationId xmlns:p14="http://schemas.microsoft.com/office/powerpoint/2010/main" val="3257654245"/>
+      </p:ext>
+    </p:extLst>
+  </p:cSld>
+  <p:clrMapOvr>
+    <a:masterClrMapping/>
+  </p:clrMapOvr>
+</p:sld>
+</file>
+
+<file path=ppt/slides/slide8.xml><?xml version="1.0" encoding="utf-8"?>
+<p:sld xmlns:a="http://schemas.openxmlformats.org/drawingml/2006/main" xmlns:r="http://schemas.openxmlformats.org/officeDocument/2006/relationships" xmlns:p="http://schemas.openxmlformats.org/presentationml/2006/main">
+  <p:cSld>
+    <p:spTree>
+      <p:nvGrpSpPr>
+        <p:cNvPr id="1" name="">
+          <a:extLst>
+            <a:ext uri="{FF2B5EF4-FFF2-40B4-BE49-F238E27FC236}">
+              <a16:creationId xmlns:a16="http://schemas.microsoft.com/office/drawing/2014/main" id="{EB075896-D8E3-1B45-409C-782F93CD7810}"/>
+            </a:ext>
+          </a:extLst>
+        </p:cNvPr>
+        <p:cNvGrpSpPr/>
+        <p:nvPr/>
+      </p:nvGrpSpPr>
+      <p:grpSpPr>
+        <a:xfrm>
+          <a:off x="0" y="0"/>
+          <a:ext cx="0" cy="0"/>
+          <a:chOff x="0" y="0"/>
+          <a:chExt cx="0" cy="0"/>
+        </a:xfrm>
+      </p:grpSpPr>
+      <p:pic>
+        <p:nvPicPr>
+          <p:cNvPr id="2" name="図 1" descr="ディレクティブを外側に入れた場合">
+            <a:extLst>
+              <a:ext uri="{FF2B5EF4-FFF2-40B4-BE49-F238E27FC236}">
+                <a16:creationId xmlns:a16="http://schemas.microsoft.com/office/drawing/2014/main" id="{F12F115C-D9B1-72AC-91AA-EC8CC9391A7A}"/>
+              </a:ext>
+            </a:extLst>
+          </p:cNvPr>
+          <p:cNvPicPr>
+            <a:picLocks noChangeAspect="1"/>
+          </p:cNvPicPr>
+          <p:nvPr/>
+        </p:nvPicPr>
+        <p:blipFill>
+          <a:blip r:embed="rId2"/>
+          <a:stretch>
+            <a:fillRect/>
+          </a:stretch>
+        </p:blipFill>
+        <p:spPr>
+          <a:xfrm>
+            <a:off x="1238250" y="1139171"/>
+            <a:ext cx="7429500" cy="4579658"/>
+          </a:xfrm>
+          <a:prstGeom prst="rect">
+            <a:avLst/>
+          </a:prstGeom>
+        </p:spPr>
+      </p:pic>
+    </p:spTree>
+    <p:extLst>
+      <p:ext uri="{BB962C8B-B14F-4D97-AF65-F5344CB8AC3E}">
+        <p14:creationId xmlns:p14="http://schemas.microsoft.com/office/powerpoint/2010/main" val="2016168069"/>
+      </p:ext>
+    </p:extLst>
+  </p:cSld>
+  <p:clrMapOvr>
+    <a:masterClrMapping/>
+  </p:clrMapOvr>
+</p:sld>
+</file>
+
+<file path=ppt/slides/slide9.xml><?xml version="1.0" encoding="utf-8"?>
 <p:sld xmlns:a="http://schemas.openxmlformats.org/drawingml/2006/main" xmlns:r="http://schemas.openxmlformats.org/officeDocument/2006/relationships" xmlns:p="http://schemas.openxmlformats.org/presentationml/2006/main">
   <p:cSld>
     <p:spTree>
@@ -6050,209 +6704,6 @@
             <a:r>
               <a:rPr kumimoji="1" lang="ja-JP" altLang="en-US"/>
               <a:t>並列化効率</a:t>
-            </a:r>
-          </a:p>
-        </p:txBody>
-      </p:sp>
-    </p:spTree>
-    <p:extLst>
-      <p:ext uri="{BB962C8B-B14F-4D97-AF65-F5344CB8AC3E}">
-        <p14:creationId xmlns:p14="http://schemas.microsoft.com/office/powerpoint/2010/main" val="5540923"/>
-      </p:ext>
-    </p:extLst>
-  </p:cSld>
-  <p:clrMapOvr>
-    <a:masterClrMapping/>
-  </p:clrMapOvr>
-</p:sld>
-</file>
-
-<file path=ppt/slides/slide8.xml><?xml version="1.0" encoding="utf-8"?>
-<p:sld xmlns:a="http://schemas.openxmlformats.org/drawingml/2006/main" xmlns:r="http://schemas.openxmlformats.org/officeDocument/2006/relationships" xmlns:p="http://schemas.openxmlformats.org/presentationml/2006/main">
-  <p:cSld>
-    <p:spTree>
-      <p:nvGrpSpPr>
-        <p:cNvPr id="1" name=""/>
-        <p:cNvGrpSpPr/>
-        <p:nvPr/>
-      </p:nvGrpSpPr>
-      <p:grpSpPr>
-        <a:xfrm>
-          <a:off x="0" y="0"/>
-          <a:ext cx="0" cy="0"/>
-          <a:chOff x="0" y="0"/>
-          <a:chExt cx="0" cy="0"/>
-        </a:xfrm>
-      </p:grpSpPr>
-      <p:pic>
-        <p:nvPicPr>
-          <p:cNvPr id="2" name="図 1">
-            <a:extLst>
-              <a:ext uri="{FF2B5EF4-FFF2-40B4-BE49-F238E27FC236}">
-                <a16:creationId xmlns:a16="http://schemas.microsoft.com/office/drawing/2014/main" id="{E72C49AB-44CB-F74E-9F08-ACE909D7372F}"/>
-              </a:ext>
-            </a:extLst>
-          </p:cNvPr>
-          <p:cNvPicPr>
-            <a:picLocks noChangeAspect="1"/>
-          </p:cNvPicPr>
-          <p:nvPr/>
-        </p:nvPicPr>
-        <p:blipFill>
-          <a:blip r:embed="rId2"/>
-          <a:stretch>
-            <a:fillRect/>
-          </a:stretch>
-        </p:blipFill>
-        <p:spPr>
-          <a:xfrm>
-            <a:off x="4592960" y="1052736"/>
-            <a:ext cx="4064000" cy="3048000"/>
-          </a:xfrm>
-          <a:prstGeom prst="rect">
-            <a:avLst/>
-          </a:prstGeom>
-        </p:spPr>
-      </p:pic>
-      <p:pic>
-        <p:nvPicPr>
-          <p:cNvPr id="3" name="図 2">
-            <a:extLst>
-              <a:ext uri="{FF2B5EF4-FFF2-40B4-BE49-F238E27FC236}">
-                <a16:creationId xmlns:a16="http://schemas.microsoft.com/office/drawing/2014/main" id="{3B0E9ACC-C7CD-FD48-A0CB-FEF5F5402F1C}"/>
-              </a:ext>
-            </a:extLst>
-          </p:cNvPr>
-          <p:cNvPicPr>
-            <a:picLocks noChangeAspect="1"/>
-          </p:cNvPicPr>
-          <p:nvPr/>
-        </p:nvPicPr>
-        <p:blipFill>
-          <a:blip r:embed="rId3"/>
-          <a:stretch>
-            <a:fillRect/>
-          </a:stretch>
-        </p:blipFill>
-        <p:spPr>
-          <a:xfrm>
-            <a:off x="272480" y="980728"/>
-            <a:ext cx="4064000" cy="3048000"/>
-          </a:xfrm>
-          <a:prstGeom prst="rect">
-            <a:avLst/>
-          </a:prstGeom>
-        </p:spPr>
-      </p:pic>
-      <p:sp>
-        <p:nvSpPr>
-          <p:cNvPr id="4" name="テキスト ボックス 3">
-            <a:extLst>
-              <a:ext uri="{FF2B5EF4-FFF2-40B4-BE49-F238E27FC236}">
-                <a16:creationId xmlns:a16="http://schemas.microsoft.com/office/drawing/2014/main" id="{945E13D4-EBB9-FD46-8DCD-4F203EF8875D}"/>
-              </a:ext>
-            </a:extLst>
-          </p:cNvPr>
-          <p:cNvSpPr txBox="1"/>
-          <p:nvPr/>
-        </p:nvSpPr>
-        <p:spPr>
-          <a:xfrm>
-            <a:off x="1928664" y="188640"/>
-            <a:ext cx="5729454" cy="369332"/>
-          </a:xfrm>
-          <a:prstGeom prst="rect">
-            <a:avLst/>
-          </a:prstGeom>
-          <a:noFill/>
-        </p:spPr>
-        <p:txBody>
-          <a:bodyPr wrap="square" rtlCol="0"/>
-          <a:lstStyle/>
-          <a:p>
-            <a:pPr>
-              <a:defRPr sz="1750"/>
-            </a:pPr>
-            <a:r>
-              <a:rPr kumimoji="1" lang="ja-JP" altLang="en-US" sz="1750"/>
-              <a:t>Scaling on a single node (12 cores x 2 sockets)</a:t>
-            </a:r>
-            <a:endParaRPr kumimoji="1" lang="ja-JP" altLang="en-US"/>
-          </a:p>
-        </p:txBody>
-      </p:sp>
-      <p:sp>
-        <p:nvSpPr>
-          <p:cNvPr id="5" name="テキスト ボックス 4">
-            <a:extLst>
-              <a:ext uri="{FF2B5EF4-FFF2-40B4-BE49-F238E27FC236}">
-                <a16:creationId xmlns:a16="http://schemas.microsoft.com/office/drawing/2014/main" id="{B5E7FE39-4188-A945-951F-59A75AF5A6A7}"/>
-              </a:ext>
-            </a:extLst>
-          </p:cNvPr>
-          <p:cNvSpPr txBox="1"/>
-          <p:nvPr/>
-        </p:nvSpPr>
-        <p:spPr>
-          <a:xfrm>
-            <a:off x="1352600" y="692696"/>
-            <a:ext cx="1684060" cy="369332"/>
-          </a:xfrm>
-          <a:prstGeom prst="rect">
-            <a:avLst/>
-          </a:prstGeom>
-          <a:noFill/>
-        </p:spPr>
-        <p:txBody>
-          <a:bodyPr wrap="square" rtlCol="0">
-            <a:normAutofit/>
-          </a:bodyPr>
-          <a:lstStyle/>
-          <a:p>
-            <a:pPr>
-              <a:defRPr/>
-            </a:pPr>
-            <a:r>
-              <a:rPr kumimoji="1" lang="ja-JP" altLang="en-US"/>
-              <a:t>Execution time</a:t>
-            </a:r>
-          </a:p>
-        </p:txBody>
-      </p:sp>
-      <p:sp>
-        <p:nvSpPr>
-          <p:cNvPr id="6" name="テキスト ボックス 5">
-            <a:extLst>
-              <a:ext uri="{FF2B5EF4-FFF2-40B4-BE49-F238E27FC236}">
-                <a16:creationId xmlns:a16="http://schemas.microsoft.com/office/drawing/2014/main" id="{F20085AF-BAB7-B043-B964-5B3833EBB4B4}"/>
-              </a:ext>
-            </a:extLst>
-          </p:cNvPr>
-          <p:cNvSpPr txBox="1"/>
-          <p:nvPr/>
-        </p:nvSpPr>
-        <p:spPr>
-          <a:xfrm>
-            <a:off x="6105128" y="692696"/>
-            <a:ext cx="1872208" cy="369332"/>
-          </a:xfrm>
-          <a:prstGeom prst="rect">
-            <a:avLst/>
-          </a:prstGeom>
-          <a:noFill/>
-        </p:spPr>
-        <p:txBody>
-          <a:bodyPr wrap="square" rtlCol="0">
-            <a:normAutofit/>
-          </a:bodyPr>
-          <a:lstStyle/>
-          <a:p>
-            <a:pPr>
-              <a:defRPr/>
-            </a:pPr>
-            <a:r>
-              <a:rPr kumimoji="1" lang="ja-JP" altLang="en-US"/>
-              <a:t>Parallel efficiency</a:t>
             </a:r>
           </a:p>
         </p:txBody>

--- a/site-assets/sources/day6/fig-ja-en.pptx
+++ b/site-assets/sources/day6/fig-ja-en.pptx
@@ -14,8 +14,8 @@
     <p:sldId id="260" r:id="rId5"/>
     <p:sldId id="263" r:id="rId6"/>
     <p:sldId id="262" r:id="rId7"/>
-    <p:sldId id="264" r:id="rId8"/>
-    <p:sldId id="265" r:id="rId9"/>
+    <p:sldId id="265" r:id="rId8"/>
+    <p:sldId id="264" r:id="rId9"/>
     <p:sldId id="258" r:id="rId10"/>
     <p:sldId id="261" r:id="rId11"/>
   </p:sldIdLst>
@@ -6217,6 +6217,72 @@
   <p:cSld>
     <p:spTree>
       <p:nvGrpSpPr>
+        <p:cNvPr id="1" name="">
+          <a:extLst>
+            <a:ext uri="{FF2B5EF4-FFF2-40B4-BE49-F238E27FC236}">
+              <a16:creationId xmlns:a16="http://schemas.microsoft.com/office/drawing/2014/main" id="{EB075896-D8E3-1B45-409C-782F93CD7810}"/>
+            </a:ext>
+          </a:extLst>
+        </p:cNvPr>
+        <p:cNvGrpSpPr/>
+        <p:nvPr/>
+      </p:nvGrpSpPr>
+      <p:grpSpPr>
+        <a:xfrm>
+          <a:off x="0" y="0"/>
+          <a:ext cx="0" cy="0"/>
+          <a:chOff x="0" y="0"/>
+          <a:chExt cx="0" cy="0"/>
+        </a:xfrm>
+      </p:grpSpPr>
+      <p:pic>
+        <p:nvPicPr>
+          <p:cNvPr id="2" name="図 1" descr="ディレクティブを外側に入れた場合">
+            <a:extLst>
+              <a:ext uri="{FF2B5EF4-FFF2-40B4-BE49-F238E27FC236}">
+                <a16:creationId xmlns:a16="http://schemas.microsoft.com/office/drawing/2014/main" id="{F12F115C-D9B1-72AC-91AA-EC8CC9391A7A}"/>
+              </a:ext>
+            </a:extLst>
+          </p:cNvPr>
+          <p:cNvPicPr>
+            <a:picLocks noChangeAspect="1"/>
+          </p:cNvPicPr>
+          <p:nvPr/>
+        </p:nvPicPr>
+        <p:blipFill>
+          <a:blip r:embed="rId2"/>
+          <a:stretch>
+            <a:fillRect/>
+          </a:stretch>
+        </p:blipFill>
+        <p:spPr>
+          <a:xfrm>
+            <a:off x="1238250" y="1139171"/>
+            <a:ext cx="7429500" cy="4579658"/>
+          </a:xfrm>
+          <a:prstGeom prst="rect">
+            <a:avLst/>
+          </a:prstGeom>
+        </p:spPr>
+      </p:pic>
+    </p:spTree>
+    <p:extLst>
+      <p:ext uri="{BB962C8B-B14F-4D97-AF65-F5344CB8AC3E}">
+        <p14:creationId xmlns:p14="http://schemas.microsoft.com/office/powerpoint/2010/main" val="2016168069"/>
+      </p:ext>
+    </p:extLst>
+  </p:cSld>
+  <p:clrMapOvr>
+    <a:masterClrMapping/>
+  </p:clrMapOvr>
+</p:sld>
+</file>
+
+<file path=ppt/slides/slide8.xml><?xml version="1.0" encoding="utf-8"?>
+<p:sld xmlns:a="http://schemas.openxmlformats.org/drawingml/2006/main" xmlns:r="http://schemas.openxmlformats.org/officeDocument/2006/relationships" xmlns:p="http://schemas.openxmlformats.org/presentationml/2006/main">
+  <p:cSld>
+    <p:spTree>
+      <p:nvGrpSpPr>
         <p:cNvPr id="1" name=""/>
         <p:cNvGrpSpPr/>
         <p:nvPr/>
@@ -6426,72 +6492,6 @@
     <p:extLst>
       <p:ext uri="{BB962C8B-B14F-4D97-AF65-F5344CB8AC3E}">
         <p14:creationId xmlns:p14="http://schemas.microsoft.com/office/powerpoint/2010/main" val="3257654245"/>
-      </p:ext>
-    </p:extLst>
-  </p:cSld>
-  <p:clrMapOvr>
-    <a:masterClrMapping/>
-  </p:clrMapOvr>
-</p:sld>
-</file>
-
-<file path=ppt/slides/slide8.xml><?xml version="1.0" encoding="utf-8"?>
-<p:sld xmlns:a="http://schemas.openxmlformats.org/drawingml/2006/main" xmlns:r="http://schemas.openxmlformats.org/officeDocument/2006/relationships" xmlns:p="http://schemas.openxmlformats.org/presentationml/2006/main">
-  <p:cSld>
-    <p:spTree>
-      <p:nvGrpSpPr>
-        <p:cNvPr id="1" name="">
-          <a:extLst>
-            <a:ext uri="{FF2B5EF4-FFF2-40B4-BE49-F238E27FC236}">
-              <a16:creationId xmlns:a16="http://schemas.microsoft.com/office/drawing/2014/main" id="{EB075896-D8E3-1B45-409C-782F93CD7810}"/>
-            </a:ext>
-          </a:extLst>
-        </p:cNvPr>
-        <p:cNvGrpSpPr/>
-        <p:nvPr/>
-      </p:nvGrpSpPr>
-      <p:grpSpPr>
-        <a:xfrm>
-          <a:off x="0" y="0"/>
-          <a:ext cx="0" cy="0"/>
-          <a:chOff x="0" y="0"/>
-          <a:chExt cx="0" cy="0"/>
-        </a:xfrm>
-      </p:grpSpPr>
-      <p:pic>
-        <p:nvPicPr>
-          <p:cNvPr id="2" name="図 1" descr="ディレクティブを外側に入れた場合">
-            <a:extLst>
-              <a:ext uri="{FF2B5EF4-FFF2-40B4-BE49-F238E27FC236}">
-                <a16:creationId xmlns:a16="http://schemas.microsoft.com/office/drawing/2014/main" id="{F12F115C-D9B1-72AC-91AA-EC8CC9391A7A}"/>
-              </a:ext>
-            </a:extLst>
-          </p:cNvPr>
-          <p:cNvPicPr>
-            <a:picLocks noChangeAspect="1"/>
-          </p:cNvPicPr>
-          <p:nvPr/>
-        </p:nvPicPr>
-        <p:blipFill>
-          <a:blip r:embed="rId2"/>
-          <a:stretch>
-            <a:fillRect/>
-          </a:stretch>
-        </p:blipFill>
-        <p:spPr>
-          <a:xfrm>
-            <a:off x="1238250" y="1139171"/>
-            <a:ext cx="7429500" cy="4579658"/>
-          </a:xfrm>
-          <a:prstGeom prst="rect">
-            <a:avLst/>
-          </a:prstGeom>
-        </p:spPr>
-      </p:pic>
-    </p:spTree>
-    <p:extLst>
-      <p:ext uri="{BB962C8B-B14F-4D97-AF65-F5344CB8AC3E}">
-        <p14:creationId xmlns:p14="http://schemas.microsoft.com/office/powerpoint/2010/main" val="2016168069"/>
       </p:ext>
     </p:extLst>
   </p:cSld>
